--- a/docs/DucStrange-Option-Output.pptx
+++ b/docs/DucStrange-Option-Output.pptx
@@ -1,28 +1,29 @@
 
 <file path=ppt/presentation.xml><?xml version="1.0" encoding="utf-8"?>
-<p:presentation xmlns:a="http://schemas.openxmlformats.org/drawingml/2006/main" xmlns:r="http://schemas.openxmlformats.org/officeDocument/2006/relationships" xmlns:p="http://schemas.openxmlformats.org/presentationml/2006/main" saveSubsetFonts="1" autoCompressPictures="0">
+<p:presentation xmlns:a="http://schemas.openxmlformats.org/drawingml/2006/main" xmlns:r="http://schemas.openxmlformats.org/officeDocument/2006/relationships" xmlns:p="http://schemas.openxmlformats.org/presentationml/2006/main" autoCompressPictures="0">
   <p:sldMasterIdLst>
     <p:sldMasterId id="2147483648" r:id="rId1"/>
   </p:sldMasterIdLst>
   <p:notesMasterIdLst>
-    <p:notesMasterId r:id="rId11"/>
+    <p:notesMasterId r:id="rId4"/>
   </p:notesMasterIdLst>
   <p:sldIdLst>
-    <p:sldId id="261" r:id="rId2"/>
-    <p:sldId id="265" r:id="rId3"/>
-    <p:sldId id="257" r:id="rId4"/>
-    <p:sldId id="258" r:id="rId5"/>
-    <p:sldId id="259" r:id="rId6"/>
-    <p:sldId id="260" r:id="rId7"/>
-    <p:sldId id="262" r:id="rId8"/>
-    <p:sldId id="264" r:id="rId9"/>
-    <p:sldId id="263" r:id="rId10"/>
+    <p:sldId id="261" r:id="rId3"/>
+    <p:sldId id="273" r:id="rId5"/>
+    <p:sldId id="265" r:id="rId6"/>
+    <p:sldId id="257" r:id="rId7"/>
+    <p:sldId id="258" r:id="rId8"/>
+    <p:sldId id="259" r:id="rId9"/>
+    <p:sldId id="260" r:id="rId10"/>
+    <p:sldId id="262" r:id="rId11"/>
+    <p:sldId id="264" r:id="rId12"/>
+    <p:sldId id="263" r:id="rId13"/>
   </p:sldIdLst>
   <p:sldSz cx="12192000" cy="6858000"/>
   <p:notesSz cx="6858000" cy="9144000"/>
   <p:defaultTextStyle>
     <a:defPPr>
-      <a:defRPr lang="en-VN"/>
+      <a:defRPr lang="en-US"/>
     </a:defPPr>
     <a:lvl1pPr marL="0" algn="l" defTabSz="914400" rtl="0" eaLnBrk="1" latinLnBrk="0" hangingPunct="1">
       <a:defRPr sz="1800" kern="1200">
@@ -120,13 +121,14 @@
       <p14:sectionLst xmlns:p14="http://schemas.microsoft.com/office/powerpoint/2010/main">
         <p14:section name="DocStrange" id="{2BA6BE37-5014-443A-8819-F5DA7B6F2100}">
           <p14:sldIdLst>
-            <p14:sldId id="261"/>
-            <p14:sldId id="265"/>
-            <p14:sldId id="257"/>
+            <p14:sldId id="260"/>
+            <p14:sldId id="262"/>
             <p14:sldId id="258"/>
             <p14:sldId id="259"/>
-            <p14:sldId id="260"/>
-            <p14:sldId id="262"/>
+            <p14:sldId id="265"/>
+            <p14:sldId id="261"/>
+            <p14:sldId id="273"/>
+            <p14:sldId id="257"/>
           </p14:sldIdLst>
         </p14:section>
         <p14:section name="docstrange_local" id="{49F6AACB-1F76-465E-B0B5-B9F3926CBDC2}">
@@ -140,9 +142,6 @@
           </p14:sldIdLst>
         </p14:section>
       </p14:sectionLst>
-    </p:ext>
-    <p:ext uri="{EFAFB233-063F-42B5-8137-9DF3F51BA10A}">
-      <p15:sldGuideLst xmlns:p15="http://schemas.microsoft.com/office/powerpoint/2012/main"/>
     </p:ext>
   </p:extLst>
 </p:presentation>
@@ -197,7 +196,7 @@
             </a:lvl1pPr>
           </a:lstStyle>
           <a:p>
-            <a:endParaRPr lang="en-VN"/>
+            <a:endParaRPr lang="en-US"/>
           </a:p>
         </p:txBody>
       </p:sp>
@@ -229,10 +228,9 @@
           </a:lstStyle>
           <a:p>
             <a:fld id="{7345AE7A-CA33-DB47-A094-C920B571FBEB}" type="datetimeFigureOut">
-              <a:rPr lang="en-VN" smtClean="0"/>
-              <a:t>03/17/2026</a:t>
+              <a:rPr lang="en-US" smtClean="0"/>
             </a:fld>
-            <a:endParaRPr lang="en-VN"/>
+            <a:endParaRPr lang="en-US"/>
           </a:p>
         </p:txBody>
       </p:sp>
@@ -265,7 +263,7 @@
           <a:bodyPr vert="horz" lIns="91440" tIns="45720" rIns="91440" bIns="45720" rtlCol="0" anchor="ctr"/>
           <a:lstStyle/>
           <a:p>
-            <a:endParaRPr lang="en-VN"/>
+            <a:endParaRPr lang="en-US"/>
           </a:p>
         </p:txBody>
       </p:sp>
@@ -297,6 +295,7 @@
               <a:rPr lang="en-US"/>
               <a:t>Click to edit Master text styles</a:t>
             </a:r>
+            <a:endParaRPr lang="en-US"/>
           </a:p>
           <a:p>
             <a:pPr lvl="1"/>
@@ -304,6 +303,7 @@
               <a:rPr lang="en-US"/>
               <a:t>Second level</a:t>
             </a:r>
+            <a:endParaRPr lang="en-US"/>
           </a:p>
           <a:p>
             <a:pPr lvl="2"/>
@@ -311,6 +311,7 @@
               <a:rPr lang="en-US"/>
               <a:t>Third level</a:t>
             </a:r>
+            <a:endParaRPr lang="en-US"/>
           </a:p>
           <a:p>
             <a:pPr lvl="3"/>
@@ -318,6 +319,7 @@
               <a:rPr lang="en-US"/>
               <a:t>Fourth level</a:t>
             </a:r>
+            <a:endParaRPr lang="en-US"/>
           </a:p>
           <a:p>
             <a:pPr lvl="4"/>
@@ -325,7 +327,7 @@
               <a:rPr lang="en-US"/>
               <a:t>Fifth level</a:t>
             </a:r>
-            <a:endParaRPr lang="en-VN"/>
+            <a:endParaRPr lang="en-US"/>
           </a:p>
         </p:txBody>
       </p:sp>
@@ -356,7 +358,7 @@
             </a:lvl1pPr>
           </a:lstStyle>
           <a:p>
-            <a:endParaRPr lang="en-VN"/>
+            <a:endParaRPr lang="en-US"/>
           </a:p>
         </p:txBody>
       </p:sp>
@@ -388,19 +390,13 @@
           </a:lstStyle>
           <a:p>
             <a:fld id="{96A33648-3A71-9246-A459-6F22AB07DEE3}" type="slidenum">
-              <a:rPr lang="en-VN" smtClean="0"/>
-              <a:t>‹#›</a:t>
+              <a:rPr lang="en-US" smtClean="0"/>
             </a:fld>
-            <a:endParaRPr lang="en-VN"/>
+            <a:endParaRPr lang="en-US"/>
           </a:p>
         </p:txBody>
       </p:sp>
     </p:spTree>
-    <p:extLst>
-      <p:ext uri="{BB962C8B-B14F-4D97-AF65-F5344CB8AC3E}">
-        <p14:creationId xmlns:p14="http://schemas.microsoft.com/office/powerpoint/2010/main" val="2749513065"/>
-      </p:ext>
-    </p:extLst>
   </p:cSld>
   <p:clrMap bg1="lt1" tx1="dk1" bg2="lt2" tx2="dk2" accent1="accent1" accent2="accent2" accent3="accent3" accent4="accent4" accent5="accent5" accent6="accent6" hlink="hlink" folHlink="folHlink"/>
   <p:notesStyle>
@@ -558,6 +554,7 @@
               <a:rPr lang="en-US" dirty="0"/>
               <a:t> stack):</a:t>
             </a:r>
+            <a:endParaRPr lang="en-US" dirty="0"/>
           </a:p>
           <a:p>
             <a:pPr marL="171450" indent="-171450">
@@ -625,7 +622,7 @@
             <a:endParaRPr lang="en-US" dirty="0"/>
           </a:p>
           <a:p>
-            <a:endParaRPr lang="en-VN" dirty="0"/>
+            <a:endParaRPr lang="en-US" dirty="0"/>
           </a:p>
         </p:txBody>
       </p:sp>
@@ -645,19 +642,13 @@
           <a:lstStyle/>
           <a:p>
             <a:fld id="{96A33648-3A71-9246-A459-6F22AB07DEE3}" type="slidenum">
-              <a:rPr lang="en-VN" smtClean="0"/>
-              <a:t>1</a:t>
+              <a:rPr lang="en-US" smtClean="0"/>
             </a:fld>
-            <a:endParaRPr lang="en-VN"/>
+            <a:endParaRPr lang="en-US"/>
           </a:p>
         </p:txBody>
       </p:sp>
     </p:spTree>
-    <p:extLst>
-      <p:ext uri="{BB962C8B-B14F-4D97-AF65-F5344CB8AC3E}">
-        <p14:creationId xmlns:p14="http://schemas.microsoft.com/office/powerpoint/2010/main" val="1605886263"/>
-      </p:ext>
-    </p:extLst>
   </p:cSld>
   <p:clrMapOvr>
     <a:masterClrMapping/>
@@ -674,74 +665,34 @@
         <p:cNvGrpSpPr/>
         <p:nvPr/>
       </p:nvGrpSpPr>
-      <p:grpSpPr>
-        <a:xfrm>
-          <a:off x="0" y="0"/>
-          <a:ext cx="0" cy="0"/>
-          <a:chOff x="0" y="0"/>
-          <a:chExt cx="0" cy="0"/>
-        </a:xfrm>
-      </p:grpSpPr>
+      <p:grpSpPr/>
       <p:sp>
         <p:nvSpPr>
           <p:cNvPr id="2" name="Slide Image Placeholder 1"/>
-          <p:cNvSpPr>
-            <a:spLocks noGrp="1" noRot="1" noChangeAspect="1"/>
-          </p:cNvSpPr>
+          <p:cNvSpPr/>
           <p:nvPr>
-            <p:ph type="sldImg"/>
+            <p:ph type="sldImg" idx="2"/>
           </p:nvPr>
         </p:nvSpPr>
         <p:spPr/>
       </p:sp>
       <p:sp>
         <p:nvSpPr>
-          <p:cNvPr id="3" name="Notes Placeholder 2"/>
-          <p:cNvSpPr>
-            <a:spLocks noGrp="1"/>
-          </p:cNvSpPr>
+          <p:cNvPr id="3" name="Text Placeholder 2"/>
+          <p:cNvSpPr/>
           <p:nvPr>
-            <p:ph type="body" idx="1"/>
+            <p:ph type="body" idx="3"/>
           </p:nvPr>
         </p:nvSpPr>
         <p:spPr/>
         <p:txBody>
           <a:bodyPr/>
-          <a:lstStyle/>
-          <a:p>
-            <a:endParaRPr lang="en-VN" dirty="0"/>
-          </a:p>
-        </p:txBody>
-      </p:sp>
-      <p:sp>
-        <p:nvSpPr>
-          <p:cNvPr id="4" name="Slide Number Placeholder 3"/>
-          <p:cNvSpPr>
-            <a:spLocks noGrp="1"/>
-          </p:cNvSpPr>
-          <p:nvPr>
-            <p:ph type="sldNum" sz="quarter" idx="5"/>
-          </p:nvPr>
-        </p:nvSpPr>
-        <p:spPr/>
-        <p:txBody>
-          <a:bodyPr/>
-          <a:lstStyle/>
-          <a:p>
-            <a:fld id="{96A33648-3A71-9246-A459-6F22AB07DEE3}" type="slidenum">
-              <a:rPr lang="en-VN" smtClean="0"/>
-              <a:t>6</a:t>
-            </a:fld>
-            <a:endParaRPr lang="en-VN"/>
+          <a:p>
+            <a:endParaRPr lang="en-US"/>
           </a:p>
         </p:txBody>
       </p:sp>
     </p:spTree>
-    <p:extLst>
-      <p:ext uri="{BB962C8B-B14F-4D97-AF65-F5344CB8AC3E}">
-        <p14:creationId xmlns:p14="http://schemas.microsoft.com/office/powerpoint/2010/main" val="1398850578"/>
-      </p:ext>
-    </p:extLst>
   </p:cSld>
   <p:clrMapOvr>
     <a:masterClrMapping/>
@@ -793,95 +744,7 @@
           <a:bodyPr/>
           <a:lstStyle/>
           <a:p>
-            <a:r>
-              <a:rPr lang="en-US" dirty="0" err="1"/>
-              <a:t>uname</a:t>
-            </a:r>
-            <a:r>
-              <a:rPr lang="en-US" dirty="0"/>
-              <a:t> –a</a:t>
-            </a:r>
-          </a:p>
-          <a:p>
             <a:endParaRPr lang="en-US" dirty="0"/>
-          </a:p>
-          <a:p>
-            <a:r>
-              <a:rPr lang="en-US" dirty="0" err="1"/>
-              <a:t>DocStrange</a:t>
-            </a:r>
-            <a:r>
-              <a:rPr lang="en-US" dirty="0"/>
-              <a:t> GPU requires </a:t>
-            </a:r>
-            <a:r>
-              <a:rPr lang="en-US" b="1" dirty="0"/>
-              <a:t>CUDA</a:t>
-            </a:r>
-            <a:r>
-              <a:rPr lang="en-US" dirty="0"/>
-              <a:t>, which only works with </a:t>
-            </a:r>
-            <a:r>
-              <a:rPr lang="en-US" b="1" dirty="0"/>
-              <a:t>NVIDIA GPUs on Linux/Windows</a:t>
-            </a:r>
-            <a:r>
-              <a:rPr lang="en-US" dirty="0"/>
-              <a:t>.</a:t>
-            </a:r>
-          </a:p>
-          <a:p>
-            <a:endParaRPr lang="en-US" dirty="0"/>
-          </a:p>
-          <a:p>
-            <a:endParaRPr lang="en-US" dirty="0"/>
-          </a:p>
-          <a:p>
-            <a:r>
-              <a:rPr lang="en-US" dirty="0" err="1"/>
-              <a:t>Pdfplumber</a:t>
-            </a:r>
-            <a:r>
-              <a:rPr lang="en-US" dirty="0"/>
-              <a:t> or </a:t>
-            </a:r>
-            <a:r>
-              <a:rPr lang="en-US" b="1" dirty="0"/>
-              <a:t>unstructured</a:t>
-            </a:r>
-            <a:r>
-              <a:rPr lang="en-US" dirty="0"/>
-              <a:t> =&gt; best case</a:t>
-            </a:r>
-          </a:p>
-          <a:p>
-            <a:endParaRPr lang="en-US" b="1" dirty="0"/>
-          </a:p>
-          <a:p>
-            <a:r>
-              <a:rPr lang="en-US" b="1" dirty="0"/>
-              <a:t>PDF → </a:t>
-            </a:r>
-            <a:r>
-              <a:rPr lang="en-US" b="1" dirty="0" err="1"/>
-              <a:t>pdfplumber</a:t>
-            </a:r>
-            <a:br>
-              <a:rPr lang="en-US" b="1" dirty="0"/>
-            </a:br>
-            <a:r>
-              <a:rPr lang="en-US" b="1" dirty="0"/>
-              <a:t>DOCX → python-docx</a:t>
-            </a:r>
-            <a:br>
-              <a:rPr lang="en-US" b="1" dirty="0"/>
-            </a:br>
-            <a:r>
-              <a:rPr lang="en-US" b="1" dirty="0"/>
-              <a:t>Images → tesseract</a:t>
-            </a:r>
-            <a:endParaRPr lang="en-VN" b="1" dirty="0"/>
           </a:p>
         </p:txBody>
       </p:sp>
@@ -901,19 +764,13 @@
           <a:lstStyle/>
           <a:p>
             <a:fld id="{96A33648-3A71-9246-A459-6F22AB07DEE3}" type="slidenum">
-              <a:rPr lang="en-VN" smtClean="0"/>
-              <a:t>7</a:t>
+              <a:rPr lang="en-US" smtClean="0"/>
             </a:fld>
-            <a:endParaRPr lang="en-VN"/>
+            <a:endParaRPr lang="en-US"/>
           </a:p>
         </p:txBody>
       </p:sp>
     </p:spTree>
-    <p:extLst>
-      <p:ext uri="{BB962C8B-B14F-4D97-AF65-F5344CB8AC3E}">
-        <p14:creationId xmlns:p14="http://schemas.microsoft.com/office/powerpoint/2010/main" val="2245637511"/>
-      </p:ext>
-    </p:extLst>
   </p:cSld>
   <p:clrMapOvr>
     <a:masterClrMapping/>
@@ -965,6 +822,175 @@
           <a:bodyPr/>
           <a:lstStyle/>
           <a:p>
+            <a:r>
+              <a:rPr lang="en-US" dirty="0" err="1"/>
+              <a:t>uname</a:t>
+            </a:r>
+            <a:r>
+              <a:rPr lang="en-US" dirty="0"/>
+              <a:t> –a</a:t>
+            </a:r>
+            <a:endParaRPr lang="en-US" dirty="0"/>
+          </a:p>
+          <a:p>
+            <a:endParaRPr lang="en-US" dirty="0"/>
+          </a:p>
+          <a:p>
+            <a:r>
+              <a:rPr lang="en-US" dirty="0" err="1"/>
+              <a:t>DocStrange</a:t>
+            </a:r>
+            <a:r>
+              <a:rPr lang="en-US" dirty="0"/>
+              <a:t> GPU requires </a:t>
+            </a:r>
+            <a:r>
+              <a:rPr lang="en-US" b="1" dirty="0"/>
+              <a:t>CUDA</a:t>
+            </a:r>
+            <a:r>
+              <a:rPr lang="en-US" dirty="0"/>
+              <a:t>, which only works with </a:t>
+            </a:r>
+            <a:r>
+              <a:rPr lang="en-US" b="1" dirty="0"/>
+              <a:t>NVIDIA GPUs on Linux/Windows</a:t>
+            </a:r>
+            <a:r>
+              <a:rPr lang="en-US" dirty="0"/>
+              <a:t>.</a:t>
+            </a:r>
+            <a:endParaRPr lang="en-US" dirty="0"/>
+          </a:p>
+          <a:p>
+            <a:endParaRPr lang="en-US" dirty="0"/>
+          </a:p>
+          <a:p>
+            <a:endParaRPr lang="en-US" dirty="0"/>
+          </a:p>
+          <a:p>
+            <a:r>
+              <a:rPr lang="en-US" dirty="0" err="1"/>
+              <a:t>Pdfplumber</a:t>
+            </a:r>
+            <a:r>
+              <a:rPr lang="en-US" dirty="0"/>
+              <a:t> or </a:t>
+            </a:r>
+            <a:r>
+              <a:rPr lang="en-US" b="1" dirty="0"/>
+              <a:t>unstructured</a:t>
+            </a:r>
+            <a:r>
+              <a:rPr lang="en-US" dirty="0"/>
+              <a:t> =&gt; best case</a:t>
+            </a:r>
+            <a:endParaRPr lang="en-US" dirty="0"/>
+          </a:p>
+          <a:p>
+            <a:endParaRPr lang="en-US" b="1" dirty="0"/>
+          </a:p>
+          <a:p>
+            <a:r>
+              <a:rPr lang="en-US" b="1" dirty="0"/>
+              <a:t>PDF → </a:t>
+            </a:r>
+            <a:r>
+              <a:rPr lang="en-US" b="1" dirty="0" err="1"/>
+              <a:t>pdfplumber</a:t>
+            </a:r>
+            <a:br>
+              <a:rPr lang="en-US" b="1" dirty="0"/>
+            </a:br>
+            <a:r>
+              <a:rPr lang="en-US" b="1" dirty="0"/>
+              <a:t>DOCX → python-docx</a:t>
+            </a:r>
+            <a:br>
+              <a:rPr lang="en-US" b="1" dirty="0"/>
+            </a:br>
+            <a:r>
+              <a:rPr lang="en-US" b="1" dirty="0"/>
+              <a:t>Images → tesseract</a:t>
+            </a:r>
+            <a:endParaRPr lang="en-US" b="1" dirty="0"/>
+          </a:p>
+        </p:txBody>
+      </p:sp>
+      <p:sp>
+        <p:nvSpPr>
+          <p:cNvPr id="4" name="Slide Number Placeholder 3"/>
+          <p:cNvSpPr>
+            <a:spLocks noGrp="1"/>
+          </p:cNvSpPr>
+          <p:nvPr>
+            <p:ph type="sldNum" sz="quarter" idx="5"/>
+          </p:nvPr>
+        </p:nvSpPr>
+        <p:spPr/>
+        <p:txBody>
+          <a:bodyPr/>
+          <a:lstStyle/>
+          <a:p>
+            <a:fld id="{96A33648-3A71-9246-A459-6F22AB07DEE3}" type="slidenum">
+              <a:rPr lang="en-US" smtClean="0"/>
+            </a:fld>
+            <a:endParaRPr lang="en-US"/>
+          </a:p>
+        </p:txBody>
+      </p:sp>
+    </p:spTree>
+  </p:cSld>
+  <p:clrMapOvr>
+    <a:masterClrMapping/>
+  </p:clrMapOvr>
+</p:notes>
+</file>
+
+<file path=ppt/notesSlides/notesSlide5.xml><?xml version="1.0" encoding="utf-8"?>
+<p:notes xmlns:a="http://schemas.openxmlformats.org/drawingml/2006/main" xmlns:r="http://schemas.openxmlformats.org/officeDocument/2006/relationships" xmlns:p="http://schemas.openxmlformats.org/presentationml/2006/main">
+  <p:cSld>
+    <p:spTree>
+      <p:nvGrpSpPr>
+        <p:cNvPr id="1" name=""/>
+        <p:cNvGrpSpPr/>
+        <p:nvPr/>
+      </p:nvGrpSpPr>
+      <p:grpSpPr>
+        <a:xfrm>
+          <a:off x="0" y="0"/>
+          <a:ext cx="0" cy="0"/>
+          <a:chOff x="0" y="0"/>
+          <a:chExt cx="0" cy="0"/>
+        </a:xfrm>
+      </p:grpSpPr>
+      <p:sp>
+        <p:nvSpPr>
+          <p:cNvPr id="2" name="Slide Image Placeholder 1"/>
+          <p:cNvSpPr>
+            <a:spLocks noGrp="1" noRot="1" noChangeAspect="1"/>
+          </p:cNvSpPr>
+          <p:nvPr>
+            <p:ph type="sldImg"/>
+          </p:nvPr>
+        </p:nvSpPr>
+        <p:spPr/>
+      </p:sp>
+      <p:sp>
+        <p:nvSpPr>
+          <p:cNvPr id="3" name="Notes Placeholder 2"/>
+          <p:cNvSpPr>
+            <a:spLocks noGrp="1"/>
+          </p:cNvSpPr>
+          <p:nvPr>
+            <p:ph type="body" idx="1"/>
+          </p:nvPr>
+        </p:nvSpPr>
+        <p:spPr/>
+        <p:txBody>
+          <a:bodyPr/>
+          <a:lstStyle/>
+          <a:p>
             <a:endParaRPr lang="en-US" dirty="0"/>
           </a:p>
         </p:txBody>
@@ -985,19 +1011,13 @@
           <a:lstStyle/>
           <a:p>
             <a:fld id="{96A33648-3A71-9246-A459-6F22AB07DEE3}" type="slidenum">
-              <a:rPr lang="en-VN" smtClean="0"/>
-              <a:t>9</a:t>
+              <a:rPr lang="en-US" smtClean="0"/>
             </a:fld>
-            <a:endParaRPr lang="en-VN"/>
+            <a:endParaRPr lang="en-US"/>
           </a:p>
         </p:txBody>
       </p:sp>
     </p:spTree>
-    <p:extLst>
-      <p:ext uri="{BB962C8B-B14F-4D97-AF65-F5344CB8AC3E}">
-        <p14:creationId xmlns:p14="http://schemas.microsoft.com/office/powerpoint/2010/main" val="2588280491"/>
-      </p:ext>
-    </p:extLst>
   </p:cSld>
   <p:clrMapOvr>
     <a:masterClrMapping/>
@@ -1024,13 +1044,7 @@
       </p:grpSpPr>
       <p:sp>
         <p:nvSpPr>
-          <p:cNvPr id="2" name="Title 1">
-            <a:extLst>
-              <a:ext uri="{FF2B5EF4-FFF2-40B4-BE49-F238E27FC236}">
-                <a16:creationId xmlns:a16="http://schemas.microsoft.com/office/drawing/2014/main" id="{EE634426-EFD6-AAAA-E10C-CC7557313707}"/>
-              </a:ext>
-            </a:extLst>
-          </p:cNvPr>
+          <p:cNvPr id="2" name="Title 1"/>
           <p:cNvSpPr>
             <a:spLocks noGrp="1"/>
           </p:cNvSpPr>
@@ -1056,19 +1070,13 @@
               <a:rPr lang="en-US"/>
               <a:t>Click to edit Master title style</a:t>
             </a:r>
-            <a:endParaRPr lang="en-VN"/>
-          </a:p>
-        </p:txBody>
-      </p:sp>
-      <p:sp>
-        <p:nvSpPr>
-          <p:cNvPr id="3" name="Subtitle 2">
-            <a:extLst>
-              <a:ext uri="{FF2B5EF4-FFF2-40B4-BE49-F238E27FC236}">
-                <a16:creationId xmlns:a16="http://schemas.microsoft.com/office/drawing/2014/main" id="{7E6615B3-25A4-2323-9F6E-CA0B841918C9}"/>
-              </a:ext>
-            </a:extLst>
-          </p:cNvPr>
+            <a:endParaRPr lang="en-US"/>
+          </a:p>
+        </p:txBody>
+      </p:sp>
+      <p:sp>
+        <p:nvSpPr>
+          <p:cNvPr id="3" name="Subtitle 2"/>
           <p:cNvSpPr>
             <a:spLocks noGrp="1"/>
           </p:cNvSpPr>
@@ -1127,19 +1135,13 @@
               <a:rPr lang="en-US"/>
               <a:t>Click to edit Master subtitle style</a:t>
             </a:r>
-            <a:endParaRPr lang="en-VN"/>
-          </a:p>
-        </p:txBody>
-      </p:sp>
-      <p:sp>
-        <p:nvSpPr>
-          <p:cNvPr id="4" name="Date Placeholder 3">
-            <a:extLst>
-              <a:ext uri="{FF2B5EF4-FFF2-40B4-BE49-F238E27FC236}">
-                <a16:creationId xmlns:a16="http://schemas.microsoft.com/office/drawing/2014/main" id="{A80C6800-A0AD-2175-4C4D-BFD2168ACFC2}"/>
-              </a:ext>
-            </a:extLst>
-          </p:cNvPr>
+            <a:endParaRPr lang="en-US"/>
+          </a:p>
+        </p:txBody>
+      </p:sp>
+      <p:sp>
+        <p:nvSpPr>
+          <p:cNvPr id="4" name="Date Placeholder 3"/>
           <p:cNvSpPr>
             <a:spLocks noGrp="1"/>
           </p:cNvSpPr>
@@ -1153,22 +1155,15 @@
           <a:lstStyle/>
           <a:p>
             <a:fld id="{2614D681-7D00-494D-8178-8A5F621D8CBA}" type="datetimeFigureOut">
-              <a:rPr lang="en-VN" smtClean="0"/>
-              <a:t>03/17/2026</a:t>
+              <a:rPr lang="en-US" smtClean="0"/>
             </a:fld>
-            <a:endParaRPr lang="en-VN"/>
-          </a:p>
-        </p:txBody>
-      </p:sp>
-      <p:sp>
-        <p:nvSpPr>
-          <p:cNvPr id="5" name="Footer Placeholder 4">
-            <a:extLst>
-              <a:ext uri="{FF2B5EF4-FFF2-40B4-BE49-F238E27FC236}">
-                <a16:creationId xmlns:a16="http://schemas.microsoft.com/office/drawing/2014/main" id="{EFE3AAF2-8562-00B3-B6FF-7C3A2E835D83}"/>
-              </a:ext>
-            </a:extLst>
-          </p:cNvPr>
+            <a:endParaRPr lang="en-US"/>
+          </a:p>
+        </p:txBody>
+      </p:sp>
+      <p:sp>
+        <p:nvSpPr>
+          <p:cNvPr id="5" name="Footer Placeholder 4"/>
           <p:cNvSpPr>
             <a:spLocks noGrp="1"/>
           </p:cNvSpPr>
@@ -1181,19 +1176,13 @@
           <a:bodyPr/>
           <a:lstStyle/>
           <a:p>
-            <a:endParaRPr lang="en-VN"/>
-          </a:p>
-        </p:txBody>
-      </p:sp>
-      <p:sp>
-        <p:nvSpPr>
-          <p:cNvPr id="6" name="Slide Number Placeholder 5">
-            <a:extLst>
-              <a:ext uri="{FF2B5EF4-FFF2-40B4-BE49-F238E27FC236}">
-                <a16:creationId xmlns:a16="http://schemas.microsoft.com/office/drawing/2014/main" id="{35AFD8D8-A20F-17AA-827C-CB2D6E8240FC}"/>
-              </a:ext>
-            </a:extLst>
-          </p:cNvPr>
+            <a:endParaRPr lang="en-US"/>
+          </a:p>
+        </p:txBody>
+      </p:sp>
+      <p:sp>
+        <p:nvSpPr>
+          <p:cNvPr id="6" name="Slide Number Placeholder 5"/>
           <p:cNvSpPr>
             <a:spLocks noGrp="1"/>
           </p:cNvSpPr>
@@ -1207,19 +1196,13 @@
           <a:lstStyle/>
           <a:p>
             <a:fld id="{1E736747-5B7A-A94A-BBB8-41A0822C9E32}" type="slidenum">
-              <a:rPr lang="en-VN" smtClean="0"/>
-              <a:t>‹#›</a:t>
+              <a:rPr lang="en-US" smtClean="0"/>
             </a:fld>
-            <a:endParaRPr lang="en-VN"/>
+            <a:endParaRPr lang="en-US"/>
           </a:p>
         </p:txBody>
       </p:sp>
     </p:spTree>
-    <p:extLst>
-      <p:ext uri="{BB962C8B-B14F-4D97-AF65-F5344CB8AC3E}">
-        <p14:creationId xmlns:p14="http://schemas.microsoft.com/office/powerpoint/2010/main" val="4206460008"/>
-      </p:ext>
-    </p:extLst>
   </p:cSld>
   <p:clrMapOvr>
     <a:masterClrMapping/>
@@ -1246,13 +1229,7 @@
       </p:grpSpPr>
       <p:sp>
         <p:nvSpPr>
-          <p:cNvPr id="2" name="Title 1">
-            <a:extLst>
-              <a:ext uri="{FF2B5EF4-FFF2-40B4-BE49-F238E27FC236}">
-                <a16:creationId xmlns:a16="http://schemas.microsoft.com/office/drawing/2014/main" id="{8735E86A-3DAE-50B0-8A17-008D7C17CE5E}"/>
-              </a:ext>
-            </a:extLst>
-          </p:cNvPr>
+          <p:cNvPr id="2" name="Title 1"/>
           <p:cNvSpPr>
             <a:spLocks noGrp="1"/>
           </p:cNvSpPr>
@@ -1269,19 +1246,13 @@
               <a:rPr lang="en-US"/>
               <a:t>Click to edit Master title style</a:t>
             </a:r>
-            <a:endParaRPr lang="en-VN"/>
-          </a:p>
-        </p:txBody>
-      </p:sp>
-      <p:sp>
-        <p:nvSpPr>
-          <p:cNvPr id="3" name="Vertical Text Placeholder 2">
-            <a:extLst>
-              <a:ext uri="{FF2B5EF4-FFF2-40B4-BE49-F238E27FC236}">
-                <a16:creationId xmlns:a16="http://schemas.microsoft.com/office/drawing/2014/main" id="{A7E0B638-C386-E426-8BEC-F2A7C787C5C8}"/>
-              </a:ext>
-            </a:extLst>
-          </p:cNvPr>
+            <a:endParaRPr lang="en-US"/>
+          </a:p>
+        </p:txBody>
+      </p:sp>
+      <p:sp>
+        <p:nvSpPr>
+          <p:cNvPr id="3" name="Vertical Text Placeholder 2"/>
           <p:cNvSpPr>
             <a:spLocks noGrp="1"/>
           </p:cNvSpPr>
@@ -1299,6 +1270,7 @@
               <a:rPr lang="en-US"/>
               <a:t>Click to edit Master text styles</a:t>
             </a:r>
+            <a:endParaRPr lang="en-US"/>
           </a:p>
           <a:p>
             <a:pPr lvl="1"/>
@@ -1306,6 +1278,7 @@
               <a:rPr lang="en-US"/>
               <a:t>Second level</a:t>
             </a:r>
+            <a:endParaRPr lang="en-US"/>
           </a:p>
           <a:p>
             <a:pPr lvl="2"/>
@@ -1313,6 +1286,7 @@
               <a:rPr lang="en-US"/>
               <a:t>Third level</a:t>
             </a:r>
+            <a:endParaRPr lang="en-US"/>
           </a:p>
           <a:p>
             <a:pPr lvl="3"/>
@@ -1320,6 +1294,7 @@
               <a:rPr lang="en-US"/>
               <a:t>Fourth level</a:t>
             </a:r>
+            <a:endParaRPr lang="en-US"/>
           </a:p>
           <a:p>
             <a:pPr lvl="4"/>
@@ -1327,19 +1302,13 @@
               <a:rPr lang="en-US"/>
               <a:t>Fifth level</a:t>
             </a:r>
-            <a:endParaRPr lang="en-VN"/>
-          </a:p>
-        </p:txBody>
-      </p:sp>
-      <p:sp>
-        <p:nvSpPr>
-          <p:cNvPr id="4" name="Date Placeholder 3">
-            <a:extLst>
-              <a:ext uri="{FF2B5EF4-FFF2-40B4-BE49-F238E27FC236}">
-                <a16:creationId xmlns:a16="http://schemas.microsoft.com/office/drawing/2014/main" id="{C906A26D-38F6-9799-6944-91D9640947B4}"/>
-              </a:ext>
-            </a:extLst>
-          </p:cNvPr>
+            <a:endParaRPr lang="en-US"/>
+          </a:p>
+        </p:txBody>
+      </p:sp>
+      <p:sp>
+        <p:nvSpPr>
+          <p:cNvPr id="4" name="Date Placeholder 3"/>
           <p:cNvSpPr>
             <a:spLocks noGrp="1"/>
           </p:cNvSpPr>
@@ -1353,22 +1322,15 @@
           <a:lstStyle/>
           <a:p>
             <a:fld id="{2614D681-7D00-494D-8178-8A5F621D8CBA}" type="datetimeFigureOut">
-              <a:rPr lang="en-VN" smtClean="0"/>
-              <a:t>03/17/2026</a:t>
+              <a:rPr lang="en-US" smtClean="0"/>
             </a:fld>
-            <a:endParaRPr lang="en-VN"/>
-          </a:p>
-        </p:txBody>
-      </p:sp>
-      <p:sp>
-        <p:nvSpPr>
-          <p:cNvPr id="5" name="Footer Placeholder 4">
-            <a:extLst>
-              <a:ext uri="{FF2B5EF4-FFF2-40B4-BE49-F238E27FC236}">
-                <a16:creationId xmlns:a16="http://schemas.microsoft.com/office/drawing/2014/main" id="{A782BEFA-38D3-7E02-67FD-7428E0DD9C4A}"/>
-              </a:ext>
-            </a:extLst>
-          </p:cNvPr>
+            <a:endParaRPr lang="en-US"/>
+          </a:p>
+        </p:txBody>
+      </p:sp>
+      <p:sp>
+        <p:nvSpPr>
+          <p:cNvPr id="5" name="Footer Placeholder 4"/>
           <p:cNvSpPr>
             <a:spLocks noGrp="1"/>
           </p:cNvSpPr>
@@ -1381,19 +1343,13 @@
           <a:bodyPr/>
           <a:lstStyle/>
           <a:p>
-            <a:endParaRPr lang="en-VN"/>
-          </a:p>
-        </p:txBody>
-      </p:sp>
-      <p:sp>
-        <p:nvSpPr>
-          <p:cNvPr id="6" name="Slide Number Placeholder 5">
-            <a:extLst>
-              <a:ext uri="{FF2B5EF4-FFF2-40B4-BE49-F238E27FC236}">
-                <a16:creationId xmlns:a16="http://schemas.microsoft.com/office/drawing/2014/main" id="{9355D240-D6C3-EDDD-9076-F6FB635AD7EF}"/>
-              </a:ext>
-            </a:extLst>
-          </p:cNvPr>
+            <a:endParaRPr lang="en-US"/>
+          </a:p>
+        </p:txBody>
+      </p:sp>
+      <p:sp>
+        <p:nvSpPr>
+          <p:cNvPr id="6" name="Slide Number Placeholder 5"/>
           <p:cNvSpPr>
             <a:spLocks noGrp="1"/>
           </p:cNvSpPr>
@@ -1407,19 +1363,13 @@
           <a:lstStyle/>
           <a:p>
             <a:fld id="{1E736747-5B7A-A94A-BBB8-41A0822C9E32}" type="slidenum">
-              <a:rPr lang="en-VN" smtClean="0"/>
-              <a:t>‹#›</a:t>
+              <a:rPr lang="en-US" smtClean="0"/>
             </a:fld>
-            <a:endParaRPr lang="en-VN"/>
+            <a:endParaRPr lang="en-US"/>
           </a:p>
         </p:txBody>
       </p:sp>
     </p:spTree>
-    <p:extLst>
-      <p:ext uri="{BB962C8B-B14F-4D97-AF65-F5344CB8AC3E}">
-        <p14:creationId xmlns:p14="http://schemas.microsoft.com/office/powerpoint/2010/main" val="1869556407"/>
-      </p:ext>
-    </p:extLst>
   </p:cSld>
   <p:clrMapOvr>
     <a:masterClrMapping/>
@@ -1446,13 +1396,7 @@
       </p:grpSpPr>
       <p:sp>
         <p:nvSpPr>
-          <p:cNvPr id="2" name="Vertical Title 1">
-            <a:extLst>
-              <a:ext uri="{FF2B5EF4-FFF2-40B4-BE49-F238E27FC236}">
-                <a16:creationId xmlns:a16="http://schemas.microsoft.com/office/drawing/2014/main" id="{16548A4E-DEA9-5801-4EB3-E0E45C1E7141}"/>
-              </a:ext>
-            </a:extLst>
-          </p:cNvPr>
+          <p:cNvPr id="2" name="Vertical Title 1"/>
           <p:cNvSpPr>
             <a:spLocks noGrp="1"/>
           </p:cNvSpPr>
@@ -1474,19 +1418,13 @@
               <a:rPr lang="en-US"/>
               <a:t>Click to edit Master title style</a:t>
             </a:r>
-            <a:endParaRPr lang="en-VN"/>
-          </a:p>
-        </p:txBody>
-      </p:sp>
-      <p:sp>
-        <p:nvSpPr>
-          <p:cNvPr id="3" name="Vertical Text Placeholder 2">
-            <a:extLst>
-              <a:ext uri="{FF2B5EF4-FFF2-40B4-BE49-F238E27FC236}">
-                <a16:creationId xmlns:a16="http://schemas.microsoft.com/office/drawing/2014/main" id="{0A0C8961-75F0-1567-4256-157B15392E21}"/>
-              </a:ext>
-            </a:extLst>
-          </p:cNvPr>
+            <a:endParaRPr lang="en-US"/>
+          </a:p>
+        </p:txBody>
+      </p:sp>
+      <p:sp>
+        <p:nvSpPr>
+          <p:cNvPr id="3" name="Vertical Text Placeholder 2"/>
           <p:cNvSpPr>
             <a:spLocks noGrp="1"/>
           </p:cNvSpPr>
@@ -1509,6 +1447,7 @@
               <a:rPr lang="en-US"/>
               <a:t>Click to edit Master text styles</a:t>
             </a:r>
+            <a:endParaRPr lang="en-US"/>
           </a:p>
           <a:p>
             <a:pPr lvl="1"/>
@@ -1516,6 +1455,7 @@
               <a:rPr lang="en-US"/>
               <a:t>Second level</a:t>
             </a:r>
+            <a:endParaRPr lang="en-US"/>
           </a:p>
           <a:p>
             <a:pPr lvl="2"/>
@@ -1523,6 +1463,7 @@
               <a:rPr lang="en-US"/>
               <a:t>Third level</a:t>
             </a:r>
+            <a:endParaRPr lang="en-US"/>
           </a:p>
           <a:p>
             <a:pPr lvl="3"/>
@@ -1530,6 +1471,7 @@
               <a:rPr lang="en-US"/>
               <a:t>Fourth level</a:t>
             </a:r>
+            <a:endParaRPr lang="en-US"/>
           </a:p>
           <a:p>
             <a:pPr lvl="4"/>
@@ -1537,19 +1479,13 @@
               <a:rPr lang="en-US"/>
               <a:t>Fifth level</a:t>
             </a:r>
-            <a:endParaRPr lang="en-VN"/>
-          </a:p>
-        </p:txBody>
-      </p:sp>
-      <p:sp>
-        <p:nvSpPr>
-          <p:cNvPr id="4" name="Date Placeholder 3">
-            <a:extLst>
-              <a:ext uri="{FF2B5EF4-FFF2-40B4-BE49-F238E27FC236}">
-                <a16:creationId xmlns:a16="http://schemas.microsoft.com/office/drawing/2014/main" id="{44BE0F54-CA95-D2BB-4E9C-F9ED08D14463}"/>
-              </a:ext>
-            </a:extLst>
-          </p:cNvPr>
+            <a:endParaRPr lang="en-US"/>
+          </a:p>
+        </p:txBody>
+      </p:sp>
+      <p:sp>
+        <p:nvSpPr>
+          <p:cNvPr id="4" name="Date Placeholder 3"/>
           <p:cNvSpPr>
             <a:spLocks noGrp="1"/>
           </p:cNvSpPr>
@@ -1563,22 +1499,15 @@
           <a:lstStyle/>
           <a:p>
             <a:fld id="{2614D681-7D00-494D-8178-8A5F621D8CBA}" type="datetimeFigureOut">
-              <a:rPr lang="en-VN" smtClean="0"/>
-              <a:t>03/17/2026</a:t>
+              <a:rPr lang="en-US" smtClean="0"/>
             </a:fld>
-            <a:endParaRPr lang="en-VN"/>
-          </a:p>
-        </p:txBody>
-      </p:sp>
-      <p:sp>
-        <p:nvSpPr>
-          <p:cNvPr id="5" name="Footer Placeholder 4">
-            <a:extLst>
-              <a:ext uri="{FF2B5EF4-FFF2-40B4-BE49-F238E27FC236}">
-                <a16:creationId xmlns:a16="http://schemas.microsoft.com/office/drawing/2014/main" id="{EA2ED245-8574-430E-19F3-8DB0CF3B20BF}"/>
-              </a:ext>
-            </a:extLst>
-          </p:cNvPr>
+            <a:endParaRPr lang="en-US"/>
+          </a:p>
+        </p:txBody>
+      </p:sp>
+      <p:sp>
+        <p:nvSpPr>
+          <p:cNvPr id="5" name="Footer Placeholder 4"/>
           <p:cNvSpPr>
             <a:spLocks noGrp="1"/>
           </p:cNvSpPr>
@@ -1591,19 +1520,13 @@
           <a:bodyPr/>
           <a:lstStyle/>
           <a:p>
-            <a:endParaRPr lang="en-VN"/>
-          </a:p>
-        </p:txBody>
-      </p:sp>
-      <p:sp>
-        <p:nvSpPr>
-          <p:cNvPr id="6" name="Slide Number Placeholder 5">
-            <a:extLst>
-              <a:ext uri="{FF2B5EF4-FFF2-40B4-BE49-F238E27FC236}">
-                <a16:creationId xmlns:a16="http://schemas.microsoft.com/office/drawing/2014/main" id="{E7361B3E-CFBE-79F4-784C-CD9B0B47D5D1}"/>
-              </a:ext>
-            </a:extLst>
-          </p:cNvPr>
+            <a:endParaRPr lang="en-US"/>
+          </a:p>
+        </p:txBody>
+      </p:sp>
+      <p:sp>
+        <p:nvSpPr>
+          <p:cNvPr id="6" name="Slide Number Placeholder 5"/>
           <p:cNvSpPr>
             <a:spLocks noGrp="1"/>
           </p:cNvSpPr>
@@ -1617,19 +1540,13 @@
           <a:lstStyle/>
           <a:p>
             <a:fld id="{1E736747-5B7A-A94A-BBB8-41A0822C9E32}" type="slidenum">
-              <a:rPr lang="en-VN" smtClean="0"/>
-              <a:t>‹#›</a:t>
+              <a:rPr lang="en-US" smtClean="0"/>
             </a:fld>
-            <a:endParaRPr lang="en-VN"/>
+            <a:endParaRPr lang="en-US"/>
           </a:p>
         </p:txBody>
       </p:sp>
     </p:spTree>
-    <p:extLst>
-      <p:ext uri="{BB962C8B-B14F-4D97-AF65-F5344CB8AC3E}">
-        <p14:creationId xmlns:p14="http://schemas.microsoft.com/office/powerpoint/2010/main" val="3872993483"/>
-      </p:ext>
-    </p:extLst>
   </p:cSld>
   <p:clrMapOvr>
     <a:masterClrMapping/>
@@ -1656,13 +1573,7 @@
       </p:grpSpPr>
       <p:sp>
         <p:nvSpPr>
-          <p:cNvPr id="2" name="Title 1">
-            <a:extLst>
-              <a:ext uri="{FF2B5EF4-FFF2-40B4-BE49-F238E27FC236}">
-                <a16:creationId xmlns:a16="http://schemas.microsoft.com/office/drawing/2014/main" id="{9F4FFBCE-829F-7532-9A36-4990579DD643}"/>
-              </a:ext>
-            </a:extLst>
-          </p:cNvPr>
+          <p:cNvPr id="2" name="Title 1"/>
           <p:cNvSpPr>
             <a:spLocks noGrp="1"/>
           </p:cNvSpPr>
@@ -1679,19 +1590,13 @@
               <a:rPr lang="en-US"/>
               <a:t>Click to edit Master title style</a:t>
             </a:r>
-            <a:endParaRPr lang="en-VN"/>
-          </a:p>
-        </p:txBody>
-      </p:sp>
-      <p:sp>
-        <p:nvSpPr>
-          <p:cNvPr id="3" name="Content Placeholder 2">
-            <a:extLst>
-              <a:ext uri="{FF2B5EF4-FFF2-40B4-BE49-F238E27FC236}">
-                <a16:creationId xmlns:a16="http://schemas.microsoft.com/office/drawing/2014/main" id="{0B281F3E-A63F-FC7E-3D78-B2763B8B6B95}"/>
-              </a:ext>
-            </a:extLst>
-          </p:cNvPr>
+            <a:endParaRPr lang="en-US"/>
+          </a:p>
+        </p:txBody>
+      </p:sp>
+      <p:sp>
+        <p:nvSpPr>
+          <p:cNvPr id="3" name="Content Placeholder 2"/>
           <p:cNvSpPr>
             <a:spLocks noGrp="1"/>
           </p:cNvSpPr>
@@ -1709,6 +1614,7 @@
               <a:rPr lang="en-US"/>
               <a:t>Click to edit Master text styles</a:t>
             </a:r>
+            <a:endParaRPr lang="en-US"/>
           </a:p>
           <a:p>
             <a:pPr lvl="1"/>
@@ -1716,6 +1622,7 @@
               <a:rPr lang="en-US"/>
               <a:t>Second level</a:t>
             </a:r>
+            <a:endParaRPr lang="en-US"/>
           </a:p>
           <a:p>
             <a:pPr lvl="2"/>
@@ -1723,6 +1630,7 @@
               <a:rPr lang="en-US"/>
               <a:t>Third level</a:t>
             </a:r>
+            <a:endParaRPr lang="en-US"/>
           </a:p>
           <a:p>
             <a:pPr lvl="3"/>
@@ -1730,6 +1638,7 @@
               <a:rPr lang="en-US"/>
               <a:t>Fourth level</a:t>
             </a:r>
+            <a:endParaRPr lang="en-US"/>
           </a:p>
           <a:p>
             <a:pPr lvl="4"/>
@@ -1737,19 +1646,13 @@
               <a:rPr lang="en-US"/>
               <a:t>Fifth level</a:t>
             </a:r>
-            <a:endParaRPr lang="en-VN"/>
-          </a:p>
-        </p:txBody>
-      </p:sp>
-      <p:sp>
-        <p:nvSpPr>
-          <p:cNvPr id="4" name="Date Placeholder 3">
-            <a:extLst>
-              <a:ext uri="{FF2B5EF4-FFF2-40B4-BE49-F238E27FC236}">
-                <a16:creationId xmlns:a16="http://schemas.microsoft.com/office/drawing/2014/main" id="{8166F03E-5D65-609D-7BCC-8D19F82613E3}"/>
-              </a:ext>
-            </a:extLst>
-          </p:cNvPr>
+            <a:endParaRPr lang="en-US"/>
+          </a:p>
+        </p:txBody>
+      </p:sp>
+      <p:sp>
+        <p:nvSpPr>
+          <p:cNvPr id="4" name="Date Placeholder 3"/>
           <p:cNvSpPr>
             <a:spLocks noGrp="1"/>
           </p:cNvSpPr>
@@ -1763,22 +1666,15 @@
           <a:lstStyle/>
           <a:p>
             <a:fld id="{2614D681-7D00-494D-8178-8A5F621D8CBA}" type="datetimeFigureOut">
-              <a:rPr lang="en-VN" smtClean="0"/>
-              <a:t>03/17/2026</a:t>
+              <a:rPr lang="en-US" smtClean="0"/>
             </a:fld>
-            <a:endParaRPr lang="en-VN"/>
-          </a:p>
-        </p:txBody>
-      </p:sp>
-      <p:sp>
-        <p:nvSpPr>
-          <p:cNvPr id="5" name="Footer Placeholder 4">
-            <a:extLst>
-              <a:ext uri="{FF2B5EF4-FFF2-40B4-BE49-F238E27FC236}">
-                <a16:creationId xmlns:a16="http://schemas.microsoft.com/office/drawing/2014/main" id="{DB226555-FDD3-55D5-8519-020A22572169}"/>
-              </a:ext>
-            </a:extLst>
-          </p:cNvPr>
+            <a:endParaRPr lang="en-US"/>
+          </a:p>
+        </p:txBody>
+      </p:sp>
+      <p:sp>
+        <p:nvSpPr>
+          <p:cNvPr id="5" name="Footer Placeholder 4"/>
           <p:cNvSpPr>
             <a:spLocks noGrp="1"/>
           </p:cNvSpPr>
@@ -1791,19 +1687,13 @@
           <a:bodyPr/>
           <a:lstStyle/>
           <a:p>
-            <a:endParaRPr lang="en-VN"/>
-          </a:p>
-        </p:txBody>
-      </p:sp>
-      <p:sp>
-        <p:nvSpPr>
-          <p:cNvPr id="6" name="Slide Number Placeholder 5">
-            <a:extLst>
-              <a:ext uri="{FF2B5EF4-FFF2-40B4-BE49-F238E27FC236}">
-                <a16:creationId xmlns:a16="http://schemas.microsoft.com/office/drawing/2014/main" id="{3FFD64A9-F846-67B0-7972-3D55CA6DFF54}"/>
-              </a:ext>
-            </a:extLst>
-          </p:cNvPr>
+            <a:endParaRPr lang="en-US"/>
+          </a:p>
+        </p:txBody>
+      </p:sp>
+      <p:sp>
+        <p:nvSpPr>
+          <p:cNvPr id="6" name="Slide Number Placeholder 5"/>
           <p:cNvSpPr>
             <a:spLocks noGrp="1"/>
           </p:cNvSpPr>
@@ -1817,19 +1707,13 @@
           <a:lstStyle/>
           <a:p>
             <a:fld id="{1E736747-5B7A-A94A-BBB8-41A0822C9E32}" type="slidenum">
-              <a:rPr lang="en-VN" smtClean="0"/>
-              <a:t>‹#›</a:t>
+              <a:rPr lang="en-US" smtClean="0"/>
             </a:fld>
-            <a:endParaRPr lang="en-VN"/>
+            <a:endParaRPr lang="en-US"/>
           </a:p>
         </p:txBody>
       </p:sp>
     </p:spTree>
-    <p:extLst>
-      <p:ext uri="{BB962C8B-B14F-4D97-AF65-F5344CB8AC3E}">
-        <p14:creationId xmlns:p14="http://schemas.microsoft.com/office/powerpoint/2010/main" val="23907494"/>
-      </p:ext>
-    </p:extLst>
   </p:cSld>
   <p:clrMapOvr>
     <a:masterClrMapping/>
@@ -1856,13 +1740,7 @@
       </p:grpSpPr>
       <p:sp>
         <p:nvSpPr>
-          <p:cNvPr id="2" name="Title 1">
-            <a:extLst>
-              <a:ext uri="{FF2B5EF4-FFF2-40B4-BE49-F238E27FC236}">
-                <a16:creationId xmlns:a16="http://schemas.microsoft.com/office/drawing/2014/main" id="{D49D86A6-5470-0AD7-58CA-240045DA49CF}"/>
-              </a:ext>
-            </a:extLst>
-          </p:cNvPr>
+          <p:cNvPr id="2" name="Title 1"/>
           <p:cNvSpPr>
             <a:spLocks noGrp="1"/>
           </p:cNvSpPr>
@@ -1888,19 +1766,13 @@
               <a:rPr lang="en-US"/>
               <a:t>Click to edit Master title style</a:t>
             </a:r>
-            <a:endParaRPr lang="en-VN"/>
-          </a:p>
-        </p:txBody>
-      </p:sp>
-      <p:sp>
-        <p:nvSpPr>
-          <p:cNvPr id="3" name="Text Placeholder 2">
-            <a:extLst>
-              <a:ext uri="{FF2B5EF4-FFF2-40B4-BE49-F238E27FC236}">
-                <a16:creationId xmlns:a16="http://schemas.microsoft.com/office/drawing/2014/main" id="{10268338-1967-1E33-B7AF-F93505CDA5E3}"/>
-              </a:ext>
-            </a:extLst>
-          </p:cNvPr>
+            <a:endParaRPr lang="en-US"/>
+          </a:p>
+        </p:txBody>
+      </p:sp>
+      <p:sp>
+        <p:nvSpPr>
+          <p:cNvPr id="3" name="Text Placeholder 2"/>
           <p:cNvSpPr>
             <a:spLocks noGrp="1"/>
           </p:cNvSpPr>
@@ -2014,18 +1886,13 @@
               <a:rPr lang="en-US"/>
               <a:t>Click to edit Master text styles</a:t>
             </a:r>
-          </a:p>
-        </p:txBody>
-      </p:sp>
-      <p:sp>
-        <p:nvSpPr>
-          <p:cNvPr id="4" name="Date Placeholder 3">
-            <a:extLst>
-              <a:ext uri="{FF2B5EF4-FFF2-40B4-BE49-F238E27FC236}">
-                <a16:creationId xmlns:a16="http://schemas.microsoft.com/office/drawing/2014/main" id="{D728B02E-884C-AA3C-220F-FF560A12B41A}"/>
-              </a:ext>
-            </a:extLst>
-          </p:cNvPr>
+            <a:endParaRPr lang="en-US"/>
+          </a:p>
+        </p:txBody>
+      </p:sp>
+      <p:sp>
+        <p:nvSpPr>
+          <p:cNvPr id="4" name="Date Placeholder 3"/>
           <p:cNvSpPr>
             <a:spLocks noGrp="1"/>
           </p:cNvSpPr>
@@ -2039,22 +1906,15 @@
           <a:lstStyle/>
           <a:p>
             <a:fld id="{2614D681-7D00-494D-8178-8A5F621D8CBA}" type="datetimeFigureOut">
-              <a:rPr lang="en-VN" smtClean="0"/>
-              <a:t>03/17/2026</a:t>
+              <a:rPr lang="en-US" smtClean="0"/>
             </a:fld>
-            <a:endParaRPr lang="en-VN"/>
-          </a:p>
-        </p:txBody>
-      </p:sp>
-      <p:sp>
-        <p:nvSpPr>
-          <p:cNvPr id="5" name="Footer Placeholder 4">
-            <a:extLst>
-              <a:ext uri="{FF2B5EF4-FFF2-40B4-BE49-F238E27FC236}">
-                <a16:creationId xmlns:a16="http://schemas.microsoft.com/office/drawing/2014/main" id="{AFEB7973-D80A-94D3-2C2E-023E183127C1}"/>
-              </a:ext>
-            </a:extLst>
-          </p:cNvPr>
+            <a:endParaRPr lang="en-US"/>
+          </a:p>
+        </p:txBody>
+      </p:sp>
+      <p:sp>
+        <p:nvSpPr>
+          <p:cNvPr id="5" name="Footer Placeholder 4"/>
           <p:cNvSpPr>
             <a:spLocks noGrp="1"/>
           </p:cNvSpPr>
@@ -2067,19 +1927,13 @@
           <a:bodyPr/>
           <a:lstStyle/>
           <a:p>
-            <a:endParaRPr lang="en-VN"/>
-          </a:p>
-        </p:txBody>
-      </p:sp>
-      <p:sp>
-        <p:nvSpPr>
-          <p:cNvPr id="6" name="Slide Number Placeholder 5">
-            <a:extLst>
-              <a:ext uri="{FF2B5EF4-FFF2-40B4-BE49-F238E27FC236}">
-                <a16:creationId xmlns:a16="http://schemas.microsoft.com/office/drawing/2014/main" id="{C055D2D2-A805-D52B-9814-7C143FDC500D}"/>
-              </a:ext>
-            </a:extLst>
-          </p:cNvPr>
+            <a:endParaRPr lang="en-US"/>
+          </a:p>
+        </p:txBody>
+      </p:sp>
+      <p:sp>
+        <p:nvSpPr>
+          <p:cNvPr id="6" name="Slide Number Placeholder 5"/>
           <p:cNvSpPr>
             <a:spLocks noGrp="1"/>
           </p:cNvSpPr>
@@ -2093,19 +1947,13 @@
           <a:lstStyle/>
           <a:p>
             <a:fld id="{1E736747-5B7A-A94A-BBB8-41A0822C9E32}" type="slidenum">
-              <a:rPr lang="en-VN" smtClean="0"/>
-              <a:t>‹#›</a:t>
+              <a:rPr lang="en-US" smtClean="0"/>
             </a:fld>
-            <a:endParaRPr lang="en-VN"/>
+            <a:endParaRPr lang="en-US"/>
           </a:p>
         </p:txBody>
       </p:sp>
     </p:spTree>
-    <p:extLst>
-      <p:ext uri="{BB962C8B-B14F-4D97-AF65-F5344CB8AC3E}">
-        <p14:creationId xmlns:p14="http://schemas.microsoft.com/office/powerpoint/2010/main" val="1723245050"/>
-      </p:ext>
-    </p:extLst>
   </p:cSld>
   <p:clrMapOvr>
     <a:masterClrMapping/>
@@ -2132,13 +1980,7 @@
       </p:grpSpPr>
       <p:sp>
         <p:nvSpPr>
-          <p:cNvPr id="2" name="Title 1">
-            <a:extLst>
-              <a:ext uri="{FF2B5EF4-FFF2-40B4-BE49-F238E27FC236}">
-                <a16:creationId xmlns:a16="http://schemas.microsoft.com/office/drawing/2014/main" id="{44EEB0AC-C71A-8F48-56E0-D4C213FF8F53}"/>
-              </a:ext>
-            </a:extLst>
-          </p:cNvPr>
+          <p:cNvPr id="2" name="Title 1"/>
           <p:cNvSpPr>
             <a:spLocks noGrp="1"/>
           </p:cNvSpPr>
@@ -2155,19 +1997,13 @@
               <a:rPr lang="en-US"/>
               <a:t>Click to edit Master title style</a:t>
             </a:r>
-            <a:endParaRPr lang="en-VN"/>
-          </a:p>
-        </p:txBody>
-      </p:sp>
-      <p:sp>
-        <p:nvSpPr>
-          <p:cNvPr id="3" name="Content Placeholder 2">
-            <a:extLst>
-              <a:ext uri="{FF2B5EF4-FFF2-40B4-BE49-F238E27FC236}">
-                <a16:creationId xmlns:a16="http://schemas.microsoft.com/office/drawing/2014/main" id="{C0A160B2-C234-D82C-89AF-CF1C7BD1BB81}"/>
-              </a:ext>
-            </a:extLst>
-          </p:cNvPr>
+            <a:endParaRPr lang="en-US"/>
+          </a:p>
+        </p:txBody>
+      </p:sp>
+      <p:sp>
+        <p:nvSpPr>
+          <p:cNvPr id="3" name="Content Placeholder 2"/>
           <p:cNvSpPr>
             <a:spLocks noGrp="1"/>
           </p:cNvSpPr>
@@ -2190,6 +2026,7 @@
               <a:rPr lang="en-US"/>
               <a:t>Click to edit Master text styles</a:t>
             </a:r>
+            <a:endParaRPr lang="en-US"/>
           </a:p>
           <a:p>
             <a:pPr lvl="1"/>
@@ -2197,6 +2034,7 @@
               <a:rPr lang="en-US"/>
               <a:t>Second level</a:t>
             </a:r>
+            <a:endParaRPr lang="en-US"/>
           </a:p>
           <a:p>
             <a:pPr lvl="2"/>
@@ -2204,6 +2042,7 @@
               <a:rPr lang="en-US"/>
               <a:t>Third level</a:t>
             </a:r>
+            <a:endParaRPr lang="en-US"/>
           </a:p>
           <a:p>
             <a:pPr lvl="3"/>
@@ -2211,6 +2050,7 @@
               <a:rPr lang="en-US"/>
               <a:t>Fourth level</a:t>
             </a:r>
+            <a:endParaRPr lang="en-US"/>
           </a:p>
           <a:p>
             <a:pPr lvl="4"/>
@@ -2218,19 +2058,13 @@
               <a:rPr lang="en-US"/>
               <a:t>Fifth level</a:t>
             </a:r>
-            <a:endParaRPr lang="en-VN"/>
-          </a:p>
-        </p:txBody>
-      </p:sp>
-      <p:sp>
-        <p:nvSpPr>
-          <p:cNvPr id="4" name="Content Placeholder 3">
-            <a:extLst>
-              <a:ext uri="{FF2B5EF4-FFF2-40B4-BE49-F238E27FC236}">
-                <a16:creationId xmlns:a16="http://schemas.microsoft.com/office/drawing/2014/main" id="{7941981C-7DC3-1D03-A8F3-9E68D058F878}"/>
-              </a:ext>
-            </a:extLst>
-          </p:cNvPr>
+            <a:endParaRPr lang="en-US"/>
+          </a:p>
+        </p:txBody>
+      </p:sp>
+      <p:sp>
+        <p:nvSpPr>
+          <p:cNvPr id="4" name="Content Placeholder 3"/>
           <p:cNvSpPr>
             <a:spLocks noGrp="1"/>
           </p:cNvSpPr>
@@ -2253,6 +2087,7 @@
               <a:rPr lang="en-US"/>
               <a:t>Click to edit Master text styles</a:t>
             </a:r>
+            <a:endParaRPr lang="en-US"/>
           </a:p>
           <a:p>
             <a:pPr lvl="1"/>
@@ -2260,6 +2095,7 @@
               <a:rPr lang="en-US"/>
               <a:t>Second level</a:t>
             </a:r>
+            <a:endParaRPr lang="en-US"/>
           </a:p>
           <a:p>
             <a:pPr lvl="2"/>
@@ -2267,6 +2103,7 @@
               <a:rPr lang="en-US"/>
               <a:t>Third level</a:t>
             </a:r>
+            <a:endParaRPr lang="en-US"/>
           </a:p>
           <a:p>
             <a:pPr lvl="3"/>
@@ -2274,6 +2111,7 @@
               <a:rPr lang="en-US"/>
               <a:t>Fourth level</a:t>
             </a:r>
+            <a:endParaRPr lang="en-US"/>
           </a:p>
           <a:p>
             <a:pPr lvl="4"/>
@@ -2281,19 +2119,13 @@
               <a:rPr lang="en-US"/>
               <a:t>Fifth level</a:t>
             </a:r>
-            <a:endParaRPr lang="en-VN"/>
-          </a:p>
-        </p:txBody>
-      </p:sp>
-      <p:sp>
-        <p:nvSpPr>
-          <p:cNvPr id="5" name="Date Placeholder 4">
-            <a:extLst>
-              <a:ext uri="{FF2B5EF4-FFF2-40B4-BE49-F238E27FC236}">
-                <a16:creationId xmlns:a16="http://schemas.microsoft.com/office/drawing/2014/main" id="{F6419C50-52F8-A6A4-88BD-63ACD33721FF}"/>
-              </a:ext>
-            </a:extLst>
-          </p:cNvPr>
+            <a:endParaRPr lang="en-US"/>
+          </a:p>
+        </p:txBody>
+      </p:sp>
+      <p:sp>
+        <p:nvSpPr>
+          <p:cNvPr id="5" name="Date Placeholder 4"/>
           <p:cNvSpPr>
             <a:spLocks noGrp="1"/>
           </p:cNvSpPr>
@@ -2307,22 +2139,15 @@
           <a:lstStyle/>
           <a:p>
             <a:fld id="{2614D681-7D00-494D-8178-8A5F621D8CBA}" type="datetimeFigureOut">
-              <a:rPr lang="en-VN" smtClean="0"/>
-              <a:t>03/17/2026</a:t>
+              <a:rPr lang="en-US" smtClean="0"/>
             </a:fld>
-            <a:endParaRPr lang="en-VN"/>
-          </a:p>
-        </p:txBody>
-      </p:sp>
-      <p:sp>
-        <p:nvSpPr>
-          <p:cNvPr id="6" name="Footer Placeholder 5">
-            <a:extLst>
-              <a:ext uri="{FF2B5EF4-FFF2-40B4-BE49-F238E27FC236}">
-                <a16:creationId xmlns:a16="http://schemas.microsoft.com/office/drawing/2014/main" id="{B85C9338-2E7E-CBED-E40E-083E7644F490}"/>
-              </a:ext>
-            </a:extLst>
-          </p:cNvPr>
+            <a:endParaRPr lang="en-US"/>
+          </a:p>
+        </p:txBody>
+      </p:sp>
+      <p:sp>
+        <p:nvSpPr>
+          <p:cNvPr id="6" name="Footer Placeholder 5"/>
           <p:cNvSpPr>
             <a:spLocks noGrp="1"/>
           </p:cNvSpPr>
@@ -2335,19 +2160,13 @@
           <a:bodyPr/>
           <a:lstStyle/>
           <a:p>
-            <a:endParaRPr lang="en-VN"/>
-          </a:p>
-        </p:txBody>
-      </p:sp>
-      <p:sp>
-        <p:nvSpPr>
-          <p:cNvPr id="7" name="Slide Number Placeholder 6">
-            <a:extLst>
-              <a:ext uri="{FF2B5EF4-FFF2-40B4-BE49-F238E27FC236}">
-                <a16:creationId xmlns:a16="http://schemas.microsoft.com/office/drawing/2014/main" id="{33F50A03-6496-B674-1333-A011B8839999}"/>
-              </a:ext>
-            </a:extLst>
-          </p:cNvPr>
+            <a:endParaRPr lang="en-US"/>
+          </a:p>
+        </p:txBody>
+      </p:sp>
+      <p:sp>
+        <p:nvSpPr>
+          <p:cNvPr id="7" name="Slide Number Placeholder 6"/>
           <p:cNvSpPr>
             <a:spLocks noGrp="1"/>
           </p:cNvSpPr>
@@ -2361,19 +2180,13 @@
           <a:lstStyle/>
           <a:p>
             <a:fld id="{1E736747-5B7A-A94A-BBB8-41A0822C9E32}" type="slidenum">
-              <a:rPr lang="en-VN" smtClean="0"/>
-              <a:t>‹#›</a:t>
+              <a:rPr lang="en-US" smtClean="0"/>
             </a:fld>
-            <a:endParaRPr lang="en-VN"/>
+            <a:endParaRPr lang="en-US"/>
           </a:p>
         </p:txBody>
       </p:sp>
     </p:spTree>
-    <p:extLst>
-      <p:ext uri="{BB962C8B-B14F-4D97-AF65-F5344CB8AC3E}">
-        <p14:creationId xmlns:p14="http://schemas.microsoft.com/office/powerpoint/2010/main" val="941869585"/>
-      </p:ext>
-    </p:extLst>
   </p:cSld>
   <p:clrMapOvr>
     <a:masterClrMapping/>
@@ -2400,13 +2213,7 @@
       </p:grpSpPr>
       <p:sp>
         <p:nvSpPr>
-          <p:cNvPr id="2" name="Title 1">
-            <a:extLst>
-              <a:ext uri="{FF2B5EF4-FFF2-40B4-BE49-F238E27FC236}">
-                <a16:creationId xmlns:a16="http://schemas.microsoft.com/office/drawing/2014/main" id="{D517E7C1-F91E-8BD2-03AF-44E1EB1AA3D4}"/>
-              </a:ext>
-            </a:extLst>
-          </p:cNvPr>
+          <p:cNvPr id="2" name="Title 1"/>
           <p:cNvSpPr>
             <a:spLocks noGrp="1"/>
           </p:cNvSpPr>
@@ -2428,19 +2235,13 @@
               <a:rPr lang="en-US"/>
               <a:t>Click to edit Master title style</a:t>
             </a:r>
-            <a:endParaRPr lang="en-VN"/>
-          </a:p>
-        </p:txBody>
-      </p:sp>
-      <p:sp>
-        <p:nvSpPr>
-          <p:cNvPr id="3" name="Text Placeholder 2">
-            <a:extLst>
-              <a:ext uri="{FF2B5EF4-FFF2-40B4-BE49-F238E27FC236}">
-                <a16:creationId xmlns:a16="http://schemas.microsoft.com/office/drawing/2014/main" id="{1646B803-C3C0-85EF-5568-0323AE1B5509}"/>
-              </a:ext>
-            </a:extLst>
-          </p:cNvPr>
+            <a:endParaRPr lang="en-US"/>
+          </a:p>
+        </p:txBody>
+      </p:sp>
+      <p:sp>
+        <p:nvSpPr>
+          <p:cNvPr id="3" name="Text Placeholder 2"/>
           <p:cNvSpPr>
             <a:spLocks noGrp="1"/>
           </p:cNvSpPr>
@@ -2500,18 +2301,13 @@
               <a:rPr lang="en-US"/>
               <a:t>Click to edit Master text styles</a:t>
             </a:r>
-          </a:p>
-        </p:txBody>
-      </p:sp>
-      <p:sp>
-        <p:nvSpPr>
-          <p:cNvPr id="4" name="Content Placeholder 3">
-            <a:extLst>
-              <a:ext uri="{FF2B5EF4-FFF2-40B4-BE49-F238E27FC236}">
-                <a16:creationId xmlns:a16="http://schemas.microsoft.com/office/drawing/2014/main" id="{61978BA9-FEA3-F802-E463-425B7B6A758F}"/>
-              </a:ext>
-            </a:extLst>
-          </p:cNvPr>
+            <a:endParaRPr lang="en-US"/>
+          </a:p>
+        </p:txBody>
+      </p:sp>
+      <p:sp>
+        <p:nvSpPr>
+          <p:cNvPr id="4" name="Content Placeholder 3"/>
           <p:cNvSpPr>
             <a:spLocks noGrp="1"/>
           </p:cNvSpPr>
@@ -2534,6 +2330,7 @@
               <a:rPr lang="en-US"/>
               <a:t>Click to edit Master text styles</a:t>
             </a:r>
+            <a:endParaRPr lang="en-US"/>
           </a:p>
           <a:p>
             <a:pPr lvl="1"/>
@@ -2541,6 +2338,7 @@
               <a:rPr lang="en-US"/>
               <a:t>Second level</a:t>
             </a:r>
+            <a:endParaRPr lang="en-US"/>
           </a:p>
           <a:p>
             <a:pPr lvl="2"/>
@@ -2548,6 +2346,7 @@
               <a:rPr lang="en-US"/>
               <a:t>Third level</a:t>
             </a:r>
+            <a:endParaRPr lang="en-US"/>
           </a:p>
           <a:p>
             <a:pPr lvl="3"/>
@@ -2555,6 +2354,7 @@
               <a:rPr lang="en-US"/>
               <a:t>Fourth level</a:t>
             </a:r>
+            <a:endParaRPr lang="en-US"/>
           </a:p>
           <a:p>
             <a:pPr lvl="4"/>
@@ -2562,19 +2362,13 @@
               <a:rPr lang="en-US"/>
               <a:t>Fifth level</a:t>
             </a:r>
-            <a:endParaRPr lang="en-VN"/>
-          </a:p>
-        </p:txBody>
-      </p:sp>
-      <p:sp>
-        <p:nvSpPr>
-          <p:cNvPr id="5" name="Text Placeholder 4">
-            <a:extLst>
-              <a:ext uri="{FF2B5EF4-FFF2-40B4-BE49-F238E27FC236}">
-                <a16:creationId xmlns:a16="http://schemas.microsoft.com/office/drawing/2014/main" id="{11E82A82-6993-28C6-865A-7E826CFF39C5}"/>
-              </a:ext>
-            </a:extLst>
-          </p:cNvPr>
+            <a:endParaRPr lang="en-US"/>
+          </a:p>
+        </p:txBody>
+      </p:sp>
+      <p:sp>
+        <p:nvSpPr>
+          <p:cNvPr id="5" name="Text Placeholder 4"/>
           <p:cNvSpPr>
             <a:spLocks noGrp="1"/>
           </p:cNvSpPr>
@@ -2634,18 +2428,13 @@
               <a:rPr lang="en-US"/>
               <a:t>Click to edit Master text styles</a:t>
             </a:r>
-          </a:p>
-        </p:txBody>
-      </p:sp>
-      <p:sp>
-        <p:nvSpPr>
-          <p:cNvPr id="6" name="Content Placeholder 5">
-            <a:extLst>
-              <a:ext uri="{FF2B5EF4-FFF2-40B4-BE49-F238E27FC236}">
-                <a16:creationId xmlns:a16="http://schemas.microsoft.com/office/drawing/2014/main" id="{C4EF9B09-9366-E30B-9FE1-F6B0C98508FA}"/>
-              </a:ext>
-            </a:extLst>
-          </p:cNvPr>
+            <a:endParaRPr lang="en-US"/>
+          </a:p>
+        </p:txBody>
+      </p:sp>
+      <p:sp>
+        <p:nvSpPr>
+          <p:cNvPr id="6" name="Content Placeholder 5"/>
           <p:cNvSpPr>
             <a:spLocks noGrp="1"/>
           </p:cNvSpPr>
@@ -2668,6 +2457,7 @@
               <a:rPr lang="en-US"/>
               <a:t>Click to edit Master text styles</a:t>
             </a:r>
+            <a:endParaRPr lang="en-US"/>
           </a:p>
           <a:p>
             <a:pPr lvl="1"/>
@@ -2675,6 +2465,7 @@
               <a:rPr lang="en-US"/>
               <a:t>Second level</a:t>
             </a:r>
+            <a:endParaRPr lang="en-US"/>
           </a:p>
           <a:p>
             <a:pPr lvl="2"/>
@@ -2682,6 +2473,7 @@
               <a:rPr lang="en-US"/>
               <a:t>Third level</a:t>
             </a:r>
+            <a:endParaRPr lang="en-US"/>
           </a:p>
           <a:p>
             <a:pPr lvl="3"/>
@@ -2689,6 +2481,7 @@
               <a:rPr lang="en-US"/>
               <a:t>Fourth level</a:t>
             </a:r>
+            <a:endParaRPr lang="en-US"/>
           </a:p>
           <a:p>
             <a:pPr lvl="4"/>
@@ -2696,19 +2489,13 @@
               <a:rPr lang="en-US"/>
               <a:t>Fifth level</a:t>
             </a:r>
-            <a:endParaRPr lang="en-VN"/>
-          </a:p>
-        </p:txBody>
-      </p:sp>
-      <p:sp>
-        <p:nvSpPr>
-          <p:cNvPr id="7" name="Date Placeholder 6">
-            <a:extLst>
-              <a:ext uri="{FF2B5EF4-FFF2-40B4-BE49-F238E27FC236}">
-                <a16:creationId xmlns:a16="http://schemas.microsoft.com/office/drawing/2014/main" id="{1F96ED06-CEE2-DAA3-DC49-3DA801DE7155}"/>
-              </a:ext>
-            </a:extLst>
-          </p:cNvPr>
+            <a:endParaRPr lang="en-US"/>
+          </a:p>
+        </p:txBody>
+      </p:sp>
+      <p:sp>
+        <p:nvSpPr>
+          <p:cNvPr id="7" name="Date Placeholder 6"/>
           <p:cNvSpPr>
             <a:spLocks noGrp="1"/>
           </p:cNvSpPr>
@@ -2722,22 +2509,15 @@
           <a:lstStyle/>
           <a:p>
             <a:fld id="{2614D681-7D00-494D-8178-8A5F621D8CBA}" type="datetimeFigureOut">
-              <a:rPr lang="en-VN" smtClean="0"/>
-              <a:t>03/17/2026</a:t>
+              <a:rPr lang="en-US" smtClean="0"/>
             </a:fld>
-            <a:endParaRPr lang="en-VN"/>
-          </a:p>
-        </p:txBody>
-      </p:sp>
-      <p:sp>
-        <p:nvSpPr>
-          <p:cNvPr id="8" name="Footer Placeholder 7">
-            <a:extLst>
-              <a:ext uri="{FF2B5EF4-FFF2-40B4-BE49-F238E27FC236}">
-                <a16:creationId xmlns:a16="http://schemas.microsoft.com/office/drawing/2014/main" id="{7A6F0C60-64EA-DA52-8E43-428D262D4E7E}"/>
-              </a:ext>
-            </a:extLst>
-          </p:cNvPr>
+            <a:endParaRPr lang="en-US"/>
+          </a:p>
+        </p:txBody>
+      </p:sp>
+      <p:sp>
+        <p:nvSpPr>
+          <p:cNvPr id="8" name="Footer Placeholder 7"/>
           <p:cNvSpPr>
             <a:spLocks noGrp="1"/>
           </p:cNvSpPr>
@@ -2750,19 +2530,13 @@
           <a:bodyPr/>
           <a:lstStyle/>
           <a:p>
-            <a:endParaRPr lang="en-VN"/>
-          </a:p>
-        </p:txBody>
-      </p:sp>
-      <p:sp>
-        <p:nvSpPr>
-          <p:cNvPr id="9" name="Slide Number Placeholder 8">
-            <a:extLst>
-              <a:ext uri="{FF2B5EF4-FFF2-40B4-BE49-F238E27FC236}">
-                <a16:creationId xmlns:a16="http://schemas.microsoft.com/office/drawing/2014/main" id="{30CE89F4-60FB-2921-9CA9-EFFE7F0C8CD0}"/>
-              </a:ext>
-            </a:extLst>
-          </p:cNvPr>
+            <a:endParaRPr lang="en-US"/>
+          </a:p>
+        </p:txBody>
+      </p:sp>
+      <p:sp>
+        <p:nvSpPr>
+          <p:cNvPr id="9" name="Slide Number Placeholder 8"/>
           <p:cNvSpPr>
             <a:spLocks noGrp="1"/>
           </p:cNvSpPr>
@@ -2776,19 +2550,13 @@
           <a:lstStyle/>
           <a:p>
             <a:fld id="{1E736747-5B7A-A94A-BBB8-41A0822C9E32}" type="slidenum">
-              <a:rPr lang="en-VN" smtClean="0"/>
-              <a:t>‹#›</a:t>
+              <a:rPr lang="en-US" smtClean="0"/>
             </a:fld>
-            <a:endParaRPr lang="en-VN"/>
+            <a:endParaRPr lang="en-US"/>
           </a:p>
         </p:txBody>
       </p:sp>
     </p:spTree>
-    <p:extLst>
-      <p:ext uri="{BB962C8B-B14F-4D97-AF65-F5344CB8AC3E}">
-        <p14:creationId xmlns:p14="http://schemas.microsoft.com/office/powerpoint/2010/main" val="3914169990"/>
-      </p:ext>
-    </p:extLst>
   </p:cSld>
   <p:clrMapOvr>
     <a:masterClrMapping/>
@@ -2815,13 +2583,7 @@
       </p:grpSpPr>
       <p:sp>
         <p:nvSpPr>
-          <p:cNvPr id="2" name="Title 1">
-            <a:extLst>
-              <a:ext uri="{FF2B5EF4-FFF2-40B4-BE49-F238E27FC236}">
-                <a16:creationId xmlns:a16="http://schemas.microsoft.com/office/drawing/2014/main" id="{A315E7BD-9BA9-25CA-3332-3C5856D2F193}"/>
-              </a:ext>
-            </a:extLst>
-          </p:cNvPr>
+          <p:cNvPr id="2" name="Title 1"/>
           <p:cNvSpPr>
             <a:spLocks noGrp="1"/>
           </p:cNvSpPr>
@@ -2838,19 +2600,13 @@
               <a:rPr lang="en-US"/>
               <a:t>Click to edit Master title style</a:t>
             </a:r>
-            <a:endParaRPr lang="en-VN"/>
-          </a:p>
-        </p:txBody>
-      </p:sp>
-      <p:sp>
-        <p:nvSpPr>
-          <p:cNvPr id="3" name="Date Placeholder 2">
-            <a:extLst>
-              <a:ext uri="{FF2B5EF4-FFF2-40B4-BE49-F238E27FC236}">
-                <a16:creationId xmlns:a16="http://schemas.microsoft.com/office/drawing/2014/main" id="{7F5D76A6-2C14-F83B-7356-27DB2B8FF2FB}"/>
-              </a:ext>
-            </a:extLst>
-          </p:cNvPr>
+            <a:endParaRPr lang="en-US"/>
+          </a:p>
+        </p:txBody>
+      </p:sp>
+      <p:sp>
+        <p:nvSpPr>
+          <p:cNvPr id="3" name="Date Placeholder 2"/>
           <p:cNvSpPr>
             <a:spLocks noGrp="1"/>
           </p:cNvSpPr>
@@ -2864,22 +2620,15 @@
           <a:lstStyle/>
           <a:p>
             <a:fld id="{2614D681-7D00-494D-8178-8A5F621D8CBA}" type="datetimeFigureOut">
-              <a:rPr lang="en-VN" smtClean="0"/>
-              <a:t>03/17/2026</a:t>
+              <a:rPr lang="en-US" smtClean="0"/>
             </a:fld>
-            <a:endParaRPr lang="en-VN"/>
-          </a:p>
-        </p:txBody>
-      </p:sp>
-      <p:sp>
-        <p:nvSpPr>
-          <p:cNvPr id="4" name="Footer Placeholder 3">
-            <a:extLst>
-              <a:ext uri="{FF2B5EF4-FFF2-40B4-BE49-F238E27FC236}">
-                <a16:creationId xmlns:a16="http://schemas.microsoft.com/office/drawing/2014/main" id="{1E2BB29C-7C7E-6F79-28D1-DDBB319B0E56}"/>
-              </a:ext>
-            </a:extLst>
-          </p:cNvPr>
+            <a:endParaRPr lang="en-US"/>
+          </a:p>
+        </p:txBody>
+      </p:sp>
+      <p:sp>
+        <p:nvSpPr>
+          <p:cNvPr id="4" name="Footer Placeholder 3"/>
           <p:cNvSpPr>
             <a:spLocks noGrp="1"/>
           </p:cNvSpPr>
@@ -2892,19 +2641,13 @@
           <a:bodyPr/>
           <a:lstStyle/>
           <a:p>
-            <a:endParaRPr lang="en-VN"/>
-          </a:p>
-        </p:txBody>
-      </p:sp>
-      <p:sp>
-        <p:nvSpPr>
-          <p:cNvPr id="5" name="Slide Number Placeholder 4">
-            <a:extLst>
-              <a:ext uri="{FF2B5EF4-FFF2-40B4-BE49-F238E27FC236}">
-                <a16:creationId xmlns:a16="http://schemas.microsoft.com/office/drawing/2014/main" id="{D35B85B0-516F-5109-93AA-529569D672BD}"/>
-              </a:ext>
-            </a:extLst>
-          </p:cNvPr>
+            <a:endParaRPr lang="en-US"/>
+          </a:p>
+        </p:txBody>
+      </p:sp>
+      <p:sp>
+        <p:nvSpPr>
+          <p:cNvPr id="5" name="Slide Number Placeholder 4"/>
           <p:cNvSpPr>
             <a:spLocks noGrp="1"/>
           </p:cNvSpPr>
@@ -2918,19 +2661,13 @@
           <a:lstStyle/>
           <a:p>
             <a:fld id="{1E736747-5B7A-A94A-BBB8-41A0822C9E32}" type="slidenum">
-              <a:rPr lang="en-VN" smtClean="0"/>
-              <a:t>‹#›</a:t>
+              <a:rPr lang="en-US" smtClean="0"/>
             </a:fld>
-            <a:endParaRPr lang="en-VN"/>
+            <a:endParaRPr lang="en-US"/>
           </a:p>
         </p:txBody>
       </p:sp>
     </p:spTree>
-    <p:extLst>
-      <p:ext uri="{BB962C8B-B14F-4D97-AF65-F5344CB8AC3E}">
-        <p14:creationId xmlns:p14="http://schemas.microsoft.com/office/powerpoint/2010/main" val="609657209"/>
-      </p:ext>
-    </p:extLst>
   </p:cSld>
   <p:clrMapOvr>
     <a:masterClrMapping/>
@@ -2957,13 +2694,7 @@
       </p:grpSpPr>
       <p:sp>
         <p:nvSpPr>
-          <p:cNvPr id="2" name="Date Placeholder 1">
-            <a:extLst>
-              <a:ext uri="{FF2B5EF4-FFF2-40B4-BE49-F238E27FC236}">
-                <a16:creationId xmlns:a16="http://schemas.microsoft.com/office/drawing/2014/main" id="{3716236C-BBCE-78FF-FE74-5F2EE67D374E}"/>
-              </a:ext>
-            </a:extLst>
-          </p:cNvPr>
+          <p:cNvPr id="2" name="Date Placeholder 1"/>
           <p:cNvSpPr>
             <a:spLocks noGrp="1"/>
           </p:cNvSpPr>
@@ -2977,22 +2708,15 @@
           <a:lstStyle/>
           <a:p>
             <a:fld id="{2614D681-7D00-494D-8178-8A5F621D8CBA}" type="datetimeFigureOut">
-              <a:rPr lang="en-VN" smtClean="0"/>
-              <a:t>03/17/2026</a:t>
+              <a:rPr lang="en-US" smtClean="0"/>
             </a:fld>
-            <a:endParaRPr lang="en-VN"/>
-          </a:p>
-        </p:txBody>
-      </p:sp>
-      <p:sp>
-        <p:nvSpPr>
-          <p:cNvPr id="3" name="Footer Placeholder 2">
-            <a:extLst>
-              <a:ext uri="{FF2B5EF4-FFF2-40B4-BE49-F238E27FC236}">
-                <a16:creationId xmlns:a16="http://schemas.microsoft.com/office/drawing/2014/main" id="{E353E478-E9B8-2A44-9D67-5753EB1A62B4}"/>
-              </a:ext>
-            </a:extLst>
-          </p:cNvPr>
+            <a:endParaRPr lang="en-US"/>
+          </a:p>
+        </p:txBody>
+      </p:sp>
+      <p:sp>
+        <p:nvSpPr>
+          <p:cNvPr id="3" name="Footer Placeholder 2"/>
           <p:cNvSpPr>
             <a:spLocks noGrp="1"/>
           </p:cNvSpPr>
@@ -3005,19 +2729,13 @@
           <a:bodyPr/>
           <a:lstStyle/>
           <a:p>
-            <a:endParaRPr lang="en-VN"/>
-          </a:p>
-        </p:txBody>
-      </p:sp>
-      <p:sp>
-        <p:nvSpPr>
-          <p:cNvPr id="4" name="Slide Number Placeholder 3">
-            <a:extLst>
-              <a:ext uri="{FF2B5EF4-FFF2-40B4-BE49-F238E27FC236}">
-                <a16:creationId xmlns:a16="http://schemas.microsoft.com/office/drawing/2014/main" id="{A8C9795C-6376-720A-6F8D-5122B7621419}"/>
-              </a:ext>
-            </a:extLst>
-          </p:cNvPr>
+            <a:endParaRPr lang="en-US"/>
+          </a:p>
+        </p:txBody>
+      </p:sp>
+      <p:sp>
+        <p:nvSpPr>
+          <p:cNvPr id="4" name="Slide Number Placeholder 3"/>
           <p:cNvSpPr>
             <a:spLocks noGrp="1"/>
           </p:cNvSpPr>
@@ -3031,19 +2749,13 @@
           <a:lstStyle/>
           <a:p>
             <a:fld id="{1E736747-5B7A-A94A-BBB8-41A0822C9E32}" type="slidenum">
-              <a:rPr lang="en-VN" smtClean="0"/>
-              <a:t>‹#›</a:t>
+              <a:rPr lang="en-US" smtClean="0"/>
             </a:fld>
-            <a:endParaRPr lang="en-VN"/>
+            <a:endParaRPr lang="en-US"/>
           </a:p>
         </p:txBody>
       </p:sp>
     </p:spTree>
-    <p:extLst>
-      <p:ext uri="{BB962C8B-B14F-4D97-AF65-F5344CB8AC3E}">
-        <p14:creationId xmlns:p14="http://schemas.microsoft.com/office/powerpoint/2010/main" val="4167046824"/>
-      </p:ext>
-    </p:extLst>
   </p:cSld>
   <p:clrMapOvr>
     <a:masterClrMapping/>
@@ -3070,13 +2782,7 @@
       </p:grpSpPr>
       <p:sp>
         <p:nvSpPr>
-          <p:cNvPr id="2" name="Title 1">
-            <a:extLst>
-              <a:ext uri="{FF2B5EF4-FFF2-40B4-BE49-F238E27FC236}">
-                <a16:creationId xmlns:a16="http://schemas.microsoft.com/office/drawing/2014/main" id="{92530B9C-9DD9-4593-DC32-F5FC5F97BC0C}"/>
-              </a:ext>
-            </a:extLst>
-          </p:cNvPr>
+          <p:cNvPr id="2" name="Title 1"/>
           <p:cNvSpPr>
             <a:spLocks noGrp="1"/>
           </p:cNvSpPr>
@@ -3102,19 +2808,13 @@
               <a:rPr lang="en-US"/>
               <a:t>Click to edit Master title style</a:t>
             </a:r>
-            <a:endParaRPr lang="en-VN"/>
-          </a:p>
-        </p:txBody>
-      </p:sp>
-      <p:sp>
-        <p:nvSpPr>
-          <p:cNvPr id="3" name="Content Placeholder 2">
-            <a:extLst>
-              <a:ext uri="{FF2B5EF4-FFF2-40B4-BE49-F238E27FC236}">
-                <a16:creationId xmlns:a16="http://schemas.microsoft.com/office/drawing/2014/main" id="{AA10488D-4548-BE51-6B63-511F62DDBB87}"/>
-              </a:ext>
-            </a:extLst>
-          </p:cNvPr>
+            <a:endParaRPr lang="en-US"/>
+          </a:p>
+        </p:txBody>
+      </p:sp>
+      <p:sp>
+        <p:nvSpPr>
+          <p:cNvPr id="3" name="Content Placeholder 2"/>
           <p:cNvSpPr>
             <a:spLocks noGrp="1"/>
           </p:cNvSpPr>
@@ -3165,6 +2865,7 @@
               <a:rPr lang="en-US"/>
               <a:t>Click to edit Master text styles</a:t>
             </a:r>
+            <a:endParaRPr lang="en-US"/>
           </a:p>
           <a:p>
             <a:pPr lvl="1"/>
@@ -3172,6 +2873,7 @@
               <a:rPr lang="en-US"/>
               <a:t>Second level</a:t>
             </a:r>
+            <a:endParaRPr lang="en-US"/>
           </a:p>
           <a:p>
             <a:pPr lvl="2"/>
@@ -3179,6 +2881,7 @@
               <a:rPr lang="en-US"/>
               <a:t>Third level</a:t>
             </a:r>
+            <a:endParaRPr lang="en-US"/>
           </a:p>
           <a:p>
             <a:pPr lvl="3"/>
@@ -3186,6 +2889,7 @@
               <a:rPr lang="en-US"/>
               <a:t>Fourth level</a:t>
             </a:r>
+            <a:endParaRPr lang="en-US"/>
           </a:p>
           <a:p>
             <a:pPr lvl="4"/>
@@ -3193,19 +2897,13 @@
               <a:rPr lang="en-US"/>
               <a:t>Fifth level</a:t>
             </a:r>
-            <a:endParaRPr lang="en-VN"/>
-          </a:p>
-        </p:txBody>
-      </p:sp>
-      <p:sp>
-        <p:nvSpPr>
-          <p:cNvPr id="4" name="Text Placeholder 3">
-            <a:extLst>
-              <a:ext uri="{FF2B5EF4-FFF2-40B4-BE49-F238E27FC236}">
-                <a16:creationId xmlns:a16="http://schemas.microsoft.com/office/drawing/2014/main" id="{EFC30B89-72E5-011E-D72E-28DE22B4080E}"/>
-              </a:ext>
-            </a:extLst>
-          </p:cNvPr>
+            <a:endParaRPr lang="en-US"/>
+          </a:p>
+        </p:txBody>
+      </p:sp>
+      <p:sp>
+        <p:nvSpPr>
+          <p:cNvPr id="4" name="Text Placeholder 3"/>
           <p:cNvSpPr>
             <a:spLocks noGrp="1"/>
           </p:cNvSpPr>
@@ -3265,18 +2963,13 @@
               <a:rPr lang="en-US"/>
               <a:t>Click to edit Master text styles</a:t>
             </a:r>
-          </a:p>
-        </p:txBody>
-      </p:sp>
-      <p:sp>
-        <p:nvSpPr>
-          <p:cNvPr id="5" name="Date Placeholder 4">
-            <a:extLst>
-              <a:ext uri="{FF2B5EF4-FFF2-40B4-BE49-F238E27FC236}">
-                <a16:creationId xmlns:a16="http://schemas.microsoft.com/office/drawing/2014/main" id="{D6854C7B-4F58-CBFE-DDB3-773DE605F4A5}"/>
-              </a:ext>
-            </a:extLst>
-          </p:cNvPr>
+            <a:endParaRPr lang="en-US"/>
+          </a:p>
+        </p:txBody>
+      </p:sp>
+      <p:sp>
+        <p:nvSpPr>
+          <p:cNvPr id="5" name="Date Placeholder 4"/>
           <p:cNvSpPr>
             <a:spLocks noGrp="1"/>
           </p:cNvSpPr>
@@ -3290,22 +2983,15 @@
           <a:lstStyle/>
           <a:p>
             <a:fld id="{2614D681-7D00-494D-8178-8A5F621D8CBA}" type="datetimeFigureOut">
-              <a:rPr lang="en-VN" smtClean="0"/>
-              <a:t>03/17/2026</a:t>
+              <a:rPr lang="en-US" smtClean="0"/>
             </a:fld>
-            <a:endParaRPr lang="en-VN"/>
-          </a:p>
-        </p:txBody>
-      </p:sp>
-      <p:sp>
-        <p:nvSpPr>
-          <p:cNvPr id="6" name="Footer Placeholder 5">
-            <a:extLst>
-              <a:ext uri="{FF2B5EF4-FFF2-40B4-BE49-F238E27FC236}">
-                <a16:creationId xmlns:a16="http://schemas.microsoft.com/office/drawing/2014/main" id="{F7E7AF57-5A6A-A5A3-7E58-C474DCB2D186}"/>
-              </a:ext>
-            </a:extLst>
-          </p:cNvPr>
+            <a:endParaRPr lang="en-US"/>
+          </a:p>
+        </p:txBody>
+      </p:sp>
+      <p:sp>
+        <p:nvSpPr>
+          <p:cNvPr id="6" name="Footer Placeholder 5"/>
           <p:cNvSpPr>
             <a:spLocks noGrp="1"/>
           </p:cNvSpPr>
@@ -3318,19 +3004,13 @@
           <a:bodyPr/>
           <a:lstStyle/>
           <a:p>
-            <a:endParaRPr lang="en-VN"/>
-          </a:p>
-        </p:txBody>
-      </p:sp>
-      <p:sp>
-        <p:nvSpPr>
-          <p:cNvPr id="7" name="Slide Number Placeholder 6">
-            <a:extLst>
-              <a:ext uri="{FF2B5EF4-FFF2-40B4-BE49-F238E27FC236}">
-                <a16:creationId xmlns:a16="http://schemas.microsoft.com/office/drawing/2014/main" id="{2926A9A9-4352-560F-87D0-7CB22A275506}"/>
-              </a:ext>
-            </a:extLst>
-          </p:cNvPr>
+            <a:endParaRPr lang="en-US"/>
+          </a:p>
+        </p:txBody>
+      </p:sp>
+      <p:sp>
+        <p:nvSpPr>
+          <p:cNvPr id="7" name="Slide Number Placeholder 6"/>
           <p:cNvSpPr>
             <a:spLocks noGrp="1"/>
           </p:cNvSpPr>
@@ -3344,19 +3024,13 @@
           <a:lstStyle/>
           <a:p>
             <a:fld id="{1E736747-5B7A-A94A-BBB8-41A0822C9E32}" type="slidenum">
-              <a:rPr lang="en-VN" smtClean="0"/>
-              <a:t>‹#›</a:t>
+              <a:rPr lang="en-US" smtClean="0"/>
             </a:fld>
-            <a:endParaRPr lang="en-VN"/>
+            <a:endParaRPr lang="en-US"/>
           </a:p>
         </p:txBody>
       </p:sp>
     </p:spTree>
-    <p:extLst>
-      <p:ext uri="{BB962C8B-B14F-4D97-AF65-F5344CB8AC3E}">
-        <p14:creationId xmlns:p14="http://schemas.microsoft.com/office/powerpoint/2010/main" val="2928698587"/>
-      </p:ext>
-    </p:extLst>
   </p:cSld>
   <p:clrMapOvr>
     <a:masterClrMapping/>
@@ -3383,13 +3057,7 @@
       </p:grpSpPr>
       <p:sp>
         <p:nvSpPr>
-          <p:cNvPr id="2" name="Title 1">
-            <a:extLst>
-              <a:ext uri="{FF2B5EF4-FFF2-40B4-BE49-F238E27FC236}">
-                <a16:creationId xmlns:a16="http://schemas.microsoft.com/office/drawing/2014/main" id="{24C10CBF-7949-3597-F886-971C519511A7}"/>
-              </a:ext>
-            </a:extLst>
-          </p:cNvPr>
+          <p:cNvPr id="2" name="Title 1"/>
           <p:cNvSpPr>
             <a:spLocks noGrp="1"/>
           </p:cNvSpPr>
@@ -3415,19 +3083,13 @@
               <a:rPr lang="en-US"/>
               <a:t>Click to edit Master title style</a:t>
             </a:r>
-            <a:endParaRPr lang="en-VN"/>
-          </a:p>
-        </p:txBody>
-      </p:sp>
-      <p:sp>
-        <p:nvSpPr>
-          <p:cNvPr id="3" name="Picture Placeholder 2">
-            <a:extLst>
-              <a:ext uri="{FF2B5EF4-FFF2-40B4-BE49-F238E27FC236}">
-                <a16:creationId xmlns:a16="http://schemas.microsoft.com/office/drawing/2014/main" id="{17642CA9-0CFF-9C72-5C68-66C7D1F05D1F}"/>
-              </a:ext>
-            </a:extLst>
-          </p:cNvPr>
+            <a:endParaRPr lang="en-US"/>
+          </a:p>
+        </p:txBody>
+      </p:sp>
+      <p:sp>
+        <p:nvSpPr>
+          <p:cNvPr id="3" name="Picture Placeholder 2"/>
           <p:cNvSpPr>
             <a:spLocks noGrp="1"/>
           </p:cNvSpPr>
@@ -3482,19 +3144,13 @@
             </a:lvl9pPr>
           </a:lstStyle>
           <a:p>
-            <a:endParaRPr lang="en-VN"/>
-          </a:p>
-        </p:txBody>
-      </p:sp>
-      <p:sp>
-        <p:nvSpPr>
-          <p:cNvPr id="4" name="Text Placeholder 3">
-            <a:extLst>
-              <a:ext uri="{FF2B5EF4-FFF2-40B4-BE49-F238E27FC236}">
-                <a16:creationId xmlns:a16="http://schemas.microsoft.com/office/drawing/2014/main" id="{495F2801-DA72-C641-C0F6-07B3EA50BDBF}"/>
-              </a:ext>
-            </a:extLst>
-          </p:cNvPr>
+            <a:endParaRPr lang="en-US"/>
+          </a:p>
+        </p:txBody>
+      </p:sp>
+      <p:sp>
+        <p:nvSpPr>
+          <p:cNvPr id="4" name="Text Placeholder 3"/>
           <p:cNvSpPr>
             <a:spLocks noGrp="1"/>
           </p:cNvSpPr>
@@ -3554,18 +3210,13 @@
               <a:rPr lang="en-US"/>
               <a:t>Click to edit Master text styles</a:t>
             </a:r>
-          </a:p>
-        </p:txBody>
-      </p:sp>
-      <p:sp>
-        <p:nvSpPr>
-          <p:cNvPr id="5" name="Date Placeholder 4">
-            <a:extLst>
-              <a:ext uri="{FF2B5EF4-FFF2-40B4-BE49-F238E27FC236}">
-                <a16:creationId xmlns:a16="http://schemas.microsoft.com/office/drawing/2014/main" id="{3E91F0BB-2CFA-87E7-E720-77249EE333EE}"/>
-              </a:ext>
-            </a:extLst>
-          </p:cNvPr>
+            <a:endParaRPr lang="en-US"/>
+          </a:p>
+        </p:txBody>
+      </p:sp>
+      <p:sp>
+        <p:nvSpPr>
+          <p:cNvPr id="5" name="Date Placeholder 4"/>
           <p:cNvSpPr>
             <a:spLocks noGrp="1"/>
           </p:cNvSpPr>
@@ -3579,22 +3230,15 @@
           <a:lstStyle/>
           <a:p>
             <a:fld id="{2614D681-7D00-494D-8178-8A5F621D8CBA}" type="datetimeFigureOut">
-              <a:rPr lang="en-VN" smtClean="0"/>
-              <a:t>03/17/2026</a:t>
+              <a:rPr lang="en-US" smtClean="0"/>
             </a:fld>
-            <a:endParaRPr lang="en-VN"/>
-          </a:p>
-        </p:txBody>
-      </p:sp>
-      <p:sp>
-        <p:nvSpPr>
-          <p:cNvPr id="6" name="Footer Placeholder 5">
-            <a:extLst>
-              <a:ext uri="{FF2B5EF4-FFF2-40B4-BE49-F238E27FC236}">
-                <a16:creationId xmlns:a16="http://schemas.microsoft.com/office/drawing/2014/main" id="{2CA2CC15-45A6-7CCA-4FF4-0E57DA44C3AE}"/>
-              </a:ext>
-            </a:extLst>
-          </p:cNvPr>
+            <a:endParaRPr lang="en-US"/>
+          </a:p>
+        </p:txBody>
+      </p:sp>
+      <p:sp>
+        <p:nvSpPr>
+          <p:cNvPr id="6" name="Footer Placeholder 5"/>
           <p:cNvSpPr>
             <a:spLocks noGrp="1"/>
           </p:cNvSpPr>
@@ -3607,19 +3251,13 @@
           <a:bodyPr/>
           <a:lstStyle/>
           <a:p>
-            <a:endParaRPr lang="en-VN"/>
-          </a:p>
-        </p:txBody>
-      </p:sp>
-      <p:sp>
-        <p:nvSpPr>
-          <p:cNvPr id="7" name="Slide Number Placeholder 6">
-            <a:extLst>
-              <a:ext uri="{FF2B5EF4-FFF2-40B4-BE49-F238E27FC236}">
-                <a16:creationId xmlns:a16="http://schemas.microsoft.com/office/drawing/2014/main" id="{D2969680-C7BA-F290-8281-E89A57F3922D}"/>
-              </a:ext>
-            </a:extLst>
-          </p:cNvPr>
+            <a:endParaRPr lang="en-US"/>
+          </a:p>
+        </p:txBody>
+      </p:sp>
+      <p:sp>
+        <p:nvSpPr>
+          <p:cNvPr id="7" name="Slide Number Placeholder 6"/>
           <p:cNvSpPr>
             <a:spLocks noGrp="1"/>
           </p:cNvSpPr>
@@ -3633,19 +3271,13 @@
           <a:lstStyle/>
           <a:p>
             <a:fld id="{1E736747-5B7A-A94A-BBB8-41A0822C9E32}" type="slidenum">
-              <a:rPr lang="en-VN" smtClean="0"/>
-              <a:t>‹#›</a:t>
+              <a:rPr lang="en-US" smtClean="0"/>
             </a:fld>
-            <a:endParaRPr lang="en-VN"/>
+            <a:endParaRPr lang="en-US"/>
           </a:p>
         </p:txBody>
       </p:sp>
     </p:spTree>
-    <p:extLst>
-      <p:ext uri="{BB962C8B-B14F-4D97-AF65-F5344CB8AC3E}">
-        <p14:creationId xmlns:p14="http://schemas.microsoft.com/office/powerpoint/2010/main" val="971811861"/>
-      </p:ext>
-    </p:extLst>
   </p:cSld>
   <p:clrMapOvr>
     <a:masterClrMapping/>
@@ -3677,13 +3309,7 @@
       </p:grpSpPr>
       <p:sp>
         <p:nvSpPr>
-          <p:cNvPr id="2" name="Title Placeholder 1">
-            <a:extLst>
-              <a:ext uri="{FF2B5EF4-FFF2-40B4-BE49-F238E27FC236}">
-                <a16:creationId xmlns:a16="http://schemas.microsoft.com/office/drawing/2014/main" id="{09A6B53A-5D08-919C-8D20-49D77AE4D7C4}"/>
-              </a:ext>
-            </a:extLst>
-          </p:cNvPr>
+          <p:cNvPr id="2" name="Title Placeholder 1"/>
           <p:cNvSpPr>
             <a:spLocks noGrp="1"/>
           </p:cNvSpPr>
@@ -3710,19 +3336,13 @@
               <a:rPr lang="en-US"/>
               <a:t>Click to edit Master title style</a:t>
             </a:r>
-            <a:endParaRPr lang="en-VN"/>
-          </a:p>
-        </p:txBody>
-      </p:sp>
-      <p:sp>
-        <p:nvSpPr>
-          <p:cNvPr id="3" name="Text Placeholder 2">
-            <a:extLst>
-              <a:ext uri="{FF2B5EF4-FFF2-40B4-BE49-F238E27FC236}">
-                <a16:creationId xmlns:a16="http://schemas.microsoft.com/office/drawing/2014/main" id="{D9F2844D-1731-BEA3-A3FB-2517C8115351}"/>
-              </a:ext>
-            </a:extLst>
-          </p:cNvPr>
+            <a:endParaRPr lang="en-US"/>
+          </a:p>
+        </p:txBody>
+      </p:sp>
+      <p:sp>
+        <p:nvSpPr>
+          <p:cNvPr id="3" name="Text Placeholder 2"/>
           <p:cNvSpPr>
             <a:spLocks noGrp="1"/>
           </p:cNvSpPr>
@@ -3750,6 +3370,7 @@
               <a:rPr lang="en-US"/>
               <a:t>Click to edit Master text styles</a:t>
             </a:r>
+            <a:endParaRPr lang="en-US"/>
           </a:p>
           <a:p>
             <a:pPr lvl="1"/>
@@ -3757,6 +3378,7 @@
               <a:rPr lang="en-US"/>
               <a:t>Second level</a:t>
             </a:r>
+            <a:endParaRPr lang="en-US"/>
           </a:p>
           <a:p>
             <a:pPr lvl="2"/>
@@ -3764,6 +3386,7 @@
               <a:rPr lang="en-US"/>
               <a:t>Third level</a:t>
             </a:r>
+            <a:endParaRPr lang="en-US"/>
           </a:p>
           <a:p>
             <a:pPr lvl="3"/>
@@ -3771,6 +3394,7 @@
               <a:rPr lang="en-US"/>
               <a:t>Fourth level</a:t>
             </a:r>
+            <a:endParaRPr lang="en-US"/>
           </a:p>
           <a:p>
             <a:pPr lvl="4"/>
@@ -3778,19 +3402,13 @@
               <a:rPr lang="en-US"/>
               <a:t>Fifth level</a:t>
             </a:r>
-            <a:endParaRPr lang="en-VN"/>
-          </a:p>
-        </p:txBody>
-      </p:sp>
-      <p:sp>
-        <p:nvSpPr>
-          <p:cNvPr id="4" name="Date Placeholder 3">
-            <a:extLst>
-              <a:ext uri="{FF2B5EF4-FFF2-40B4-BE49-F238E27FC236}">
-                <a16:creationId xmlns:a16="http://schemas.microsoft.com/office/drawing/2014/main" id="{424E696A-F353-1AD4-9FFE-A5E020C16BF1}"/>
-              </a:ext>
-            </a:extLst>
-          </p:cNvPr>
+            <a:endParaRPr lang="en-US"/>
+          </a:p>
+        </p:txBody>
+      </p:sp>
+      <p:sp>
+        <p:nvSpPr>
+          <p:cNvPr id="4" name="Date Placeholder 3"/>
           <p:cNvSpPr>
             <a:spLocks noGrp="1"/>
           </p:cNvSpPr>
@@ -3822,22 +3440,15 @@
           </a:lstStyle>
           <a:p>
             <a:fld id="{2614D681-7D00-494D-8178-8A5F621D8CBA}" type="datetimeFigureOut">
-              <a:rPr lang="en-VN" smtClean="0"/>
-              <a:t>03/17/2026</a:t>
+              <a:rPr lang="en-US" smtClean="0"/>
             </a:fld>
-            <a:endParaRPr lang="en-VN"/>
-          </a:p>
-        </p:txBody>
-      </p:sp>
-      <p:sp>
-        <p:nvSpPr>
-          <p:cNvPr id="5" name="Footer Placeholder 4">
-            <a:extLst>
-              <a:ext uri="{FF2B5EF4-FFF2-40B4-BE49-F238E27FC236}">
-                <a16:creationId xmlns:a16="http://schemas.microsoft.com/office/drawing/2014/main" id="{2EA4ABA5-6377-A135-B6DC-4AC799D68D2B}"/>
-              </a:ext>
-            </a:extLst>
-          </p:cNvPr>
+            <a:endParaRPr lang="en-US"/>
+          </a:p>
+        </p:txBody>
+      </p:sp>
+      <p:sp>
+        <p:nvSpPr>
+          <p:cNvPr id="5" name="Footer Placeholder 4"/>
           <p:cNvSpPr>
             <a:spLocks noGrp="1"/>
           </p:cNvSpPr>
@@ -3868,19 +3479,13 @@
             </a:lvl1pPr>
           </a:lstStyle>
           <a:p>
-            <a:endParaRPr lang="en-VN"/>
-          </a:p>
-        </p:txBody>
-      </p:sp>
-      <p:sp>
-        <p:nvSpPr>
-          <p:cNvPr id="6" name="Slide Number Placeholder 5">
-            <a:extLst>
-              <a:ext uri="{FF2B5EF4-FFF2-40B4-BE49-F238E27FC236}">
-                <a16:creationId xmlns:a16="http://schemas.microsoft.com/office/drawing/2014/main" id="{2A6BD32E-D421-A3AD-7E67-FD561825DB38}"/>
-              </a:ext>
-            </a:extLst>
-          </p:cNvPr>
+            <a:endParaRPr lang="en-US"/>
+          </a:p>
+        </p:txBody>
+      </p:sp>
+      <p:sp>
+        <p:nvSpPr>
+          <p:cNvPr id="6" name="Slide Number Placeholder 5"/>
           <p:cNvSpPr>
             <a:spLocks noGrp="1"/>
           </p:cNvSpPr>
@@ -3912,19 +3517,13 @@
           </a:lstStyle>
           <a:p>
             <a:fld id="{1E736747-5B7A-A94A-BBB8-41A0822C9E32}" type="slidenum">
-              <a:rPr lang="en-VN" smtClean="0"/>
-              <a:t>‹#›</a:t>
+              <a:rPr lang="en-US" smtClean="0"/>
             </a:fld>
-            <a:endParaRPr lang="en-VN"/>
+            <a:endParaRPr lang="en-US"/>
           </a:p>
         </p:txBody>
       </p:sp>
     </p:spTree>
-    <p:extLst>
-      <p:ext uri="{BB962C8B-B14F-4D97-AF65-F5344CB8AC3E}">
-        <p14:creationId xmlns:p14="http://schemas.microsoft.com/office/powerpoint/2010/main" val="1105064279"/>
-      </p:ext>
-    </p:extLst>
   </p:cSld>
   <p:clrMap bg1="lt1" tx1="dk1" bg2="lt2" tx2="dk2" accent1="accent1" accent2="accent2" accent3="accent3" accent4="accent4" accent5="accent5" accent6="accent6" hlink="hlink" folHlink="folHlink"/>
   <p:sldLayoutIdLst>
@@ -4126,7 +3725,7 @@
     </p:bodyStyle>
     <p:otherStyle>
       <a:defPPr>
-        <a:defRPr lang="en-VN"/>
+        <a:defRPr lang="en-US"/>
       </a:defPPr>
       <a:lvl1pPr marL="0" algn="l" defTabSz="914400" rtl="0" eaLnBrk="1" latinLnBrk="0" hangingPunct="1">
         <a:defRPr sz="1800" kern="1200">
@@ -4242,13 +3841,7 @@
       </p:grpSpPr>
       <p:sp>
         <p:nvSpPr>
-          <p:cNvPr id="3" name="Content Placeholder 2">
-            <a:extLst>
-              <a:ext uri="{FF2B5EF4-FFF2-40B4-BE49-F238E27FC236}">
-                <a16:creationId xmlns:a16="http://schemas.microsoft.com/office/drawing/2014/main" id="{BF119FEB-0933-F44B-8535-AFC2BC13A9D9}"/>
-              </a:ext>
-            </a:extLst>
-          </p:cNvPr>
+          <p:cNvPr id="3" name="Content Placeholder 2"/>
           <p:cNvSpPr>
             <a:spLocks noGrp="1"/>
           </p:cNvSpPr>
@@ -4282,7 +3875,7 @@
               <a:rPr lang="en-US" sz="2000" dirty="0"/>
               <a:t>==1.1.8</a:t>
             </a:r>
-            <a:endParaRPr lang="en-VN" sz="2000" dirty="0"/>
+            <a:endParaRPr lang="en-US" sz="2000" dirty="0"/>
           </a:p>
           <a:p>
             <a:pPr lvl="1">
@@ -4296,13 +3889,7 @@
       </p:sp>
       <p:sp>
         <p:nvSpPr>
-          <p:cNvPr id="8" name="TextBox 7">
-            <a:extLst>
-              <a:ext uri="{FF2B5EF4-FFF2-40B4-BE49-F238E27FC236}">
-                <a16:creationId xmlns:a16="http://schemas.microsoft.com/office/drawing/2014/main" id="{453F3D47-D952-C4E1-92C6-EED688302604}"/>
-              </a:ext>
-            </a:extLst>
-          </p:cNvPr>
+          <p:cNvPr id="8" name="TextBox 7"/>
           <p:cNvSpPr txBox="1"/>
           <p:nvPr/>
         </p:nvSpPr>
@@ -4355,6 +3942,7 @@
               <a:rPr lang="en-US" dirty="0"/>
               <a:t>Requires internet</a:t>
             </a:r>
+            <a:endParaRPr lang="en-US" dirty="0"/>
           </a:p>
           <a:p>
             <a:pPr marL="342900" indent="-342900">
@@ -4386,21 +3974,14 @@
               <a:rPr lang="en-US" dirty="0"/>
               <a:t>Just support GPU</a:t>
             </a:r>
-          </a:p>
-        </p:txBody>
-      </p:sp>
-      <p:sp>
-        <p:nvSpPr>
-          <p:cNvPr id="9" name="Content Placeholder 2">
-            <a:extLst>
-              <a:ext uri="{FF2B5EF4-FFF2-40B4-BE49-F238E27FC236}">
-                <a16:creationId xmlns:a16="http://schemas.microsoft.com/office/drawing/2014/main" id="{39B3D9B7-7FE4-28DF-42F8-9EC6EF449D62}"/>
-              </a:ext>
-            </a:extLst>
-          </p:cNvPr>
-          <p:cNvSpPr txBox="1">
-            <a:spLocks/>
-          </p:cNvSpPr>
+            <a:endParaRPr lang="en-US" dirty="0"/>
+          </a:p>
+        </p:txBody>
+      </p:sp>
+      <p:sp>
+        <p:nvSpPr>
+          <p:cNvPr id="9" name="Content Placeholder 2"/>
+          <p:cNvSpPr txBox="1"/>
           <p:nvPr/>
         </p:nvSpPr>
         <p:spPr>
@@ -4604,7 +4185,7 @@
               <a:rPr lang="en-US" sz="2000" dirty="0"/>
               <a:t> mode</a:t>
             </a:r>
-            <a:endParaRPr lang="en-VN" sz="2000" dirty="0"/>
+            <a:endParaRPr lang="en-US" sz="2000" dirty="0"/>
           </a:p>
           <a:p>
             <a:pPr lvl="1">
@@ -4618,13 +4199,7 @@
       </p:sp>
       <p:sp>
         <p:nvSpPr>
-          <p:cNvPr id="11" name="TextBox 10">
-            <a:extLst>
-              <a:ext uri="{FF2B5EF4-FFF2-40B4-BE49-F238E27FC236}">
-                <a16:creationId xmlns:a16="http://schemas.microsoft.com/office/drawing/2014/main" id="{77A2766E-5EC6-BE16-4965-774D65B64637}"/>
-              </a:ext>
-            </a:extLst>
-          </p:cNvPr>
+          <p:cNvPr id="11" name="TextBox 10"/>
           <p:cNvSpPr txBox="1"/>
           <p:nvPr/>
         </p:nvSpPr>
@@ -4691,6 +4266,7 @@
               <a:rPr lang="en-US" dirty="0"/>
               <a:t>Works on Mac / Linux / Windows</a:t>
             </a:r>
+            <a:endParaRPr lang="en-US" dirty="0"/>
           </a:p>
           <a:p>
             <a:pPr marL="342900" indent="-342900">
@@ -4708,21 +4284,14 @@
               <a:rPr lang="en-US" dirty="0"/>
               <a:t> for large documents</a:t>
             </a:r>
-          </a:p>
-        </p:txBody>
-      </p:sp>
-      <p:sp>
-        <p:nvSpPr>
-          <p:cNvPr id="12" name="Content Placeholder 2">
-            <a:extLst>
-              <a:ext uri="{FF2B5EF4-FFF2-40B4-BE49-F238E27FC236}">
-                <a16:creationId xmlns:a16="http://schemas.microsoft.com/office/drawing/2014/main" id="{96CBB70C-AF05-8474-818C-CDB494F80887}"/>
-              </a:ext>
-            </a:extLst>
-          </p:cNvPr>
-          <p:cNvSpPr txBox="1">
-            <a:spLocks/>
-          </p:cNvSpPr>
+            <a:endParaRPr lang="en-US" dirty="0"/>
+          </a:p>
+        </p:txBody>
+      </p:sp>
+      <p:sp>
+        <p:nvSpPr>
+          <p:cNvPr id="12" name="Content Placeholder 2"/>
+          <p:cNvSpPr txBox="1"/>
           <p:nvPr/>
         </p:nvSpPr>
         <p:spPr>
@@ -4926,7 +4495,7 @@
               <a:rPr lang="en-US" sz="2000" dirty="0"/>
               <a:t> mode</a:t>
             </a:r>
-            <a:endParaRPr lang="en-VN" sz="2000" dirty="0"/>
+            <a:endParaRPr lang="en-US" sz="2000" dirty="0"/>
           </a:p>
           <a:p>
             <a:pPr lvl="1">
@@ -4940,13 +4509,55 @@
       </p:sp>
       <p:pic>
         <p:nvPicPr>
-          <p:cNvPr id="16" name="Picture 15">
-            <a:extLst>
-              <a:ext uri="{FF2B5EF4-FFF2-40B4-BE49-F238E27FC236}">
-                <a16:creationId xmlns:a16="http://schemas.microsoft.com/office/drawing/2014/main" id="{2B9DEC8B-1C5F-D741-430B-636784334010}"/>
-              </a:ext>
-            </a:extLst>
-          </p:cNvPr>
+          <p:cNvPr id="16" name="Picture 15"/>
+          <p:cNvPicPr>
+            <a:picLocks noChangeAspect="1"/>
+          </p:cNvPicPr>
+          <p:nvPr/>
+        </p:nvPicPr>
+        <p:blipFill>
+          <a:blip r:embed="rId1"/>
+          <a:stretch>
+            <a:fillRect/>
+          </a:stretch>
+        </p:blipFill>
+        <p:spPr>
+          <a:xfrm>
+            <a:off x="214666" y="627599"/>
+            <a:ext cx="4333835" cy="1000116"/>
+          </a:xfrm>
+          <a:prstGeom prst="rect">
+            <a:avLst/>
+          </a:prstGeom>
+        </p:spPr>
+      </p:pic>
+      <p:pic>
+        <p:nvPicPr>
+          <p:cNvPr id="18" name="Picture 17"/>
+          <p:cNvPicPr>
+            <a:picLocks noChangeAspect="1"/>
+          </p:cNvPicPr>
+          <p:nvPr/>
+        </p:nvPicPr>
+        <p:blipFill>
+          <a:blip r:embed="rId2"/>
+          <a:stretch>
+            <a:fillRect/>
+          </a:stretch>
+        </p:blipFill>
+        <p:spPr>
+          <a:xfrm>
+            <a:off x="214666" y="2419315"/>
+            <a:ext cx="4333835" cy="925804"/>
+          </a:xfrm>
+          <a:prstGeom prst="rect">
+            <a:avLst/>
+          </a:prstGeom>
+        </p:spPr>
+      </p:pic>
+      <p:pic>
+        <p:nvPicPr>
+          <p:cNvPr id="21" name="Picture 20"/>
           <p:cNvPicPr>
             <a:picLocks noChangeAspect="1"/>
           </p:cNvPicPr>
@@ -4960,83 +4571,17 @@
         </p:blipFill>
         <p:spPr>
           <a:xfrm>
-            <a:off x="214666" y="627599"/>
-            <a:ext cx="4333835" cy="1000116"/>
+            <a:off x="161307" y="4034142"/>
+            <a:ext cx="4333835" cy="903428"/>
           </a:xfrm>
           <a:prstGeom prst="rect">
             <a:avLst/>
           </a:prstGeom>
         </p:spPr>
       </p:pic>
-      <p:pic>
-        <p:nvPicPr>
-          <p:cNvPr id="18" name="Picture 17">
-            <a:extLst>
-              <a:ext uri="{FF2B5EF4-FFF2-40B4-BE49-F238E27FC236}">
-                <a16:creationId xmlns:a16="http://schemas.microsoft.com/office/drawing/2014/main" id="{B9F8634C-B3D5-A8DA-C723-36D0088CB50F}"/>
-              </a:ext>
-            </a:extLst>
-          </p:cNvPr>
-          <p:cNvPicPr>
-            <a:picLocks noChangeAspect="1"/>
-          </p:cNvPicPr>
-          <p:nvPr/>
-        </p:nvPicPr>
-        <p:blipFill>
-          <a:blip r:embed="rId4"/>
-          <a:stretch>
-            <a:fillRect/>
-          </a:stretch>
-        </p:blipFill>
-        <p:spPr>
-          <a:xfrm>
-            <a:off x="214666" y="2419315"/>
-            <a:ext cx="4333835" cy="925804"/>
-          </a:xfrm>
-          <a:prstGeom prst="rect">
-            <a:avLst/>
-          </a:prstGeom>
-        </p:spPr>
-      </p:pic>
-      <p:pic>
-        <p:nvPicPr>
-          <p:cNvPr id="21" name="Picture 20">
-            <a:extLst>
-              <a:ext uri="{FF2B5EF4-FFF2-40B4-BE49-F238E27FC236}">
-                <a16:creationId xmlns:a16="http://schemas.microsoft.com/office/drawing/2014/main" id="{398239DD-4C11-0FDA-4A7E-05AE7B437582}"/>
-              </a:ext>
-            </a:extLst>
-          </p:cNvPr>
-          <p:cNvPicPr>
-            <a:picLocks noChangeAspect="1"/>
-          </p:cNvPicPr>
-          <p:nvPr/>
-        </p:nvPicPr>
-        <p:blipFill>
-          <a:blip r:embed="rId5"/>
-          <a:stretch>
-            <a:fillRect/>
-          </a:stretch>
-        </p:blipFill>
-        <p:spPr>
-          <a:xfrm>
-            <a:off x="161307" y="4034142"/>
-            <a:ext cx="4333835" cy="903428"/>
-          </a:xfrm>
-          <a:prstGeom prst="rect">
-            <a:avLst/>
-          </a:prstGeom>
-        </p:spPr>
-      </p:pic>
-      <p:sp>
-        <p:nvSpPr>
-          <p:cNvPr id="23" name="TextBox 22">
-            <a:extLst>
-              <a:ext uri="{FF2B5EF4-FFF2-40B4-BE49-F238E27FC236}">
-                <a16:creationId xmlns:a16="http://schemas.microsoft.com/office/drawing/2014/main" id="{80408817-9A7A-0C15-B3CB-ABE54B8262FC}"/>
-              </a:ext>
-            </a:extLst>
-          </p:cNvPr>
+      <p:sp>
+        <p:nvSpPr>
+          <p:cNvPr id="23" name="TextBox 22"/>
           <p:cNvSpPr txBox="1"/>
           <p:nvPr/>
         </p:nvSpPr>
@@ -5065,6 +4610,7 @@
               <a:rPr lang="en-US" dirty="0"/>
               <a:t>Requirements</a:t>
             </a:r>
+            <a:endParaRPr lang="en-US" dirty="0"/>
           </a:p>
           <a:p>
             <a:pPr marL="285750" indent="-285750">
@@ -5084,13 +4630,7 @@
       </p:sp>
       <p:sp>
         <p:nvSpPr>
-          <p:cNvPr id="25" name="TextBox 24">
-            <a:extLst>
-              <a:ext uri="{FF2B5EF4-FFF2-40B4-BE49-F238E27FC236}">
-                <a16:creationId xmlns:a16="http://schemas.microsoft.com/office/drawing/2014/main" id="{4708206E-E843-C2DF-7BD9-450D95AD3DF9}"/>
-              </a:ext>
-            </a:extLst>
-          </p:cNvPr>
+          <p:cNvPr id="25" name="TextBox 24"/>
           <p:cNvSpPr txBox="1"/>
           <p:nvPr/>
         </p:nvSpPr>
@@ -5119,6 +4659,7 @@
               <a:rPr lang="en-US" dirty="0"/>
               <a:t>Advantages</a:t>
             </a:r>
+            <a:endParaRPr lang="en-US" dirty="0"/>
           </a:p>
           <a:p>
             <a:pPr marL="285750" indent="-285750">
@@ -5132,6 +4673,7 @@
               <a:rPr lang="en-US" dirty="0"/>
               <a:t>5–20× faster</a:t>
             </a:r>
+            <a:endParaRPr lang="en-US" dirty="0"/>
           </a:p>
           <a:p>
             <a:pPr marL="285750" indent="-285750">
@@ -5145,25 +4687,20 @@
               <a:rPr lang="en-US" dirty="0"/>
               <a:t>Best for large PDFs</a:t>
             </a:r>
-          </a:p>
-        </p:txBody>
-      </p:sp>
-      <p:sp>
-        <p:nvSpPr>
-          <p:cNvPr id="4" name="TextBox 3">
-            <a:extLst>
-              <a:ext uri="{FF2B5EF4-FFF2-40B4-BE49-F238E27FC236}">
-                <a16:creationId xmlns:a16="http://schemas.microsoft.com/office/drawing/2014/main" id="{733C7D5E-9262-88DE-1DF5-DEA59A718F37}"/>
-              </a:ext>
-            </a:extLst>
-          </p:cNvPr>
+            <a:endParaRPr lang="en-US" dirty="0"/>
+          </a:p>
+        </p:txBody>
+      </p:sp>
+      <p:sp>
+        <p:nvSpPr>
+          <p:cNvPr id="4" name="TextBox 3"/>
           <p:cNvSpPr txBox="1"/>
           <p:nvPr/>
         </p:nvSpPr>
         <p:spPr>
           <a:xfrm>
             <a:off x="38531" y="5126600"/>
-            <a:ext cx="5554980" cy="1477328"/>
+            <a:ext cx="5554980" cy="368300"/>
           </a:xfrm>
           <a:prstGeom prst="rect">
             <a:avLst/>
@@ -5176,34 +4713,108 @@
           </a:bodyPr>
           <a:lstStyle/>
           <a:p>
-            <a:r>
-              <a:rPr lang="en-US" b="1" dirty="0"/>
-              <a:t>PDF:</a:t>
-            </a:r>
-            <a:r>
-              <a:rPr lang="en-US" dirty="0"/>
-              <a:t> Uses OCR because files may contain scanned images instead of text.</a:t>
-            </a:r>
-            <a:br>
-              <a:rPr lang="en-US" dirty="0"/>
-            </a:br>
-            <a:r>
-              <a:rPr lang="en-US" b="1" dirty="0"/>
-              <a:t>DOCX:</a:t>
-            </a:r>
-            <a:r>
-              <a:rPr lang="en-US" dirty="0"/>
-              <a:t> No OCR needed; content and tables are stored in structured XML, enabling more accurate table extraction than PDF.</a:t>
-            </a:r>
+            <a:endParaRPr lang="en-US" dirty="0"/>
           </a:p>
         </p:txBody>
       </p:sp>
     </p:spTree>
-    <p:extLst>
-      <p:ext uri="{BB962C8B-B14F-4D97-AF65-F5344CB8AC3E}">
-        <p14:creationId xmlns:p14="http://schemas.microsoft.com/office/powerpoint/2010/main" val="257557781"/>
-      </p:ext>
-    </p:extLst>
+  </p:cSld>
+  <p:clrMapOvr>
+    <a:masterClrMapping/>
+  </p:clrMapOvr>
+</p:sld>
+</file>
+
+<file path=ppt/slides/slide10.xml><?xml version="1.0" encoding="utf-8"?>
+<p:sld xmlns:a="http://schemas.openxmlformats.org/drawingml/2006/main" xmlns:r="http://schemas.openxmlformats.org/officeDocument/2006/relationships" xmlns:p="http://schemas.openxmlformats.org/presentationml/2006/main">
+  <p:cSld>
+    <p:spTree>
+      <p:nvGrpSpPr>
+        <p:cNvPr id="1" name=""/>
+        <p:cNvGrpSpPr/>
+        <p:nvPr/>
+      </p:nvGrpSpPr>
+      <p:grpSpPr>
+        <a:xfrm>
+          <a:off x="0" y="0"/>
+          <a:ext cx="0" cy="0"/>
+          <a:chOff x="0" y="0"/>
+          <a:chExt cx="0" cy="0"/>
+        </a:xfrm>
+      </p:grpSpPr>
+      <p:pic>
+        <p:nvPicPr>
+          <p:cNvPr id="4" name="Picture 3"/>
+          <p:cNvPicPr>
+            <a:picLocks noChangeAspect="1"/>
+          </p:cNvPicPr>
+          <p:nvPr/>
+        </p:nvPicPr>
+        <p:blipFill>
+          <a:blip r:embed="rId1"/>
+          <a:stretch>
+            <a:fillRect/>
+          </a:stretch>
+        </p:blipFill>
+        <p:spPr>
+          <a:xfrm>
+            <a:off x="0" y="0"/>
+            <a:ext cx="6668431" cy="1362265"/>
+          </a:xfrm>
+          <a:prstGeom prst="rect">
+            <a:avLst/>
+          </a:prstGeom>
+        </p:spPr>
+      </p:pic>
+      <p:pic>
+        <p:nvPicPr>
+          <p:cNvPr id="5" name="Picture 4"/>
+          <p:cNvPicPr>
+            <a:picLocks noChangeAspect="1"/>
+          </p:cNvPicPr>
+          <p:nvPr/>
+        </p:nvPicPr>
+        <p:blipFill>
+          <a:blip r:embed="rId2"/>
+          <a:stretch>
+            <a:fillRect/>
+          </a:stretch>
+        </p:blipFill>
+        <p:spPr>
+          <a:xfrm>
+            <a:off x="1" y="3296734"/>
+            <a:ext cx="5669279" cy="3561266"/>
+          </a:xfrm>
+          <a:prstGeom prst="rect">
+            <a:avLst/>
+          </a:prstGeom>
+        </p:spPr>
+      </p:pic>
+      <p:pic>
+        <p:nvPicPr>
+          <p:cNvPr id="6" name="Picture 5"/>
+          <p:cNvPicPr>
+            <a:picLocks noChangeAspect="1"/>
+          </p:cNvPicPr>
+          <p:nvPr/>
+        </p:nvPicPr>
+        <p:blipFill>
+          <a:blip r:embed="rId3"/>
+          <a:stretch>
+            <a:fillRect/>
+          </a:stretch>
+        </p:blipFill>
+        <p:spPr>
+          <a:xfrm>
+            <a:off x="5779008" y="2074431"/>
+            <a:ext cx="6412992" cy="4783569"/>
+          </a:xfrm>
+          <a:prstGeom prst="rect">
+            <a:avLst/>
+          </a:prstGeom>
+        </p:spPr>
+      </p:pic>
+    </p:spTree>
   </p:cSld>
   <p:clrMapOvr>
     <a:masterClrMapping/>
@@ -5220,6 +4831,526 @@
         <p:cNvGrpSpPr/>
         <p:nvPr/>
       </p:nvGrpSpPr>
+      <p:grpSpPr/>
+      <p:sp>
+        <p:nvSpPr>
+          <p:cNvPr id="2" name="Title 1"/>
+          <p:cNvSpPr>
+            <a:spLocks noGrp="1"/>
+          </p:cNvSpPr>
+          <p:nvPr>
+            <p:ph type="title"/>
+          </p:nvPr>
+        </p:nvSpPr>
+        <p:spPr>
+          <a:xfrm>
+            <a:off x="838200" y="354330"/>
+            <a:ext cx="10515600" cy="1325563"/>
+          </a:xfrm>
+        </p:spPr>
+        <p:txBody>
+          <a:bodyPr/>
+          <a:p>
+            <a:pPr algn="ctr"/>
+            <a:r>
+              <a:rPr lang="en-US"/>
+              <a:t>Trade-offs</a:t>
+            </a:r>
+            <a:endParaRPr lang="en-US"/>
+          </a:p>
+        </p:txBody>
+      </p:sp>
+      <p:sp>
+        <p:nvSpPr>
+          <p:cNvPr id="3" name="Content Placeholder 2"/>
+          <p:cNvSpPr>
+            <a:spLocks noGrp="1"/>
+          </p:cNvSpPr>
+          <p:nvPr>
+            <p:ph idx="1"/>
+          </p:nvPr>
+        </p:nvSpPr>
+        <p:spPr>
+          <a:xfrm>
+            <a:off x="838200" y="1825625"/>
+            <a:ext cx="4998720" cy="553085"/>
+          </a:xfrm>
+        </p:spPr>
+        <p:txBody>
+          <a:bodyPr>
+            <a:normAutofit fontScale="70000"/>
+          </a:bodyPr>
+          <a:p>
+            <a:pPr marL="0" indent="0" algn="ctr">
+              <a:buNone/>
+            </a:pPr>
+            <a:r>
+              <a:rPr lang="en-US" sz="4000" b="1">
+                <a:solidFill>
+                  <a:schemeClr val="accent1"/>
+                </a:solidFill>
+              </a:rPr>
+              <a:t>PDF</a:t>
+            </a:r>
+            <a:endParaRPr lang="en-US" sz="4000" b="1">
+              <a:solidFill>
+                <a:schemeClr val="accent1"/>
+              </a:solidFill>
+            </a:endParaRPr>
+          </a:p>
+        </p:txBody>
+      </p:sp>
+      <p:cxnSp>
+        <p:nvCxnSpPr>
+          <p:cNvPr id="4" name="Straight Connector 3"/>
+          <p:cNvCxnSpPr/>
+          <p:nvPr/>
+        </p:nvCxnSpPr>
+        <p:spPr>
+          <a:xfrm>
+            <a:off x="5836920" y="1825625"/>
+            <a:ext cx="0" cy="4351655"/>
+          </a:xfrm>
+          <a:prstGeom prst="line">
+            <a:avLst/>
+          </a:prstGeom>
+        </p:spPr>
+        <p:style>
+          <a:lnRef idx="2">
+            <a:schemeClr val="accent1"/>
+          </a:lnRef>
+          <a:fillRef idx="0">
+            <a:schemeClr val="accent1"/>
+          </a:fillRef>
+          <a:effectRef idx="1">
+            <a:schemeClr val="accent1"/>
+          </a:effectRef>
+          <a:fontRef idx="minor">
+            <a:schemeClr val="tx1"/>
+          </a:fontRef>
+        </p:style>
+      </p:cxnSp>
+      <p:sp>
+        <p:nvSpPr>
+          <p:cNvPr id="6" name="Text Box 5"/>
+          <p:cNvSpPr txBox="1"/>
+          <p:nvPr/>
+        </p:nvSpPr>
+        <p:spPr>
+          <a:xfrm>
+            <a:off x="641350" y="3174365"/>
+            <a:ext cx="4804410" cy="645160"/>
+          </a:xfrm>
+          <a:prstGeom prst="rect">
+            <a:avLst/>
+          </a:prstGeom>
+          <a:noFill/>
+        </p:spPr>
+        <p:txBody>
+          <a:bodyPr wrap="square" rtlCol="0" anchor="t">
+            <a:spAutoFit/>
+          </a:bodyPr>
+          <a:p>
+            <a:pPr marL="0" indent="0">
+              <a:buNone/>
+            </a:pPr>
+            <a:r>
+              <a:rPr lang="en-US" dirty="0">
+                <a:sym typeface="+mn-ea"/>
+              </a:rPr>
+              <a:t>Uses OCR because files may contain scanned images instead of text.</a:t>
+            </a:r>
+            <a:endParaRPr lang="en-US"/>
+          </a:p>
+        </p:txBody>
+      </p:sp>
+      <p:sp>
+        <p:nvSpPr>
+          <p:cNvPr id="7" name="Content Placeholder 2"/>
+          <p:cNvSpPr>
+            <a:spLocks noGrp="1"/>
+          </p:cNvSpPr>
+          <p:nvPr/>
+        </p:nvSpPr>
+        <p:spPr>
+          <a:xfrm>
+            <a:off x="6399530" y="1825625"/>
+            <a:ext cx="4998720" cy="553085"/>
+          </a:xfrm>
+          <a:prstGeom prst="rect">
+            <a:avLst/>
+          </a:prstGeom>
+        </p:spPr>
+        <p:txBody>
+          <a:bodyPr vert="horz" lIns="91440" tIns="45720" rIns="91440" bIns="45720" rtlCol="0">
+            <a:normAutofit fontScale="70000"/>
+          </a:bodyPr>
+          <a:lstStyle>
+            <a:lvl1pPr marL="228600" indent="-228600" algn="l" defTabSz="914400" rtl="0" eaLnBrk="1" latinLnBrk="0" hangingPunct="1">
+              <a:lnSpc>
+                <a:spcPct val="90000"/>
+              </a:lnSpc>
+              <a:spcBef>
+                <a:spcPts val="1000"/>
+              </a:spcBef>
+              <a:buFont typeface="Arial" panose="020B0604020202020204" pitchFamily="34" charset="0"/>
+              <a:buChar char="•"/>
+              <a:defRPr sz="2800" kern="1200">
+                <a:solidFill>
+                  <a:schemeClr val="tx1"/>
+                </a:solidFill>
+                <a:latin typeface="+mn-lt"/>
+                <a:ea typeface="+mn-ea"/>
+                <a:cs typeface="+mn-cs"/>
+              </a:defRPr>
+            </a:lvl1pPr>
+            <a:lvl2pPr marL="685800" indent="-228600" algn="l" defTabSz="914400" rtl="0" eaLnBrk="1" latinLnBrk="0" hangingPunct="1">
+              <a:lnSpc>
+                <a:spcPct val="90000"/>
+              </a:lnSpc>
+              <a:spcBef>
+                <a:spcPts val="500"/>
+              </a:spcBef>
+              <a:buFont typeface="Arial" panose="020B0604020202020204" pitchFamily="34" charset="0"/>
+              <a:buChar char="•"/>
+              <a:defRPr sz="2400" kern="1200">
+                <a:solidFill>
+                  <a:schemeClr val="tx1"/>
+                </a:solidFill>
+                <a:latin typeface="+mn-lt"/>
+                <a:ea typeface="+mn-ea"/>
+                <a:cs typeface="+mn-cs"/>
+              </a:defRPr>
+            </a:lvl2pPr>
+            <a:lvl3pPr marL="1143000" indent="-228600" algn="l" defTabSz="914400" rtl="0" eaLnBrk="1" latinLnBrk="0" hangingPunct="1">
+              <a:lnSpc>
+                <a:spcPct val="90000"/>
+              </a:lnSpc>
+              <a:spcBef>
+                <a:spcPts val="500"/>
+              </a:spcBef>
+              <a:buFont typeface="Arial" panose="020B0604020202020204" pitchFamily="34" charset="0"/>
+              <a:buChar char="•"/>
+              <a:defRPr sz="2000" kern="1200">
+                <a:solidFill>
+                  <a:schemeClr val="tx1"/>
+                </a:solidFill>
+                <a:latin typeface="+mn-lt"/>
+                <a:ea typeface="+mn-ea"/>
+                <a:cs typeface="+mn-cs"/>
+              </a:defRPr>
+            </a:lvl3pPr>
+            <a:lvl4pPr marL="1600200" indent="-228600" algn="l" defTabSz="914400" rtl="0" eaLnBrk="1" latinLnBrk="0" hangingPunct="1">
+              <a:lnSpc>
+                <a:spcPct val="90000"/>
+              </a:lnSpc>
+              <a:spcBef>
+                <a:spcPts val="500"/>
+              </a:spcBef>
+              <a:buFont typeface="Arial" panose="020B0604020202020204" pitchFamily="34" charset="0"/>
+              <a:buChar char="•"/>
+              <a:defRPr sz="1800" kern="1200">
+                <a:solidFill>
+                  <a:schemeClr val="tx1"/>
+                </a:solidFill>
+                <a:latin typeface="+mn-lt"/>
+                <a:ea typeface="+mn-ea"/>
+                <a:cs typeface="+mn-cs"/>
+              </a:defRPr>
+            </a:lvl4pPr>
+            <a:lvl5pPr marL="2057400" indent="-228600" algn="l" defTabSz="914400" rtl="0" eaLnBrk="1" latinLnBrk="0" hangingPunct="1">
+              <a:lnSpc>
+                <a:spcPct val="90000"/>
+              </a:lnSpc>
+              <a:spcBef>
+                <a:spcPts val="500"/>
+              </a:spcBef>
+              <a:buFont typeface="Arial" panose="020B0604020202020204" pitchFamily="34" charset="0"/>
+              <a:buChar char="•"/>
+              <a:defRPr sz="1800" kern="1200">
+                <a:solidFill>
+                  <a:schemeClr val="tx1"/>
+                </a:solidFill>
+                <a:latin typeface="+mn-lt"/>
+                <a:ea typeface="+mn-ea"/>
+                <a:cs typeface="+mn-cs"/>
+              </a:defRPr>
+            </a:lvl5pPr>
+            <a:lvl6pPr marL="2514600" indent="-228600" algn="l" defTabSz="914400" rtl="0" eaLnBrk="1" latinLnBrk="0" hangingPunct="1">
+              <a:lnSpc>
+                <a:spcPct val="90000"/>
+              </a:lnSpc>
+              <a:spcBef>
+                <a:spcPts val="500"/>
+              </a:spcBef>
+              <a:buFont typeface="Arial" panose="020B0604020202020204" pitchFamily="34" charset="0"/>
+              <a:buChar char="•"/>
+              <a:defRPr sz="1800" kern="1200">
+                <a:solidFill>
+                  <a:schemeClr val="tx1"/>
+                </a:solidFill>
+                <a:latin typeface="+mn-lt"/>
+                <a:ea typeface="+mn-ea"/>
+                <a:cs typeface="+mn-cs"/>
+              </a:defRPr>
+            </a:lvl6pPr>
+            <a:lvl7pPr marL="2971800" indent="-228600" algn="l" defTabSz="914400" rtl="0" eaLnBrk="1" latinLnBrk="0" hangingPunct="1">
+              <a:lnSpc>
+                <a:spcPct val="90000"/>
+              </a:lnSpc>
+              <a:spcBef>
+                <a:spcPts val="500"/>
+              </a:spcBef>
+              <a:buFont typeface="Arial" panose="020B0604020202020204" pitchFamily="34" charset="0"/>
+              <a:buChar char="•"/>
+              <a:defRPr sz="1800" kern="1200">
+                <a:solidFill>
+                  <a:schemeClr val="tx1"/>
+                </a:solidFill>
+                <a:latin typeface="+mn-lt"/>
+                <a:ea typeface="+mn-ea"/>
+                <a:cs typeface="+mn-cs"/>
+              </a:defRPr>
+            </a:lvl7pPr>
+            <a:lvl8pPr marL="3429000" indent="-228600" algn="l" defTabSz="914400" rtl="0" eaLnBrk="1" latinLnBrk="0" hangingPunct="1">
+              <a:lnSpc>
+                <a:spcPct val="90000"/>
+              </a:lnSpc>
+              <a:spcBef>
+                <a:spcPts val="500"/>
+              </a:spcBef>
+              <a:buFont typeface="Arial" panose="020B0604020202020204" pitchFamily="34" charset="0"/>
+              <a:buChar char="•"/>
+              <a:defRPr sz="1800" kern="1200">
+                <a:solidFill>
+                  <a:schemeClr val="tx1"/>
+                </a:solidFill>
+                <a:latin typeface="+mn-lt"/>
+                <a:ea typeface="+mn-ea"/>
+                <a:cs typeface="+mn-cs"/>
+              </a:defRPr>
+            </a:lvl8pPr>
+            <a:lvl9pPr marL="3886200" indent="-228600" algn="l" defTabSz="914400" rtl="0" eaLnBrk="1" latinLnBrk="0" hangingPunct="1">
+              <a:lnSpc>
+                <a:spcPct val="90000"/>
+              </a:lnSpc>
+              <a:spcBef>
+                <a:spcPts val="500"/>
+              </a:spcBef>
+              <a:buFont typeface="Arial" panose="020B0604020202020204" pitchFamily="34" charset="0"/>
+              <a:buChar char="•"/>
+              <a:defRPr sz="1800" kern="1200">
+                <a:solidFill>
+                  <a:schemeClr val="tx1"/>
+                </a:solidFill>
+                <a:latin typeface="+mn-lt"/>
+                <a:ea typeface="+mn-ea"/>
+                <a:cs typeface="+mn-cs"/>
+              </a:defRPr>
+            </a:lvl9pPr>
+          </a:lstStyle>
+          <a:p>
+            <a:pPr marL="0" indent="0" algn="ctr">
+              <a:buNone/>
+            </a:pPr>
+            <a:r>
+              <a:rPr lang="en-US" sz="4000" b="1">
+                <a:solidFill>
+                  <a:schemeClr val="accent1"/>
+                </a:solidFill>
+              </a:rPr>
+              <a:t>DOCX</a:t>
+            </a:r>
+            <a:endParaRPr lang="en-US" sz="4000" b="1">
+              <a:solidFill>
+                <a:schemeClr val="accent1"/>
+              </a:solidFill>
+            </a:endParaRPr>
+          </a:p>
+        </p:txBody>
+      </p:sp>
+      <p:sp>
+        <p:nvSpPr>
+          <p:cNvPr id="8" name="Text Box 7"/>
+          <p:cNvSpPr txBox="1"/>
+          <p:nvPr/>
+        </p:nvSpPr>
+        <p:spPr>
+          <a:xfrm>
+            <a:off x="6228080" y="3150870"/>
+            <a:ext cx="5214620" cy="922020"/>
+          </a:xfrm>
+          <a:prstGeom prst="rect">
+            <a:avLst/>
+          </a:prstGeom>
+          <a:noFill/>
+        </p:spPr>
+        <p:txBody>
+          <a:bodyPr wrap="square" rtlCol="0" anchor="t">
+            <a:spAutoFit/>
+          </a:bodyPr>
+          <a:p>
+            <a:r>
+              <a:rPr lang="en-US" dirty="0">
+                <a:sym typeface="+mn-ea"/>
+              </a:rPr>
+              <a:t>No OCR needed, content and tables are stored in structured XML, enabling more accurate table extraction than PDF.</a:t>
+            </a:r>
+            <a:endParaRPr lang="en-US"/>
+          </a:p>
+        </p:txBody>
+      </p:sp>
+      <p:sp>
+        <p:nvSpPr>
+          <p:cNvPr id="11" name="Text Box 10"/>
+          <p:cNvSpPr txBox="1"/>
+          <p:nvPr/>
+        </p:nvSpPr>
+        <p:spPr>
+          <a:xfrm>
+            <a:off x="6250940" y="4199255"/>
+            <a:ext cx="5092700" cy="922020"/>
+          </a:xfrm>
+          <a:prstGeom prst="rect">
+            <a:avLst/>
+          </a:prstGeom>
+          <a:noFill/>
+        </p:spPr>
+        <p:txBody>
+          <a:bodyPr wrap="square" rtlCol="0" anchor="t">
+            <a:spAutoFit/>
+          </a:bodyPr>
+          <a:p>
+            <a:r>
+              <a:rPr lang="en-US">
+                <a:sym typeface="+mn-ea"/>
+              </a:rPr>
+              <a:t>Because of its struture, we process DOCX in CPU or GPU, it will use less memory and take less time than PDF.</a:t>
+            </a:r>
+            <a:endParaRPr lang="en-US"/>
+          </a:p>
+        </p:txBody>
+      </p:sp>
+      <p:sp>
+        <p:nvSpPr>
+          <p:cNvPr id="12" name="Text Box 11"/>
+          <p:cNvSpPr txBox="1"/>
+          <p:nvPr/>
+        </p:nvSpPr>
+        <p:spPr>
+          <a:xfrm>
+            <a:off x="635000" y="4199255"/>
+            <a:ext cx="4700270" cy="922020"/>
+          </a:xfrm>
+          <a:prstGeom prst="rect">
+            <a:avLst/>
+          </a:prstGeom>
+          <a:noFill/>
+        </p:spPr>
+        <p:txBody>
+          <a:bodyPr wrap="square" rtlCol="0" anchor="t">
+            <a:spAutoFit/>
+          </a:bodyPr>
+          <a:p>
+            <a:r>
+              <a:rPr lang="en-US" dirty="0">
+                <a:sym typeface="+mn-ea"/>
+              </a:rPr>
+              <a:t>This step is heavy: using GPU is faster but uses more memory, while using CPU uses less memory but takes more time.</a:t>
+            </a:r>
+            <a:endParaRPr lang="en-US"/>
+          </a:p>
+        </p:txBody>
+      </p:sp>
+      <p:sp>
+        <p:nvSpPr>
+          <p:cNvPr id="13" name="Text Box 12"/>
+          <p:cNvSpPr txBox="1"/>
+          <p:nvPr/>
+        </p:nvSpPr>
+        <p:spPr>
+          <a:xfrm>
+            <a:off x="650240" y="2252345"/>
+            <a:ext cx="4624070" cy="645160"/>
+          </a:xfrm>
+          <a:prstGeom prst="rect">
+            <a:avLst/>
+          </a:prstGeom>
+          <a:noFill/>
+        </p:spPr>
+        <p:txBody>
+          <a:bodyPr wrap="square" rtlCol="0">
+            <a:spAutoFit/>
+          </a:bodyPr>
+          <a:p>
+            <a:pPr algn="l"/>
+            <a:r>
+              <a:rPr lang="en-US"/>
+              <a:t>Input PDF ⟶ Image Rendering ⟶ OCR ⟶ Convert </a:t>
+            </a:r>
+            <a:r>
+              <a:rPr lang="en-US">
+                <a:sym typeface="+mn-ea"/>
+              </a:rPr>
+              <a:t>⟶ Output</a:t>
+            </a:r>
+            <a:endParaRPr lang="en-US"/>
+          </a:p>
+        </p:txBody>
+      </p:sp>
+      <p:sp>
+        <p:nvSpPr>
+          <p:cNvPr id="14" name="Text Box 13"/>
+          <p:cNvSpPr txBox="1"/>
+          <p:nvPr/>
+        </p:nvSpPr>
+        <p:spPr>
+          <a:xfrm>
+            <a:off x="6283325" y="2252345"/>
+            <a:ext cx="5203190" cy="645160"/>
+          </a:xfrm>
+          <a:prstGeom prst="rect">
+            <a:avLst/>
+          </a:prstGeom>
+          <a:noFill/>
+        </p:spPr>
+        <p:txBody>
+          <a:bodyPr wrap="square" rtlCol="0">
+            <a:spAutoFit/>
+          </a:bodyPr>
+          <a:p>
+            <a:pPr algn="l"/>
+            <a:r>
+              <a:rPr lang="en-US"/>
+              <a:t>Input DOCX ⟶ File Unzipping ⟶ XML Parsing ⟶ Structural Mapping⟶ Convert </a:t>
+            </a:r>
+            <a:r>
+              <a:rPr lang="en-US">
+                <a:sym typeface="+mn-ea"/>
+              </a:rPr>
+              <a:t>⟶ Output</a:t>
+            </a:r>
+            <a:endParaRPr lang="en-US"/>
+          </a:p>
+        </p:txBody>
+      </p:sp>
+    </p:spTree>
+  </p:cSld>
+  <p:clrMapOvr>
+    <a:masterClrMapping/>
+  </p:clrMapOvr>
+</p:sld>
+</file>
+
+<file path=ppt/slides/slide3.xml><?xml version="1.0" encoding="utf-8"?>
+<p:sld xmlns:a="http://schemas.openxmlformats.org/drawingml/2006/main" xmlns:r="http://schemas.openxmlformats.org/officeDocument/2006/relationships" xmlns:p="http://schemas.openxmlformats.org/presentationml/2006/main">
+  <p:cSld>
+    <p:spTree>
+      <p:nvGrpSpPr>
+        <p:cNvPr id="1" name=""/>
+        <p:cNvGrpSpPr/>
+        <p:nvPr/>
+      </p:nvGrpSpPr>
       <p:grpSpPr>
         <a:xfrm>
           <a:off x="0" y="0"/>
@@ -5230,13 +5361,7 @@
       </p:grpSpPr>
       <p:sp>
         <p:nvSpPr>
-          <p:cNvPr id="2" name="Title 1">
-            <a:extLst>
-              <a:ext uri="{FF2B5EF4-FFF2-40B4-BE49-F238E27FC236}">
-                <a16:creationId xmlns:a16="http://schemas.microsoft.com/office/drawing/2014/main" id="{BB18D76C-B338-AEC4-D3C7-EE8111222491}"/>
-              </a:ext>
-            </a:extLst>
-          </p:cNvPr>
+          <p:cNvPr id="2" name="Title 1"/>
           <p:cNvSpPr>
             <a:spLocks noGrp="1"/>
           </p:cNvSpPr>
@@ -5263,18 +5388,13 @@
               <a:rPr lang="en-US" dirty="0"/>
               <a:t> - Constructor</a:t>
             </a:r>
+            <a:endParaRPr lang="en-US" dirty="0"/>
           </a:p>
         </p:txBody>
       </p:sp>
       <p:pic>
         <p:nvPicPr>
-          <p:cNvPr id="6" name="Content Placeholder 5">
-            <a:extLst>
-              <a:ext uri="{FF2B5EF4-FFF2-40B4-BE49-F238E27FC236}">
-                <a16:creationId xmlns:a16="http://schemas.microsoft.com/office/drawing/2014/main" id="{87EC617B-BC76-CEA0-B355-7FF2960E866D}"/>
-              </a:ext>
-            </a:extLst>
-          </p:cNvPr>
+          <p:cNvPr id="6" name="Content Placeholder 5"/>
           <p:cNvPicPr>
             <a:picLocks noGrp="1" noChangeAspect="1"/>
           </p:cNvPicPr>
@@ -5283,7 +5403,7 @@
           </p:nvPr>
         </p:nvPicPr>
         <p:blipFill>
-          <a:blip r:embed="rId2"/>
+          <a:blip r:embed="rId1"/>
           <a:stretch>
             <a:fillRect/>
           </a:stretch>
@@ -5300,23 +5420,11 @@
       </p:pic>
       <p:graphicFrame>
         <p:nvGraphicFramePr>
-          <p:cNvPr id="7" name="Table 6">
-            <a:extLst>
-              <a:ext uri="{FF2B5EF4-FFF2-40B4-BE49-F238E27FC236}">
-                <a16:creationId xmlns:a16="http://schemas.microsoft.com/office/drawing/2014/main" id="{5D82B312-BD3C-4128-020F-00C624CACD3B}"/>
-              </a:ext>
-            </a:extLst>
-          </p:cNvPr>
+          <p:cNvPr id="7" name="Table 6"/>
           <p:cNvGraphicFramePr>
             <a:graphicFrameLocks noGrp="1"/>
           </p:cNvGraphicFramePr>
-          <p:nvPr>
-            <p:extLst>
-              <p:ext uri="{D42A27DB-BD31-4B8C-83A1-F6EECF244321}">
-                <p14:modId xmlns:p14="http://schemas.microsoft.com/office/powerpoint/2010/main" val="2591395890"/>
-              </p:ext>
-            </p:extLst>
-          </p:nvPr>
+          <p:nvPr/>
         </p:nvGraphicFramePr>
         <p:xfrm>
           <a:off x="1828800" y="2340134"/>
@@ -5329,34 +5437,10 @@
                 <a:tableStyleId>{5C22544A-7EE6-4342-B048-85BDC9FD1C3A}</a:tableStyleId>
               </a:tblPr>
               <a:tblGrid>
-                <a:gridCol w="1681856">
-                  <a:extLst>
-                    <a:ext uri="{9D8B030D-6E8A-4147-A177-3AD203B41FA5}">
-                      <a16:colId xmlns:a16="http://schemas.microsoft.com/office/drawing/2014/main" val="2505731717"/>
-                    </a:ext>
-                  </a:extLst>
-                </a:gridCol>
-                <a:gridCol w="1311436">
-                  <a:extLst>
-                    <a:ext uri="{9D8B030D-6E8A-4147-A177-3AD203B41FA5}">
-                      <a16:colId xmlns:a16="http://schemas.microsoft.com/office/drawing/2014/main" val="3044214699"/>
-                    </a:ext>
-                  </a:extLst>
-                </a:gridCol>
-                <a:gridCol w="1122485">
-                  <a:extLst>
-                    <a:ext uri="{9D8B030D-6E8A-4147-A177-3AD203B41FA5}">
-                      <a16:colId xmlns:a16="http://schemas.microsoft.com/office/drawing/2014/main" val="4092892936"/>
-                    </a:ext>
-                  </a:extLst>
-                </a:gridCol>
-                <a:gridCol w="4639603">
-                  <a:extLst>
-                    <a:ext uri="{9D8B030D-6E8A-4147-A177-3AD203B41FA5}">
-                      <a16:colId xmlns:a16="http://schemas.microsoft.com/office/drawing/2014/main" val="3827067773"/>
-                    </a:ext>
-                  </a:extLst>
-                </a:gridCol>
+                <a:gridCol w="1681856"/>
+                <a:gridCol w="1311436"/>
+                <a:gridCol w="1122485"/>
+                <a:gridCol w="4639603"/>
               </a:tblGrid>
               <a:tr h="569796">
                 <a:tc>
@@ -5451,11 +5535,6 @@
                   </a:txBody>
                   <a:tcPr marL="69850" marR="69850" marT="44450" marB="44450"/>
                 </a:tc>
-                <a:extLst>
-                  <a:ext uri="{0D108BD9-81ED-4DB2-BD59-A6C34878D82A}">
-                    <a16:rowId xmlns:a16="http://schemas.microsoft.com/office/drawing/2014/main" val="52020452"/>
-                  </a:ext>
-                </a:extLst>
               </a:tr>
               <a:tr h="569796">
                 <a:tc>
@@ -5550,11 +5629,6 @@
                   </a:txBody>
                   <a:tcPr marL="69850" marR="69850" marT="44450" marB="44450"/>
                 </a:tc>
-                <a:extLst>
-                  <a:ext uri="{0D108BD9-81ED-4DB2-BD59-A6C34878D82A}">
-                    <a16:rowId xmlns:a16="http://schemas.microsoft.com/office/drawing/2014/main" val="1887085111"/>
-                  </a:ext>
-                </a:extLst>
               </a:tr>
               <a:tr h="569796">
                 <a:tc>
@@ -5649,11 +5723,6 @@
                   </a:txBody>
                   <a:tcPr marL="69850" marR="69850" marT="44450" marB="44450"/>
                 </a:tc>
-                <a:extLst>
-                  <a:ext uri="{0D108BD9-81ED-4DB2-BD59-A6C34878D82A}">
-                    <a16:rowId xmlns:a16="http://schemas.microsoft.com/office/drawing/2014/main" val="1612352539"/>
-                  </a:ext>
-                </a:extLst>
               </a:tr>
               <a:tr h="569796">
                 <a:tc>
@@ -5748,11 +5817,6 @@
                   </a:txBody>
                   <a:tcPr marL="69850" marR="69850" marT="44450" marB="44450"/>
                 </a:tc>
-                <a:extLst>
-                  <a:ext uri="{0D108BD9-81ED-4DB2-BD59-A6C34878D82A}">
-                    <a16:rowId xmlns:a16="http://schemas.microsoft.com/office/drawing/2014/main" val="2844943285"/>
-                  </a:ext>
-                </a:extLst>
               </a:tr>
               <a:tr h="784964">
                 <a:tc>
@@ -5847,11 +5911,6 @@
                   </a:txBody>
                   <a:tcPr marL="69850" marR="69850" marT="44450" marB="44450"/>
                 </a:tc>
-                <a:extLst>
-                  <a:ext uri="{0D108BD9-81ED-4DB2-BD59-A6C34878D82A}">
-                    <a16:rowId xmlns:a16="http://schemas.microsoft.com/office/drawing/2014/main" val="1923696722"/>
-                  </a:ext>
-                </a:extLst>
               </a:tr>
               <a:tr h="569796">
                 <a:tc>
@@ -5946,22 +6005,12 @@
                   </a:txBody>
                   <a:tcPr marL="69850" marR="69850" marT="44450" marB="44450"/>
                 </a:tc>
-                <a:extLst>
-                  <a:ext uri="{0D108BD9-81ED-4DB2-BD59-A6C34878D82A}">
-                    <a16:rowId xmlns:a16="http://schemas.microsoft.com/office/drawing/2014/main" val="4160449755"/>
-                  </a:ext>
-                </a:extLst>
               </a:tr>
             </a:tbl>
           </a:graphicData>
         </a:graphic>
       </p:graphicFrame>
     </p:spTree>
-    <p:extLst>
-      <p:ext uri="{BB962C8B-B14F-4D97-AF65-F5344CB8AC3E}">
-        <p14:creationId xmlns:p14="http://schemas.microsoft.com/office/powerpoint/2010/main" val="1754655454"/>
-      </p:ext>
-    </p:extLst>
   </p:cSld>
   <p:clrMapOvr>
     <a:masterClrMapping/>
@@ -5969,18 +6018,12 @@
 </p:sld>
 </file>
 
-<file path=ppt/slides/slide3.xml><?xml version="1.0" encoding="utf-8"?>
+<file path=ppt/slides/slide4.xml><?xml version="1.0" encoding="utf-8"?>
 <p:sld xmlns:a="http://schemas.openxmlformats.org/drawingml/2006/main" xmlns:r="http://schemas.openxmlformats.org/officeDocument/2006/relationships" xmlns:p="http://schemas.openxmlformats.org/presentationml/2006/main">
   <p:cSld>
     <p:spTree>
       <p:nvGrpSpPr>
-        <p:cNvPr id="1" name="">
-          <a:extLst>
-            <a:ext uri="{FF2B5EF4-FFF2-40B4-BE49-F238E27FC236}">
-              <a16:creationId xmlns:a16="http://schemas.microsoft.com/office/drawing/2014/main" id="{E5CAA442-3988-82A1-BC42-8A7F0C336B83}"/>
-            </a:ext>
-          </a:extLst>
-        </p:cNvPr>
+        <p:cNvPr id="1" name=""/>
         <p:cNvGrpSpPr/>
         <p:nvPr/>
       </p:nvGrpSpPr>
@@ -5994,13 +6037,7 @@
       </p:grpSpPr>
       <p:sp>
         <p:nvSpPr>
-          <p:cNvPr id="6" name="TextBox 5">
-            <a:extLst>
-              <a:ext uri="{FF2B5EF4-FFF2-40B4-BE49-F238E27FC236}">
-                <a16:creationId xmlns:a16="http://schemas.microsoft.com/office/drawing/2014/main" id="{249BFA0C-D882-48B6-A330-F0FEB85A4541}"/>
-              </a:ext>
-            </a:extLst>
-          </p:cNvPr>
+          <p:cNvPr id="6" name="TextBox 5"/>
           <p:cNvSpPr txBox="1"/>
           <p:nvPr/>
         </p:nvSpPr>
@@ -6066,85 +6103,24 @@
               </a:rPr>
               <a:t> library, use to read document, extract content</a:t>
             </a:r>
-          </a:p>
-        </p:txBody>
-      </p:sp>
-      <p:pic>
-        <p:nvPicPr>
-          <p:cNvPr id="8" name="Picture 7">
-            <a:extLst>
-              <a:ext uri="{FF2B5EF4-FFF2-40B4-BE49-F238E27FC236}">
-                <a16:creationId xmlns:a16="http://schemas.microsoft.com/office/drawing/2014/main" id="{743D8D06-DA7F-372C-BF61-412A49580A94}"/>
-              </a:ext>
-            </a:extLst>
-          </p:cNvPr>
-          <p:cNvPicPr>
-            <a:picLocks noChangeAspect="1"/>
-          </p:cNvPicPr>
-          <p:nvPr/>
-        </p:nvPicPr>
-        <p:blipFill>
-          <a:blip r:embed="rId2"/>
-          <a:stretch>
-            <a:fillRect/>
-          </a:stretch>
-        </p:blipFill>
-        <p:spPr>
-          <a:xfrm>
-            <a:off x="0" y="3248599"/>
-            <a:ext cx="4116861" cy="3609401"/>
-          </a:xfrm>
-          <a:prstGeom prst="rect">
-            <a:avLst/>
-          </a:prstGeom>
-        </p:spPr>
-      </p:pic>
-      <p:pic>
-        <p:nvPicPr>
-          <p:cNvPr id="9" name="Picture 8">
-            <a:extLst>
-              <a:ext uri="{FF2B5EF4-FFF2-40B4-BE49-F238E27FC236}">
-                <a16:creationId xmlns:a16="http://schemas.microsoft.com/office/drawing/2014/main" id="{FCE23264-1935-2F68-8519-FEF859B3870B}"/>
-              </a:ext>
-            </a:extLst>
-          </p:cNvPr>
-          <p:cNvPicPr>
-            <a:picLocks noChangeAspect="1"/>
-          </p:cNvPicPr>
-          <p:nvPr/>
-        </p:nvPicPr>
-        <p:blipFill>
-          <a:blip r:embed="rId3"/>
-          <a:stretch>
-            <a:fillRect/>
-          </a:stretch>
-        </p:blipFill>
-        <p:spPr>
-          <a:xfrm>
-            <a:off x="4419604" y="4207393"/>
-            <a:ext cx="7772396" cy="2650607"/>
-          </a:xfrm>
-          <a:prstGeom prst="rect">
-            <a:avLst/>
-          </a:prstGeom>
-        </p:spPr>
-      </p:pic>
-      <p:sp>
-        <p:nvSpPr>
-          <p:cNvPr id="10" name="TextBox 9">
-            <a:extLst>
-              <a:ext uri="{FF2B5EF4-FFF2-40B4-BE49-F238E27FC236}">
-                <a16:creationId xmlns:a16="http://schemas.microsoft.com/office/drawing/2014/main" id="{D0448745-5ED8-8B3F-D89B-EED6B07B9F80}"/>
-              </a:ext>
-            </a:extLst>
-          </p:cNvPr>
+            <a:endParaRPr lang="en-US" b="0" dirty="0">
+              <a:effectLst/>
+              <a:latin typeface="Arial" panose="020B0604020202020204" pitchFamily="34" charset="0"/>
+              <a:cs typeface="Arial" panose="020B0604020202020204" pitchFamily="34" charset="0"/>
+            </a:endParaRPr>
+          </a:p>
+        </p:txBody>
+      </p:sp>
+      <p:sp>
+        <p:nvSpPr>
+          <p:cNvPr id="10" name="TextBox 9"/>
           <p:cNvSpPr txBox="1"/>
           <p:nvPr/>
         </p:nvSpPr>
         <p:spPr>
           <a:xfrm>
             <a:off x="5307573" y="1598662"/>
-            <a:ext cx="6604339" cy="1338828"/>
+            <a:ext cx="6604339" cy="1337945"/>
           </a:xfrm>
           <a:prstGeom prst="rect">
             <a:avLst/>
@@ -6163,20 +6139,20 @@
               </a:lnSpc>
             </a:pPr>
             <a:r>
-              <a:rPr lang="en-US" b="1" dirty="0" err="1"/>
+              <a:rPr lang="en-US" b="1" dirty="0" err="1">
+                <a:sym typeface="+mn-ea"/>
+              </a:rPr>
               <a:t>extractor.extract</a:t>
             </a:r>
             <a:r>
+              <a:rPr lang="en-US" b="1" dirty="0">
+                <a:sym typeface="+mn-ea"/>
+              </a:rPr>
+              <a:t>(str(INPUT_FILE)):</a:t>
+            </a:r>
+            <a:r>
               <a:rPr lang="en-US" b="1" dirty="0"/>
-              <a:t>("</a:t>
-            </a:r>
-            <a:r>
-              <a:rPr lang="en-US" b="1" dirty="0" err="1"/>
-              <a:t>sample.pdf</a:t>
-            </a:r>
-            <a:r>
-              <a:rPr lang="en-US" b="1" dirty="0"/>
-              <a:t>"): </a:t>
+              <a:t> </a:t>
             </a:r>
             <a:r>
               <a:rPr lang="en-US" dirty="0"/>
@@ -6194,18 +6170,13 @@
               <a:rPr lang="en-US" dirty="0"/>
               <a:t>object containing parsed data (text, tables, metadata, etc.).</a:t>
             </a:r>
-          </a:p>
-        </p:txBody>
-      </p:sp>
-      <p:sp>
-        <p:nvSpPr>
-          <p:cNvPr id="11" name="Rectangle 10">
-            <a:extLst>
-              <a:ext uri="{FF2B5EF4-FFF2-40B4-BE49-F238E27FC236}">
-                <a16:creationId xmlns:a16="http://schemas.microsoft.com/office/drawing/2014/main" id="{693FD3A6-6B94-004A-DC03-C7EBD1592532}"/>
-              </a:ext>
-            </a:extLst>
-          </p:cNvPr>
+            <a:endParaRPr lang="en-US" dirty="0"/>
+          </a:p>
+        </p:txBody>
+      </p:sp>
+      <p:sp>
+        <p:nvSpPr>
+          <p:cNvPr id="11" name="Rectangle 10"/>
           <p:cNvSpPr/>
           <p:nvPr/>
         </p:nvSpPr>
@@ -6241,7 +6212,6 @@
             </a:pPr>
             <a:r>
               <a:rPr lang="en-US" sz="3200" b="1" dirty="0" err="1">
-                <a:ln/>
                 <a:solidFill>
                   <a:schemeClr val="accent4"/>
                 </a:solidFill>
@@ -6250,7 +6220,6 @@
             </a:r>
             <a:r>
               <a:rPr lang="en-US" sz="3200" b="1" cap="none" spc="0" dirty="0" err="1">
-                <a:ln/>
                 <a:solidFill>
                   <a:schemeClr val="accent4"/>
                 </a:solidFill>
@@ -6260,7 +6229,6 @@
             </a:r>
             <a:r>
               <a:rPr lang="en-US" sz="3200" b="1" cap="none" spc="0" dirty="0">
-                <a:ln/>
                 <a:solidFill>
                   <a:schemeClr val="accent4"/>
                 </a:solidFill>
@@ -6268,18 +6236,140 @@
               </a:rPr>
               <a:t>()</a:t>
             </a:r>
+            <a:endParaRPr lang="en-US" sz="3200" b="1" cap="none" spc="0" dirty="0">
+              <a:solidFill>
+                <a:schemeClr val="accent4"/>
+              </a:solidFill>
+              <a:effectLst/>
+            </a:endParaRPr>
+          </a:p>
+        </p:txBody>
+      </p:sp>
+      <p:sp>
+        <p:nvSpPr>
+          <p:cNvPr id="4" name="TextBox 3"/>
+          <p:cNvSpPr txBox="1"/>
+          <p:nvPr/>
+        </p:nvSpPr>
+        <p:spPr>
+          <a:xfrm>
+            <a:off x="5307572" y="3110776"/>
+            <a:ext cx="6604339" cy="923330"/>
+          </a:xfrm>
+          <a:prstGeom prst="rect">
+            <a:avLst/>
+          </a:prstGeom>
+          <a:noFill/>
+        </p:spPr>
+        <p:txBody>
+          <a:bodyPr wrap="square">
+            <a:spAutoFit/>
+          </a:bodyPr>
+          <a:lstStyle/>
+          <a:p>
+            <a:pPr algn="just">
+              <a:lnSpc>
+                <a:spcPct val="150000"/>
+              </a:lnSpc>
+              <a:buNone/>
+            </a:pPr>
+            <a:r>
+              <a:rPr lang="en-US" b="1" dirty="0" err="1"/>
+              <a:t>result.extract_text</a:t>
+            </a:r>
+            <a:r>
+              <a:rPr lang="en-US" b="1" dirty="0"/>
+              <a:t>(): </a:t>
+            </a:r>
+            <a:r>
+              <a:rPr lang="en-US" dirty="0"/>
+              <a:t>all textual content found in the document.</a:t>
+            </a:r>
+            <a:endParaRPr lang="en-US" dirty="0"/>
           </a:p>
         </p:txBody>
       </p:sp>
       <p:pic>
         <p:nvPicPr>
-          <p:cNvPr id="2" name="Picture 1">
-            <a:extLst>
-              <a:ext uri="{FF2B5EF4-FFF2-40B4-BE49-F238E27FC236}">
-                <a16:creationId xmlns:a16="http://schemas.microsoft.com/office/drawing/2014/main" id="{8923EA84-CF60-386F-CBFE-4BE50B84BDD4}"/>
-              </a:ext>
-            </a:extLst>
-          </p:cNvPr>
+          <p:cNvPr id="3" name="Picture 2"/>
+          <p:cNvPicPr>
+            <a:picLocks noChangeAspect="1"/>
+          </p:cNvPicPr>
+          <p:nvPr/>
+        </p:nvPicPr>
+        <p:blipFill>
+          <a:blip r:embed="rId1"/>
+          <a:srcRect l="1816"/>
+          <a:stretch>
+            <a:fillRect/>
+          </a:stretch>
+        </p:blipFill>
+        <p:spPr>
+          <a:xfrm>
+            <a:off x="5116830" y="3644265"/>
+            <a:ext cx="6579235" cy="3057525"/>
+          </a:xfrm>
+          <a:prstGeom prst="rect">
+            <a:avLst/>
+          </a:prstGeom>
+          <a:ln>
+            <a:solidFill>
+              <a:schemeClr val="tx1"/>
+            </a:solidFill>
+          </a:ln>
+        </p:spPr>
+      </p:pic>
+      <p:pic>
+        <p:nvPicPr>
+          <p:cNvPr id="5" name="Picture 4"/>
+          <p:cNvPicPr>
+            <a:picLocks noChangeAspect="1"/>
+          </p:cNvPicPr>
+          <p:nvPr/>
+        </p:nvPicPr>
+        <p:blipFill>
+          <a:blip r:embed="rId2"/>
+          <a:stretch>
+            <a:fillRect/>
+          </a:stretch>
+        </p:blipFill>
+        <p:spPr>
+          <a:xfrm>
+            <a:off x="80010" y="594995"/>
+            <a:ext cx="3622675" cy="590550"/>
+          </a:xfrm>
+          <a:prstGeom prst="rect">
+            <a:avLst/>
+          </a:prstGeom>
+        </p:spPr>
+      </p:pic>
+      <p:pic>
+        <p:nvPicPr>
+          <p:cNvPr id="7" name="Picture 6"/>
+          <p:cNvPicPr>
+            <a:picLocks noChangeAspect="1"/>
+          </p:cNvPicPr>
+          <p:nvPr/>
+        </p:nvPicPr>
+        <p:blipFill>
+          <a:blip r:embed="rId3"/>
+          <a:stretch>
+            <a:fillRect/>
+          </a:stretch>
+        </p:blipFill>
+        <p:spPr>
+          <a:xfrm>
+            <a:off x="130810" y="1297940"/>
+            <a:ext cx="4495800" cy="419100"/>
+          </a:xfrm>
+          <a:prstGeom prst="rect">
+            <a:avLst/>
+          </a:prstGeom>
+        </p:spPr>
+      </p:pic>
+      <p:pic>
+        <p:nvPicPr>
+          <p:cNvPr id="12" name="Picture 11"/>
           <p:cNvPicPr>
             <a:picLocks noChangeAspect="1"/>
           </p:cNvPicPr>
@@ -6293,69 +6383,68 @@
         </p:blipFill>
         <p:spPr>
           <a:xfrm>
-            <a:off x="80206" y="571135"/>
-            <a:ext cx="5129747" cy="2580937"/>
+            <a:off x="131445" y="1790700"/>
+            <a:ext cx="4511040" cy="708660"/>
           </a:xfrm>
           <a:prstGeom prst="rect">
             <a:avLst/>
           </a:prstGeom>
         </p:spPr>
       </p:pic>
-      <p:sp>
-        <p:nvSpPr>
-          <p:cNvPr id="4" name="TextBox 3">
-            <a:extLst>
-              <a:ext uri="{FF2B5EF4-FFF2-40B4-BE49-F238E27FC236}">
-                <a16:creationId xmlns:a16="http://schemas.microsoft.com/office/drawing/2014/main" id="{2D06E2EA-617B-91F9-18D2-18913B26E3D6}"/>
-              </a:ext>
-            </a:extLst>
-          </p:cNvPr>
-          <p:cNvSpPr txBox="1"/>
+      <p:pic>
+        <p:nvPicPr>
+          <p:cNvPr id="13" name="Picture 12"/>
+          <p:cNvPicPr>
+            <a:picLocks noChangeAspect="1"/>
+          </p:cNvPicPr>
           <p:nvPr/>
-        </p:nvSpPr>
-        <p:spPr>
-          <a:xfrm>
-            <a:off x="5307572" y="3110776"/>
-            <a:ext cx="6604339" cy="923330"/>
+        </p:nvPicPr>
+        <p:blipFill>
+          <a:blip r:embed="rId5"/>
+          <a:stretch>
+            <a:fillRect/>
+          </a:stretch>
+        </p:blipFill>
+        <p:spPr>
+          <a:xfrm>
+            <a:off x="334010" y="3947795"/>
+            <a:ext cx="4389755" cy="2814955"/>
           </a:xfrm>
           <a:prstGeom prst="rect">
             <a:avLst/>
           </a:prstGeom>
-          <a:noFill/>
-        </p:spPr>
-        <p:txBody>
-          <a:bodyPr wrap="square">
-            <a:spAutoFit/>
-          </a:bodyPr>
-          <a:lstStyle/>
-          <a:p>
-            <a:pPr algn="just">
-              <a:lnSpc>
-                <a:spcPct val="150000"/>
-              </a:lnSpc>
-              <a:buNone/>
-            </a:pPr>
-            <a:r>
-              <a:rPr lang="en-US" b="1" dirty="0" err="1"/>
-              <a:t>result.extract_text</a:t>
-            </a:r>
-            <a:r>
-              <a:rPr lang="en-US" b="1" dirty="0"/>
-              <a:t>(): </a:t>
-            </a:r>
-            <a:r>
-              <a:rPr lang="en-US" dirty="0"/>
-              <a:t>all textual content found in the document.</a:t>
-            </a:r>
-          </a:p>
-        </p:txBody>
-      </p:sp>
+          <a:ln>
+            <a:solidFill>
+              <a:schemeClr val="tx1"/>
+            </a:solidFill>
+          </a:ln>
+        </p:spPr>
+      </p:pic>
+      <p:pic>
+        <p:nvPicPr>
+          <p:cNvPr id="14" name="Picture 13"/>
+          <p:cNvPicPr>
+            <a:picLocks noChangeAspect="1"/>
+          </p:cNvPicPr>
+          <p:nvPr/>
+        </p:nvPicPr>
+        <p:blipFill>
+          <a:blip r:embed="rId6"/>
+          <a:stretch>
+            <a:fillRect/>
+          </a:stretch>
+        </p:blipFill>
+        <p:spPr>
+          <a:xfrm>
+            <a:off x="130810" y="2701925"/>
+            <a:ext cx="4794250" cy="1043305"/>
+          </a:xfrm>
+          <a:prstGeom prst="rect">
+            <a:avLst/>
+          </a:prstGeom>
+        </p:spPr>
+      </p:pic>
     </p:spTree>
-    <p:extLst>
-      <p:ext uri="{BB962C8B-B14F-4D97-AF65-F5344CB8AC3E}">
-        <p14:creationId xmlns:p14="http://schemas.microsoft.com/office/powerpoint/2010/main" val="1267692012"/>
-      </p:ext>
-    </p:extLst>
   </p:cSld>
   <p:clrMapOvr>
     <a:masterClrMapping/>
@@ -6363,18 +6452,12 @@
 </p:sld>
 </file>
 
-<file path=ppt/slides/slide4.xml><?xml version="1.0" encoding="utf-8"?>
+<file path=ppt/slides/slide5.xml><?xml version="1.0" encoding="utf-8"?>
 <p:sld xmlns:a="http://schemas.openxmlformats.org/drawingml/2006/main" xmlns:r="http://schemas.openxmlformats.org/officeDocument/2006/relationships" xmlns:p="http://schemas.openxmlformats.org/presentationml/2006/main">
   <p:cSld>
     <p:spTree>
       <p:nvGrpSpPr>
-        <p:cNvPr id="1" name="">
-          <a:extLst>
-            <a:ext uri="{FF2B5EF4-FFF2-40B4-BE49-F238E27FC236}">
-              <a16:creationId xmlns:a16="http://schemas.microsoft.com/office/drawing/2014/main" id="{5ED8B3BD-10C6-B09B-9575-F08472739239}"/>
-            </a:ext>
-          </a:extLst>
-        </p:cNvPr>
+        <p:cNvPr id="1" name=""/>
         <p:cNvGrpSpPr/>
         <p:nvPr/>
       </p:nvGrpSpPr>
@@ -6386,45 +6469,9 @@
           <a:chExt cx="0" cy="0"/>
         </a:xfrm>
       </p:grpSpPr>
-      <p:pic>
-        <p:nvPicPr>
-          <p:cNvPr id="8" name="Picture 7">
-            <a:extLst>
-              <a:ext uri="{FF2B5EF4-FFF2-40B4-BE49-F238E27FC236}">
-                <a16:creationId xmlns:a16="http://schemas.microsoft.com/office/drawing/2014/main" id="{EFE3685B-3E37-BE2C-1AFB-25AD59D7953C}"/>
-              </a:ext>
-            </a:extLst>
-          </p:cNvPr>
-          <p:cNvPicPr>
-            <a:picLocks noChangeAspect="1"/>
-          </p:cNvPicPr>
-          <p:nvPr/>
-        </p:nvPicPr>
-        <p:blipFill>
-          <a:blip r:embed="rId2"/>
-          <a:stretch>
-            <a:fillRect/>
-          </a:stretch>
-        </p:blipFill>
-        <p:spPr>
-          <a:xfrm>
-            <a:off x="0" y="3248599"/>
-            <a:ext cx="4116861" cy="3609401"/>
-          </a:xfrm>
-          <a:prstGeom prst="rect">
-            <a:avLst/>
-          </a:prstGeom>
-        </p:spPr>
-      </p:pic>
-      <p:sp>
-        <p:nvSpPr>
-          <p:cNvPr id="11" name="Rectangle 10">
-            <a:extLst>
-              <a:ext uri="{FF2B5EF4-FFF2-40B4-BE49-F238E27FC236}">
-                <a16:creationId xmlns:a16="http://schemas.microsoft.com/office/drawing/2014/main" id="{69F9B94E-79FE-39CC-B65F-FA34BC11D737}"/>
-              </a:ext>
-            </a:extLst>
-          </p:cNvPr>
+      <p:sp>
+        <p:nvSpPr>
+          <p:cNvPr id="11" name="Rectangle 10"/>
           <p:cNvSpPr/>
           <p:nvPr/>
         </p:nvSpPr>
@@ -6460,7 +6507,6 @@
             </a:pPr>
             <a:r>
               <a:rPr lang="en-US" sz="3200" b="1" dirty="0" err="1">
-                <a:ln/>
                 <a:solidFill>
                   <a:schemeClr val="accent4"/>
                 </a:solidFill>
@@ -6469,25 +6515,242 @@
             </a:r>
             <a:r>
               <a:rPr lang="en-US" sz="3200" b="1" dirty="0">
-                <a:ln/>
                 <a:solidFill>
                   <a:schemeClr val="accent4"/>
                 </a:solidFill>
               </a:rPr>
               <a:t>()</a:t>
             </a:r>
+            <a:endParaRPr lang="en-US" sz="3200" b="1" dirty="0">
+              <a:solidFill>
+                <a:schemeClr val="accent4"/>
+              </a:solidFill>
+            </a:endParaRPr>
+          </a:p>
+        </p:txBody>
+      </p:sp>
+      <p:sp>
+        <p:nvSpPr>
+          <p:cNvPr id="5" name="TextBox 4"/>
+          <p:cNvSpPr txBox="1"/>
+          <p:nvPr/>
+        </p:nvSpPr>
+        <p:spPr>
+          <a:xfrm>
+            <a:off x="5307573" y="594701"/>
+            <a:ext cx="6604339" cy="923330"/>
+          </a:xfrm>
+          <a:prstGeom prst="rect">
+            <a:avLst/>
+          </a:prstGeom>
+          <a:noFill/>
+        </p:spPr>
+        <p:txBody>
+          <a:bodyPr wrap="square">
+            <a:spAutoFit/>
+          </a:bodyPr>
+          <a:lstStyle/>
+          <a:p>
+            <a:pPr algn="just">
+              <a:lnSpc>
+                <a:spcPct val="150000"/>
+              </a:lnSpc>
+              <a:buNone/>
+            </a:pPr>
+            <a:r>
+              <a:rPr lang="en-US" b="1" dirty="0" err="1">
+                <a:effectLst/>
+                <a:latin typeface="Arial" panose="020B0604020202020204" pitchFamily="34" charset="0"/>
+                <a:cs typeface="Arial" panose="020B0604020202020204" pitchFamily="34" charset="0"/>
+              </a:rPr>
+              <a:t>DocumentExtractor</a:t>
+            </a:r>
+            <a:r>
+              <a:rPr lang="en-US" b="1" dirty="0">
+                <a:effectLst/>
+                <a:latin typeface="Arial" panose="020B0604020202020204" pitchFamily="34" charset="0"/>
+                <a:cs typeface="Arial" panose="020B0604020202020204" pitchFamily="34" charset="0"/>
+              </a:rPr>
+              <a:t>: </a:t>
+            </a:r>
+            <a:r>
+              <a:rPr lang="en-US" b="0" dirty="0">
+                <a:effectLst/>
+                <a:latin typeface="Arial" panose="020B0604020202020204" pitchFamily="34" charset="0"/>
+                <a:cs typeface="Arial" panose="020B0604020202020204" pitchFamily="34" charset="0"/>
+              </a:rPr>
+              <a:t>class from the </a:t>
+            </a:r>
+            <a:r>
+              <a:rPr lang="en-US" b="0" dirty="0" err="1">
+                <a:effectLst/>
+                <a:latin typeface="Arial" panose="020B0604020202020204" pitchFamily="34" charset="0"/>
+                <a:cs typeface="Arial" panose="020B0604020202020204" pitchFamily="34" charset="0"/>
+              </a:rPr>
+              <a:t>docstrange</a:t>
+            </a:r>
+            <a:r>
+              <a:rPr lang="en-US" b="0" dirty="0">
+                <a:effectLst/>
+                <a:latin typeface="Arial" panose="020B0604020202020204" pitchFamily="34" charset="0"/>
+                <a:cs typeface="Arial" panose="020B0604020202020204" pitchFamily="34" charset="0"/>
+              </a:rPr>
+              <a:t> library, use to read document, extract content</a:t>
+            </a:r>
+            <a:endParaRPr lang="en-US" b="0" dirty="0">
+              <a:effectLst/>
+              <a:latin typeface="Arial" panose="020B0604020202020204" pitchFamily="34" charset="0"/>
+              <a:cs typeface="Arial" panose="020B0604020202020204" pitchFamily="34" charset="0"/>
+            </a:endParaRPr>
+          </a:p>
+        </p:txBody>
+      </p:sp>
+      <p:sp>
+        <p:nvSpPr>
+          <p:cNvPr id="7" name="TextBox 6"/>
+          <p:cNvSpPr txBox="1"/>
+          <p:nvPr/>
+        </p:nvSpPr>
+        <p:spPr>
+          <a:xfrm>
+            <a:off x="5307573" y="1598662"/>
+            <a:ext cx="6884427" cy="1337945"/>
+          </a:xfrm>
+          <a:prstGeom prst="rect">
+            <a:avLst/>
+          </a:prstGeom>
+          <a:noFill/>
+        </p:spPr>
+        <p:txBody>
+          <a:bodyPr wrap="square">
+            <a:spAutoFit/>
+          </a:bodyPr>
+          <a:lstStyle/>
+          <a:p>
+            <a:pPr algn="just">
+              <a:lnSpc>
+                <a:spcPct val="150000"/>
+              </a:lnSpc>
+            </a:pPr>
+            <a:r>
+              <a:rPr lang="en-US" b="1" dirty="0" err="1"/>
+              <a:t>extractor.extract</a:t>
+            </a:r>
+            <a:r>
+              <a:rPr lang="en-US" b="1" dirty="0"/>
+              <a:t>(str(INPUT_FILE)): </a:t>
+            </a:r>
+            <a:r>
+              <a:rPr lang="en-US" dirty="0"/>
+              <a:t>call method and return </a:t>
+            </a:r>
+            <a:r>
+              <a:rPr lang="en-US" b="1" dirty="0"/>
+              <a:t>extraction result object </a:t>
+            </a:r>
+            <a:r>
+              <a:rPr lang="en-US" dirty="0"/>
+              <a:t>containing parsed data (text, tables, metadata, etc.).</a:t>
+            </a:r>
+            <a:endParaRPr lang="en-US" dirty="0"/>
+          </a:p>
+        </p:txBody>
+      </p:sp>
+      <p:sp>
+        <p:nvSpPr>
+          <p:cNvPr id="12" name="TextBox 11"/>
+          <p:cNvSpPr txBox="1"/>
+          <p:nvPr/>
+        </p:nvSpPr>
+        <p:spPr>
+          <a:xfrm>
+            <a:off x="5306302" y="2841851"/>
+            <a:ext cx="6884428" cy="1338828"/>
+          </a:xfrm>
+          <a:prstGeom prst="rect">
+            <a:avLst/>
+          </a:prstGeom>
+          <a:noFill/>
+        </p:spPr>
+        <p:txBody>
+          <a:bodyPr wrap="square">
+            <a:spAutoFit/>
+          </a:bodyPr>
+          <a:lstStyle/>
+          <a:p>
+            <a:pPr algn="just">
+              <a:lnSpc>
+                <a:spcPct val="150000"/>
+              </a:lnSpc>
+              <a:buNone/>
+            </a:pPr>
+            <a:r>
+              <a:rPr lang="en-US" b="1" dirty="0" err="1"/>
+              <a:t>extract_markdown</a:t>
+            </a:r>
+            <a:r>
+              <a:rPr lang="en-US" b="1" dirty="0"/>
+              <a:t>(): </a:t>
+            </a:r>
+            <a:r>
+              <a:rPr lang="en-US" dirty="0"/>
+              <a:t>returns the document as Markdown, preserving structure like headings, lists, and tables.</a:t>
+            </a:r>
+            <a:endParaRPr lang="en-US" dirty="0"/>
           </a:p>
         </p:txBody>
       </p:sp>
       <p:pic>
         <p:nvPicPr>
-          <p:cNvPr id="3" name="Picture 2">
-            <a:extLst>
-              <a:ext uri="{FF2B5EF4-FFF2-40B4-BE49-F238E27FC236}">
-                <a16:creationId xmlns:a16="http://schemas.microsoft.com/office/drawing/2014/main" id="{BC192F86-9411-50D2-C000-3293331426B1}"/>
-              </a:ext>
-            </a:extLst>
-          </p:cNvPr>
+          <p:cNvPr id="6" name="Picture 5"/>
+          <p:cNvPicPr>
+            <a:picLocks noChangeAspect="1"/>
+          </p:cNvPicPr>
+          <p:nvPr/>
+        </p:nvPicPr>
+        <p:blipFill>
+          <a:blip r:embed="rId1"/>
+          <a:stretch>
+            <a:fillRect/>
+          </a:stretch>
+        </p:blipFill>
+        <p:spPr>
+          <a:xfrm>
+            <a:off x="80010" y="807720"/>
+            <a:ext cx="3622675" cy="590550"/>
+          </a:xfrm>
+          <a:prstGeom prst="rect">
+            <a:avLst/>
+          </a:prstGeom>
+        </p:spPr>
+      </p:pic>
+      <p:pic>
+        <p:nvPicPr>
+          <p:cNvPr id="9" name="Picture 8"/>
+          <p:cNvPicPr>
+            <a:picLocks noChangeAspect="1"/>
+          </p:cNvPicPr>
+          <p:nvPr/>
+        </p:nvPicPr>
+        <p:blipFill>
+          <a:blip r:embed="rId2"/>
+          <a:stretch>
+            <a:fillRect/>
+          </a:stretch>
+        </p:blipFill>
+        <p:spPr>
+          <a:xfrm>
+            <a:off x="130810" y="1510665"/>
+            <a:ext cx="4495800" cy="419100"/>
+          </a:xfrm>
+          <a:prstGeom prst="rect">
+            <a:avLst/>
+          </a:prstGeom>
+        </p:spPr>
+      </p:pic>
+      <p:pic>
+        <p:nvPicPr>
+          <p:cNvPr id="10" name="Picture 9"/>
           <p:cNvPicPr>
             <a:picLocks noChangeAspect="1"/>
           </p:cNvPicPr>
@@ -6501,8 +6764,8 @@
         </p:blipFill>
         <p:spPr>
           <a:xfrm>
-            <a:off x="114030" y="594701"/>
-            <a:ext cx="5132019" cy="2598219"/>
+            <a:off x="131445" y="2003425"/>
+            <a:ext cx="4511040" cy="708660"/>
           </a:xfrm>
           <a:prstGeom prst="rect">
             <a:avLst/>
@@ -6511,13 +6774,7 @@
       </p:pic>
       <p:pic>
         <p:nvPicPr>
-          <p:cNvPr id="4" name="Picture 3">
-            <a:extLst>
-              <a:ext uri="{FF2B5EF4-FFF2-40B4-BE49-F238E27FC236}">
-                <a16:creationId xmlns:a16="http://schemas.microsoft.com/office/drawing/2014/main" id="{EC0AADFE-9D64-F723-9AD7-21035180AC66}"/>
-              </a:ext>
-            </a:extLst>
-          </p:cNvPr>
+          <p:cNvPr id="13" name="Picture 12"/>
           <p:cNvPicPr>
             <a:picLocks noChangeAspect="1"/>
           </p:cNvPicPr>
@@ -6525,216 +6782,80 @@
         </p:nvPicPr>
         <p:blipFill>
           <a:blip r:embed="rId4"/>
+          <a:srcRect r="4060"/>
           <a:stretch>
             <a:fillRect/>
           </a:stretch>
         </p:blipFill>
         <p:spPr>
           <a:xfrm>
-            <a:off x="4419600" y="4180115"/>
-            <a:ext cx="7772400" cy="2677885"/>
+            <a:off x="130810" y="2785745"/>
+            <a:ext cx="5175250" cy="1047115"/>
           </a:xfrm>
           <a:prstGeom prst="rect">
             <a:avLst/>
           </a:prstGeom>
         </p:spPr>
       </p:pic>
-      <p:sp>
-        <p:nvSpPr>
-          <p:cNvPr id="5" name="TextBox 4">
-            <a:extLst>
-              <a:ext uri="{FF2B5EF4-FFF2-40B4-BE49-F238E27FC236}">
-                <a16:creationId xmlns:a16="http://schemas.microsoft.com/office/drawing/2014/main" id="{0FC748C0-AA88-02AE-3770-836F71B515C5}"/>
-              </a:ext>
-            </a:extLst>
-          </p:cNvPr>
-          <p:cNvSpPr txBox="1"/>
+      <p:pic>
+        <p:nvPicPr>
+          <p:cNvPr id="14" name="Picture 13"/>
+          <p:cNvPicPr>
+            <a:picLocks noChangeAspect="1"/>
+          </p:cNvPicPr>
           <p:nvPr/>
-        </p:nvSpPr>
-        <p:spPr>
-          <a:xfrm>
-            <a:off x="5307573" y="594701"/>
-            <a:ext cx="6604339" cy="923330"/>
+        </p:nvPicPr>
+        <p:blipFill>
+          <a:blip r:embed="rId5"/>
+          <a:stretch>
+            <a:fillRect/>
+          </a:stretch>
+        </p:blipFill>
+        <p:spPr>
+          <a:xfrm>
+            <a:off x="5251450" y="3832860"/>
+            <a:ext cx="6717030" cy="2910840"/>
           </a:xfrm>
           <a:prstGeom prst="rect">
             <a:avLst/>
           </a:prstGeom>
-          <a:noFill/>
-        </p:spPr>
-        <p:txBody>
-          <a:bodyPr wrap="square">
-            <a:spAutoFit/>
-          </a:bodyPr>
-          <a:lstStyle/>
-          <a:p>
-            <a:pPr algn="just">
-              <a:lnSpc>
-                <a:spcPct val="150000"/>
-              </a:lnSpc>
-              <a:buNone/>
-            </a:pPr>
-            <a:r>
-              <a:rPr lang="en-US" b="1" dirty="0" err="1">
-                <a:effectLst/>
-                <a:latin typeface="Arial" panose="020B0604020202020204" pitchFamily="34" charset="0"/>
-                <a:cs typeface="Arial" panose="020B0604020202020204" pitchFamily="34" charset="0"/>
-              </a:rPr>
-              <a:t>DocumentExtractor</a:t>
-            </a:r>
-            <a:r>
-              <a:rPr lang="en-US" b="1" dirty="0">
-                <a:effectLst/>
-                <a:latin typeface="Arial" panose="020B0604020202020204" pitchFamily="34" charset="0"/>
-                <a:cs typeface="Arial" panose="020B0604020202020204" pitchFamily="34" charset="0"/>
-              </a:rPr>
-              <a:t>: </a:t>
-            </a:r>
-            <a:r>
-              <a:rPr lang="en-US" b="0" dirty="0">
-                <a:effectLst/>
-                <a:latin typeface="Arial" panose="020B0604020202020204" pitchFamily="34" charset="0"/>
-                <a:cs typeface="Arial" panose="020B0604020202020204" pitchFamily="34" charset="0"/>
-              </a:rPr>
-              <a:t>class from the </a:t>
-            </a:r>
-            <a:r>
-              <a:rPr lang="en-US" b="0" dirty="0" err="1">
-                <a:effectLst/>
-                <a:latin typeface="Arial" panose="020B0604020202020204" pitchFamily="34" charset="0"/>
-                <a:cs typeface="Arial" panose="020B0604020202020204" pitchFamily="34" charset="0"/>
-              </a:rPr>
-              <a:t>docstrange</a:t>
-            </a:r>
-            <a:r>
-              <a:rPr lang="en-US" b="0" dirty="0">
-                <a:effectLst/>
-                <a:latin typeface="Arial" panose="020B0604020202020204" pitchFamily="34" charset="0"/>
-                <a:cs typeface="Arial" panose="020B0604020202020204" pitchFamily="34" charset="0"/>
-              </a:rPr>
-              <a:t> library, use to read document, extract content</a:t>
-            </a:r>
-          </a:p>
-        </p:txBody>
-      </p:sp>
-      <p:sp>
-        <p:nvSpPr>
-          <p:cNvPr id="7" name="TextBox 6">
-            <a:extLst>
-              <a:ext uri="{FF2B5EF4-FFF2-40B4-BE49-F238E27FC236}">
-                <a16:creationId xmlns:a16="http://schemas.microsoft.com/office/drawing/2014/main" id="{4EF59950-19EB-D362-C631-7B61F52ED02D}"/>
-              </a:ext>
-            </a:extLst>
-          </p:cNvPr>
-          <p:cNvSpPr txBox="1"/>
+          <a:ln>
+            <a:solidFill>
+              <a:schemeClr val="tx1"/>
+            </a:solidFill>
+          </a:ln>
+        </p:spPr>
+      </p:pic>
+      <p:pic>
+        <p:nvPicPr>
+          <p:cNvPr id="15" name="Picture 14"/>
+          <p:cNvPicPr>
+            <a:picLocks noChangeAspect="1"/>
+          </p:cNvPicPr>
           <p:nvPr/>
-        </p:nvSpPr>
-        <p:spPr>
-          <a:xfrm>
-            <a:off x="5307573" y="1598662"/>
-            <a:ext cx="6884427" cy="1338828"/>
+        </p:nvPicPr>
+        <p:blipFill>
+          <a:blip r:embed="rId6"/>
+          <a:stretch>
+            <a:fillRect/>
+          </a:stretch>
+        </p:blipFill>
+        <p:spPr>
+          <a:xfrm>
+            <a:off x="404495" y="3947795"/>
+            <a:ext cx="4389755" cy="2814955"/>
           </a:xfrm>
           <a:prstGeom prst="rect">
             <a:avLst/>
           </a:prstGeom>
-          <a:noFill/>
-        </p:spPr>
-        <p:txBody>
-          <a:bodyPr wrap="square">
-            <a:spAutoFit/>
-          </a:bodyPr>
-          <a:lstStyle/>
-          <a:p>
-            <a:pPr algn="just">
-              <a:lnSpc>
-                <a:spcPct val="150000"/>
-              </a:lnSpc>
-            </a:pPr>
-            <a:r>
-              <a:rPr lang="en-US" b="1" dirty="0" err="1"/>
-              <a:t>extractor.extract</a:t>
-            </a:r>
-            <a:r>
-              <a:rPr lang="en-US" b="1" dirty="0"/>
-              <a:t>("</a:t>
-            </a:r>
-            <a:r>
-              <a:rPr lang="en-US" b="1" dirty="0" err="1"/>
-              <a:t>sample.pdf</a:t>
-            </a:r>
-            <a:r>
-              <a:rPr lang="en-US" b="1" dirty="0"/>
-              <a:t>"): </a:t>
-            </a:r>
-            <a:r>
-              <a:rPr lang="en-US" dirty="0"/>
-              <a:t>call method and return </a:t>
-            </a:r>
-            <a:r>
-              <a:rPr lang="en-US" b="1" dirty="0"/>
-              <a:t>extraction result object </a:t>
-            </a:r>
-            <a:r>
-              <a:rPr lang="en-US" dirty="0"/>
-              <a:t>containing parsed data (text, tables, metadata, etc.).</a:t>
-            </a:r>
-          </a:p>
-        </p:txBody>
-      </p:sp>
-      <p:sp>
-        <p:nvSpPr>
-          <p:cNvPr id="12" name="TextBox 11">
-            <a:extLst>
-              <a:ext uri="{FF2B5EF4-FFF2-40B4-BE49-F238E27FC236}">
-                <a16:creationId xmlns:a16="http://schemas.microsoft.com/office/drawing/2014/main" id="{577488CE-4D4F-38B7-37BA-73C0424E6171}"/>
-              </a:ext>
-            </a:extLst>
-          </p:cNvPr>
-          <p:cNvSpPr txBox="1"/>
-          <p:nvPr/>
-        </p:nvSpPr>
-        <p:spPr>
-          <a:xfrm>
-            <a:off x="5307572" y="2785971"/>
-            <a:ext cx="6884428" cy="1338828"/>
-          </a:xfrm>
-          <a:prstGeom prst="rect">
-            <a:avLst/>
-          </a:prstGeom>
-          <a:noFill/>
-        </p:spPr>
-        <p:txBody>
-          <a:bodyPr wrap="square">
-            <a:spAutoFit/>
-          </a:bodyPr>
-          <a:lstStyle/>
-          <a:p>
-            <a:pPr algn="just">
-              <a:lnSpc>
-                <a:spcPct val="150000"/>
-              </a:lnSpc>
-              <a:buNone/>
-            </a:pPr>
-            <a:r>
-              <a:rPr lang="en-US" b="1" dirty="0" err="1"/>
-              <a:t>extract_markdown</a:t>
-            </a:r>
-            <a:r>
-              <a:rPr lang="en-US" b="1" dirty="0"/>
-              <a:t>(): </a:t>
-            </a:r>
-            <a:r>
-              <a:rPr lang="en-US" dirty="0"/>
-              <a:t>returns the document as Markdown, preserving structure like headings, lists, and tables.</a:t>
-            </a:r>
-          </a:p>
-        </p:txBody>
-      </p:sp>
+          <a:ln>
+            <a:solidFill>
+              <a:schemeClr val="tx1"/>
+            </a:solidFill>
+          </a:ln>
+        </p:spPr>
+      </p:pic>
     </p:spTree>
-    <p:extLst>
-      <p:ext uri="{BB962C8B-B14F-4D97-AF65-F5344CB8AC3E}">
-        <p14:creationId xmlns:p14="http://schemas.microsoft.com/office/powerpoint/2010/main" val="2127338600"/>
-      </p:ext>
-    </p:extLst>
   </p:cSld>
   <p:clrMapOvr>
     <a:masterClrMapping/>
@@ -6742,18 +6863,12 @@
 </p:sld>
 </file>
 
-<file path=ppt/slides/slide5.xml><?xml version="1.0" encoding="utf-8"?>
+<file path=ppt/slides/slide6.xml><?xml version="1.0" encoding="utf-8"?>
 <p:sld xmlns:a="http://schemas.openxmlformats.org/drawingml/2006/main" xmlns:r="http://schemas.openxmlformats.org/officeDocument/2006/relationships" xmlns:p="http://schemas.openxmlformats.org/presentationml/2006/main">
   <p:cSld>
     <p:spTree>
       <p:nvGrpSpPr>
-        <p:cNvPr id="1" name="">
-          <a:extLst>
-            <a:ext uri="{FF2B5EF4-FFF2-40B4-BE49-F238E27FC236}">
-              <a16:creationId xmlns:a16="http://schemas.microsoft.com/office/drawing/2014/main" id="{F85E1D94-2D99-E417-0753-3B889D822CD6}"/>
-            </a:ext>
-          </a:extLst>
-        </p:cNvPr>
+        <p:cNvPr id="1" name=""/>
         <p:cNvGrpSpPr/>
         <p:nvPr/>
       </p:nvGrpSpPr>
@@ -6765,45 +6880,9 @@
           <a:chExt cx="0" cy="0"/>
         </a:xfrm>
       </p:grpSpPr>
-      <p:pic>
-        <p:nvPicPr>
-          <p:cNvPr id="8" name="Picture 7">
-            <a:extLst>
-              <a:ext uri="{FF2B5EF4-FFF2-40B4-BE49-F238E27FC236}">
-                <a16:creationId xmlns:a16="http://schemas.microsoft.com/office/drawing/2014/main" id="{829A4B9E-D891-A99C-E950-016F04586727}"/>
-              </a:ext>
-            </a:extLst>
-          </p:cNvPr>
-          <p:cNvPicPr>
-            <a:picLocks noChangeAspect="1"/>
-          </p:cNvPicPr>
-          <p:nvPr/>
-        </p:nvPicPr>
-        <p:blipFill>
-          <a:blip r:embed="rId2"/>
-          <a:stretch>
-            <a:fillRect/>
-          </a:stretch>
-        </p:blipFill>
-        <p:spPr>
-          <a:xfrm>
-            <a:off x="0" y="3248599"/>
-            <a:ext cx="4116861" cy="3609401"/>
-          </a:xfrm>
-          <a:prstGeom prst="rect">
-            <a:avLst/>
-          </a:prstGeom>
-        </p:spPr>
-      </p:pic>
-      <p:sp>
-        <p:nvSpPr>
-          <p:cNvPr id="11" name="Rectangle 10">
-            <a:extLst>
-              <a:ext uri="{FF2B5EF4-FFF2-40B4-BE49-F238E27FC236}">
-                <a16:creationId xmlns:a16="http://schemas.microsoft.com/office/drawing/2014/main" id="{E6EDB62A-8486-58C9-4060-2B689C4029FB}"/>
-              </a:ext>
-            </a:extLst>
-          </p:cNvPr>
+      <p:sp>
+        <p:nvSpPr>
+          <p:cNvPr id="11" name="Rectangle 10"/>
           <p:cNvSpPr/>
           <p:nvPr/>
         </p:nvSpPr>
@@ -6834,7 +6913,6 @@
           <a:p>
             <a:r>
               <a:rPr lang="en-US" sz="3200" b="1" dirty="0" err="1">
-                <a:ln/>
                 <a:solidFill>
                   <a:schemeClr val="accent4"/>
                 </a:solidFill>
@@ -6843,25 +6921,23 @@
             </a:r>
             <a:r>
               <a:rPr lang="en-US" sz="3200" b="1" dirty="0">
-                <a:ln/>
                 <a:solidFill>
                   <a:schemeClr val="accent4"/>
                 </a:solidFill>
               </a:rPr>
               <a:t>()</a:t>
             </a:r>
-          </a:p>
-        </p:txBody>
-      </p:sp>
-      <p:sp>
-        <p:nvSpPr>
-          <p:cNvPr id="12" name="TextBox 11">
-            <a:extLst>
-              <a:ext uri="{FF2B5EF4-FFF2-40B4-BE49-F238E27FC236}">
-                <a16:creationId xmlns:a16="http://schemas.microsoft.com/office/drawing/2014/main" id="{4EE75A2C-1833-3501-6CFA-63D2170032A2}"/>
-              </a:ext>
-            </a:extLst>
-          </p:cNvPr>
+            <a:endParaRPr lang="en-US" sz="3200" b="1" dirty="0">
+              <a:solidFill>
+                <a:schemeClr val="accent4"/>
+              </a:solidFill>
+            </a:endParaRPr>
+          </a:p>
+        </p:txBody>
+      </p:sp>
+      <p:sp>
+        <p:nvSpPr>
+          <p:cNvPr id="12" name="TextBox 11"/>
           <p:cNvSpPr txBox="1"/>
           <p:nvPr/>
         </p:nvSpPr>
@@ -6907,88 +6983,17 @@
               <a:rPr lang="en-US" dirty="0"/>
               <a:t> data</a:t>
             </a:r>
-          </a:p>
-        </p:txBody>
-      </p:sp>
-      <p:pic>
-        <p:nvPicPr>
-          <p:cNvPr id="2" name="Picture 1">
-            <a:extLst>
-              <a:ext uri="{FF2B5EF4-FFF2-40B4-BE49-F238E27FC236}">
-                <a16:creationId xmlns:a16="http://schemas.microsoft.com/office/drawing/2014/main" id="{D6BA37A0-A55A-1691-5400-94E0C7AB6847}"/>
-              </a:ext>
-            </a:extLst>
-          </p:cNvPr>
-          <p:cNvPicPr>
-            <a:picLocks noChangeAspect="1"/>
-          </p:cNvPicPr>
-          <p:nvPr/>
-        </p:nvPicPr>
-        <p:blipFill>
-          <a:blip r:embed="rId3"/>
-          <a:stretch>
-            <a:fillRect/>
-          </a:stretch>
-        </p:blipFill>
-        <p:spPr>
-          <a:xfrm>
-            <a:off x="6945953" y="3085698"/>
-            <a:ext cx="5246047" cy="3772302"/>
-          </a:xfrm>
-          <a:prstGeom prst="rect">
-            <a:avLst/>
-          </a:prstGeom>
-        </p:spPr>
-      </p:pic>
-      <p:pic>
-        <p:nvPicPr>
-          <p:cNvPr id="9" name="Picture 8">
-            <a:extLst>
-              <a:ext uri="{FF2B5EF4-FFF2-40B4-BE49-F238E27FC236}">
-                <a16:creationId xmlns:a16="http://schemas.microsoft.com/office/drawing/2014/main" id="{CDB42C08-0A1F-A9CB-B00C-1E09A4FE3228}"/>
-              </a:ext>
-            </a:extLst>
-          </p:cNvPr>
-          <p:cNvPicPr>
-            <a:picLocks noChangeAspect="1"/>
-          </p:cNvPicPr>
-          <p:nvPr/>
-        </p:nvPicPr>
-        <p:blipFill>
-          <a:blip r:embed="rId4"/>
-          <a:stretch>
-            <a:fillRect/>
-          </a:stretch>
-        </p:blipFill>
-        <p:spPr>
-          <a:xfrm>
-            <a:off x="80206" y="594701"/>
-            <a:ext cx="5165842" cy="2694254"/>
-          </a:xfrm>
-          <a:prstGeom prst="rect">
-            <a:avLst/>
-          </a:prstGeom>
-        </p:spPr>
-      </p:pic>
+            <a:endParaRPr lang="en-US" dirty="0"/>
+          </a:p>
+        </p:txBody>
+      </p:sp>
       <p:graphicFrame>
         <p:nvGraphicFramePr>
-          <p:cNvPr id="10" name="Table 9">
-            <a:extLst>
-              <a:ext uri="{FF2B5EF4-FFF2-40B4-BE49-F238E27FC236}">
-                <a16:creationId xmlns:a16="http://schemas.microsoft.com/office/drawing/2014/main" id="{C1F35DA2-6FEE-A03E-AD27-733DE3A53938}"/>
-              </a:ext>
-            </a:extLst>
-          </p:cNvPr>
+          <p:cNvPr id="10" name="Table 9"/>
           <p:cNvGraphicFramePr>
             <a:graphicFrameLocks noGrp="1"/>
           </p:cNvGraphicFramePr>
-          <p:nvPr>
-            <p:extLst>
-              <p:ext uri="{D42A27DB-BD31-4B8C-83A1-F6EECF244321}">
-                <p14:modId xmlns:p14="http://schemas.microsoft.com/office/powerpoint/2010/main" val="60329900"/>
-              </p:ext>
-            </p:extLst>
-          </p:nvPr>
+          <p:nvPr/>
         </p:nvGraphicFramePr>
         <p:xfrm>
           <a:off x="5425808" y="1536900"/>
@@ -7001,27 +7006,9 @@
                 <a:tableStyleId>{5C22544A-7EE6-4342-B048-85BDC9FD1C3A}</a:tableStyleId>
               </a:tblPr>
               <a:tblGrid>
-                <a:gridCol w="1974451">
-                  <a:extLst>
-                    <a:ext uri="{9D8B030D-6E8A-4147-A177-3AD203B41FA5}">
-                      <a16:colId xmlns:a16="http://schemas.microsoft.com/office/drawing/2014/main" val="2698673455"/>
-                    </a:ext>
-                  </a:extLst>
-                </a:gridCol>
-                <a:gridCol w="1435396">
-                  <a:extLst>
-                    <a:ext uri="{9D8B030D-6E8A-4147-A177-3AD203B41FA5}">
-                      <a16:colId xmlns:a16="http://schemas.microsoft.com/office/drawing/2014/main" val="4175684505"/>
-                    </a:ext>
-                  </a:extLst>
-                </a:gridCol>
-                <a:gridCol w="3194491">
-                  <a:extLst>
-                    <a:ext uri="{9D8B030D-6E8A-4147-A177-3AD203B41FA5}">
-                      <a16:colId xmlns:a16="http://schemas.microsoft.com/office/drawing/2014/main" val="459115999"/>
-                    </a:ext>
-                  </a:extLst>
-                </a:gridCol>
+                <a:gridCol w="1974451"/>
+                <a:gridCol w="1435396"/>
+                <a:gridCol w="3194491"/>
               </a:tblGrid>
               <a:tr h="377341">
                 <a:tc>
@@ -7030,9 +7017,10 @@
                     <a:lstStyle/>
                     <a:p>
                       <a:r>
-                        <a:rPr lang="en-VN" dirty="0"/>
+                        <a:rPr lang="en-US" dirty="0"/>
                         <a:t>Parameter</a:t>
                       </a:r>
+                      <a:endParaRPr lang="en-US" dirty="0"/>
                     </a:p>
                   </a:txBody>
                   <a:tcPr/>
@@ -7043,9 +7031,10 @@
                     <a:lstStyle/>
                     <a:p>
                       <a:r>
-                        <a:rPr lang="en-VN" dirty="0"/>
+                        <a:rPr lang="en-US" dirty="0"/>
                         <a:t>Type</a:t>
                       </a:r>
+                      <a:endParaRPr lang="en-US" dirty="0"/>
                     </a:p>
                   </a:txBody>
                   <a:tcPr/>
@@ -7056,18 +7045,14 @@
                     <a:lstStyle/>
                     <a:p>
                       <a:r>
-                        <a:rPr lang="en-VN" dirty="0"/>
+                        <a:rPr lang="en-US" dirty="0"/>
                         <a:t>Description</a:t>
                       </a:r>
+                      <a:endParaRPr lang="en-US" dirty="0"/>
                     </a:p>
                   </a:txBody>
                   <a:tcPr/>
                 </a:tc>
-                <a:extLst>
-                  <a:ext uri="{0D108BD9-81ED-4DB2-BD59-A6C34878D82A}">
-                    <a16:rowId xmlns:a16="http://schemas.microsoft.com/office/drawing/2014/main" val="3618425928"/>
-                  </a:ext>
-                </a:extLst>
               </a:tr>
               <a:tr h="382582">
                 <a:tc>
@@ -7079,7 +7064,7 @@
                         <a:rPr lang="en-US" dirty="0" err="1"/>
                         <a:t>specified_fields</a:t>
                       </a:r>
-                      <a:endParaRPr lang="en-VN" dirty="0"/>
+                      <a:endParaRPr lang="en-US" dirty="0"/>
                     </a:p>
                   </a:txBody>
                   <a:tcPr/>
@@ -7093,7 +7078,7 @@
                         <a:rPr lang="en-US" dirty="0"/>
                         <a:t>List[str]</a:t>
                       </a:r>
-                      <a:endParaRPr lang="en-VN" dirty="0"/>
+                      <a:endParaRPr lang="en-US" dirty="0"/>
                     </a:p>
                   </a:txBody>
                   <a:tcPr/>
@@ -7107,16 +7092,11 @@
                         <a:rPr lang="en-US" dirty="0"/>
                         <a:t>Extract only specific fields</a:t>
                       </a:r>
-                      <a:endParaRPr lang="en-VN" dirty="0"/>
+                      <a:endParaRPr lang="en-US" dirty="0"/>
                     </a:p>
                   </a:txBody>
                   <a:tcPr/>
                 </a:tc>
-                <a:extLst>
-                  <a:ext uri="{0D108BD9-81ED-4DB2-BD59-A6C34878D82A}">
-                    <a16:rowId xmlns:a16="http://schemas.microsoft.com/office/drawing/2014/main" val="2899398742"/>
-                  </a:ext>
-                </a:extLst>
               </a:tr>
               <a:tr h="382582">
                 <a:tc>
@@ -7128,7 +7108,7 @@
                         <a:rPr lang="en-US" dirty="0" err="1"/>
                         <a:t>json_schema</a:t>
                       </a:r>
-                      <a:endParaRPr lang="en-VN" dirty="0"/>
+                      <a:endParaRPr lang="en-US" dirty="0"/>
                     </a:p>
                   </a:txBody>
                   <a:tcPr/>
@@ -7142,7 +7122,7 @@
                         <a:rPr lang="en-US" dirty="0" err="1"/>
                         <a:t>Dict</a:t>
                       </a:r>
-                      <a:endParaRPr lang="en-VN" dirty="0"/>
+                      <a:endParaRPr lang="en-US" dirty="0"/>
                     </a:p>
                   </a:txBody>
                   <a:tcPr/>
@@ -7156,147 +7136,77 @@
                         <a:rPr lang="en-US" dirty="0"/>
                         <a:t>Enforce structured schema</a:t>
                       </a:r>
-                      <a:endParaRPr lang="en-VN" dirty="0"/>
+                      <a:endParaRPr lang="en-US" dirty="0"/>
                     </a:p>
                   </a:txBody>
                   <a:tcPr/>
                 </a:tc>
-                <a:extLst>
-                  <a:ext uri="{0D108BD9-81ED-4DB2-BD59-A6C34878D82A}">
-                    <a16:rowId xmlns:a16="http://schemas.microsoft.com/office/drawing/2014/main" val="830368563"/>
-                  </a:ext>
-                </a:extLst>
               </a:tr>
             </a:tbl>
           </a:graphicData>
         </a:graphic>
       </p:graphicFrame>
-    </p:spTree>
-    <p:extLst>
-      <p:ext uri="{BB962C8B-B14F-4D97-AF65-F5344CB8AC3E}">
-        <p14:creationId xmlns:p14="http://schemas.microsoft.com/office/powerpoint/2010/main" val="2662084838"/>
-      </p:ext>
-    </p:extLst>
-  </p:cSld>
-  <p:clrMapOvr>
-    <a:masterClrMapping/>
-  </p:clrMapOvr>
-</p:sld>
-</file>
-
-<file path=ppt/slides/slide6.xml><?xml version="1.0" encoding="utf-8"?>
-<p:sld xmlns:a="http://schemas.openxmlformats.org/drawingml/2006/main" xmlns:r="http://schemas.openxmlformats.org/officeDocument/2006/relationships" xmlns:p="http://schemas.openxmlformats.org/presentationml/2006/main">
-  <p:cSld>
-    <p:spTree>
-      <p:nvGrpSpPr>
-        <p:cNvPr id="1" name="">
-          <a:extLst>
-            <a:ext uri="{FF2B5EF4-FFF2-40B4-BE49-F238E27FC236}">
-              <a16:creationId xmlns:a16="http://schemas.microsoft.com/office/drawing/2014/main" id="{A4683C17-5720-56C3-452D-ADCCA37505C0}"/>
-            </a:ext>
-          </a:extLst>
-        </p:cNvPr>
-        <p:cNvGrpSpPr/>
-        <p:nvPr/>
-      </p:nvGrpSpPr>
-      <p:grpSpPr>
-        <a:xfrm>
-          <a:off x="0" y="0"/>
-          <a:ext cx="0" cy="0"/>
-          <a:chOff x="0" y="0"/>
-          <a:chExt cx="0" cy="0"/>
-        </a:xfrm>
-      </p:grpSpPr>
-      <p:sp>
-        <p:nvSpPr>
-          <p:cNvPr id="11" name="Rectangle 10">
-            <a:extLst>
-              <a:ext uri="{FF2B5EF4-FFF2-40B4-BE49-F238E27FC236}">
-                <a16:creationId xmlns:a16="http://schemas.microsoft.com/office/drawing/2014/main" id="{89FAF074-994C-1D69-CBDA-D8DD0E1D7C0F}"/>
-              </a:ext>
-            </a:extLst>
-          </p:cNvPr>
-          <p:cNvSpPr/>
+      <p:pic>
+        <p:nvPicPr>
+          <p:cNvPr id="15" name="Picture 14"/>
+          <p:cNvPicPr>
+            <a:picLocks noChangeAspect="1"/>
+          </p:cNvPicPr>
           <p:nvPr/>
-        </p:nvSpPr>
-        <p:spPr>
-          <a:xfrm>
-            <a:off x="80206" y="-13640"/>
-            <a:ext cx="12599474" cy="1077218"/>
+        </p:nvPicPr>
+        <p:blipFill>
+          <a:blip r:embed="rId1"/>
+          <a:stretch>
+            <a:fillRect/>
+          </a:stretch>
+        </p:blipFill>
+        <p:spPr>
+          <a:xfrm>
+            <a:off x="513715" y="3718560"/>
+            <a:ext cx="4651375" cy="2982595"/>
           </a:xfrm>
           <a:prstGeom prst="rect">
             <a:avLst/>
           </a:prstGeom>
-          <a:noFill/>
-        </p:spPr>
-        <p:txBody>
-          <a:bodyPr wrap="square" lIns="91440" tIns="45720" rIns="91440" bIns="45720">
-            <a:spAutoFit/>
-            <a:scene3d>
-              <a:camera prst="orthographicFront"/>
-              <a:lightRig rig="soft" dir="t">
-                <a:rot lat="0" lon="0" rev="15600000"/>
-              </a:lightRig>
-            </a:scene3d>
-            <a:sp3d extrusionH="57150" prstMaterial="softEdge">
-              <a:bevelT w="25400" h="38100"/>
-            </a:sp3d>
-          </a:bodyPr>
-          <a:lstStyle/>
-          <a:p>
-            <a:r>
-              <a:rPr lang="en-US" sz="3200" b="1" dirty="0" err="1">
-                <a:ln/>
-                <a:solidFill>
-                  <a:schemeClr val="accent4"/>
-                </a:solidFill>
-              </a:rPr>
-              <a:t>extract_data</a:t>
-            </a:r>
-            <a:r>
-              <a:rPr lang="en-US" sz="3200" b="1" dirty="0">
-                <a:ln/>
-                <a:solidFill>
-                  <a:schemeClr val="accent4"/>
-                </a:solidFill>
-              </a:rPr>
-              <a:t>() -&gt; </a:t>
-            </a:r>
-            <a:r>
-              <a:rPr lang="en-US" sz="3200" b="1" dirty="0" err="1">
-                <a:ln/>
-                <a:solidFill>
-                  <a:schemeClr val="accent4"/>
-                </a:solidFill>
-              </a:rPr>
-              <a:t>specified_fields</a:t>
-            </a:r>
-            <a:endParaRPr lang="en-VN" sz="3200" b="1" dirty="0">
-              <a:ln/>
-              <a:solidFill>
-                <a:schemeClr val="accent4"/>
-              </a:solidFill>
-            </a:endParaRPr>
-          </a:p>
-          <a:p>
-            <a:endParaRPr lang="en-US" sz="3200" b="1" dirty="0">
-              <a:ln/>
-              <a:solidFill>
-                <a:schemeClr val="accent4"/>
-              </a:solidFill>
-            </a:endParaRPr>
-          </a:p>
-        </p:txBody>
-      </p:sp>
+          <a:ln>
+            <a:solidFill>
+              <a:schemeClr val="tx1"/>
+            </a:solidFill>
+          </a:ln>
+        </p:spPr>
+      </p:pic>
       <p:pic>
         <p:nvPicPr>
-          <p:cNvPr id="3" name="Picture 2">
-            <a:extLst>
-              <a:ext uri="{FF2B5EF4-FFF2-40B4-BE49-F238E27FC236}">
-                <a16:creationId xmlns:a16="http://schemas.microsoft.com/office/drawing/2014/main" id="{059CADE1-8B1B-467A-F449-38673A4C13F5}"/>
-              </a:ext>
-            </a:extLst>
-          </p:cNvPr>
+          <p:cNvPr id="4" name="Picture 3"/>
+          <p:cNvPicPr>
+            <a:picLocks noChangeAspect="1"/>
+          </p:cNvPicPr>
+          <p:nvPr/>
+        </p:nvPicPr>
+        <p:blipFill>
+          <a:blip r:embed="rId2"/>
+          <a:stretch>
+            <a:fillRect/>
+          </a:stretch>
+        </p:blipFill>
+        <p:spPr>
+          <a:xfrm>
+            <a:off x="5718175" y="3009900"/>
+            <a:ext cx="1798320" cy="3496945"/>
+          </a:xfrm>
+          <a:prstGeom prst="rect">
+            <a:avLst/>
+          </a:prstGeom>
+          <a:ln>
+            <a:solidFill>
+              <a:schemeClr val="tx1"/>
+            </a:solidFill>
+          </a:ln>
+        </p:spPr>
+      </p:pic>
+      <p:pic>
+        <p:nvPicPr>
+          <p:cNvPr id="5" name="Picture 4"/>
           <p:cNvPicPr>
             <a:picLocks noChangeAspect="1"/>
           </p:cNvPicPr>
@@ -7304,29 +7214,29 @@
         </p:nvPicPr>
         <p:blipFill>
           <a:blip r:embed="rId3"/>
+          <a:srcRect l="6235"/>
           <a:stretch>
             <a:fillRect/>
           </a:stretch>
         </p:blipFill>
         <p:spPr>
           <a:xfrm>
-            <a:off x="7695877" y="587917"/>
-            <a:ext cx="4203017" cy="6245918"/>
+            <a:off x="7988935" y="2870200"/>
+            <a:ext cx="3201670" cy="3776345"/>
           </a:xfrm>
           <a:prstGeom prst="rect">
             <a:avLst/>
           </a:prstGeom>
+          <a:ln>
+            <a:solidFill>
+              <a:schemeClr val="tx1"/>
+            </a:solidFill>
+          </a:ln>
         </p:spPr>
       </p:pic>
       <p:pic>
         <p:nvPicPr>
-          <p:cNvPr id="4" name="Picture 3">
-            <a:extLst>
-              <a:ext uri="{FF2B5EF4-FFF2-40B4-BE49-F238E27FC236}">
-                <a16:creationId xmlns:a16="http://schemas.microsoft.com/office/drawing/2014/main" id="{21F9FD8D-6544-CD06-740E-5D30D564FC58}"/>
-              </a:ext>
-            </a:extLst>
-          </p:cNvPr>
+          <p:cNvPr id="6" name="Picture 5"/>
           <p:cNvPicPr>
             <a:picLocks noChangeAspect="1"/>
           </p:cNvPicPr>
@@ -7340,20 +7250,87 @@
         </p:blipFill>
         <p:spPr>
           <a:xfrm>
-            <a:off x="256530" y="725565"/>
-            <a:ext cx="5938361" cy="5906088"/>
+            <a:off x="80010" y="481965"/>
+            <a:ext cx="3622675" cy="590550"/>
           </a:xfrm>
           <a:prstGeom prst="rect">
             <a:avLst/>
           </a:prstGeom>
         </p:spPr>
       </p:pic>
+      <p:pic>
+        <p:nvPicPr>
+          <p:cNvPr id="7" name="Picture 6"/>
+          <p:cNvPicPr>
+            <a:picLocks noChangeAspect="1"/>
+          </p:cNvPicPr>
+          <p:nvPr/>
+        </p:nvPicPr>
+        <p:blipFill>
+          <a:blip r:embed="rId5"/>
+          <a:stretch>
+            <a:fillRect/>
+          </a:stretch>
+        </p:blipFill>
+        <p:spPr>
+          <a:xfrm>
+            <a:off x="80010" y="1117600"/>
+            <a:ext cx="4495800" cy="419100"/>
+          </a:xfrm>
+          <a:prstGeom prst="rect">
+            <a:avLst/>
+          </a:prstGeom>
+        </p:spPr>
+      </p:pic>
+      <p:pic>
+        <p:nvPicPr>
+          <p:cNvPr id="13" name="Picture 12"/>
+          <p:cNvPicPr>
+            <a:picLocks noChangeAspect="1"/>
+          </p:cNvPicPr>
+          <p:nvPr/>
+        </p:nvPicPr>
+        <p:blipFill>
+          <a:blip r:embed="rId6"/>
+          <a:stretch>
+            <a:fillRect/>
+          </a:stretch>
+        </p:blipFill>
+        <p:spPr>
+          <a:xfrm>
+            <a:off x="131445" y="1581785"/>
+            <a:ext cx="4511040" cy="708660"/>
+          </a:xfrm>
+          <a:prstGeom prst="rect">
+            <a:avLst/>
+          </a:prstGeom>
+        </p:spPr>
+      </p:pic>
+      <p:pic>
+        <p:nvPicPr>
+          <p:cNvPr id="14" name="Picture 13"/>
+          <p:cNvPicPr>
+            <a:picLocks noChangeAspect="1"/>
+          </p:cNvPicPr>
+          <p:nvPr/>
+        </p:nvPicPr>
+        <p:blipFill>
+          <a:blip r:embed="rId7"/>
+          <a:stretch>
+            <a:fillRect/>
+          </a:stretch>
+        </p:blipFill>
+        <p:spPr>
+          <a:xfrm>
+            <a:off x="80010" y="2332355"/>
+            <a:ext cx="4133850" cy="1344295"/>
+          </a:xfrm>
+          <a:prstGeom prst="rect">
+            <a:avLst/>
+          </a:prstGeom>
+        </p:spPr>
+      </p:pic>
     </p:spTree>
-    <p:extLst>
-      <p:ext uri="{BB962C8B-B14F-4D97-AF65-F5344CB8AC3E}">
-        <p14:creationId xmlns:p14="http://schemas.microsoft.com/office/powerpoint/2010/main" val="1726574729"/>
-      </p:ext>
-    </p:extLst>
   </p:cSld>
   <p:clrMapOvr>
     <a:masterClrMapping/>
@@ -7380,20 +7357,14 @@
       </p:grpSpPr>
       <p:sp>
         <p:nvSpPr>
-          <p:cNvPr id="5" name="TextBox 4">
-            <a:extLst>
-              <a:ext uri="{FF2B5EF4-FFF2-40B4-BE49-F238E27FC236}">
-                <a16:creationId xmlns:a16="http://schemas.microsoft.com/office/drawing/2014/main" id="{BEAC880A-8CBD-CF1E-0205-2D4AABF267CE}"/>
-              </a:ext>
-            </a:extLst>
-          </p:cNvPr>
-          <p:cNvSpPr txBox="1"/>
+          <p:cNvPr id="11" name="Rectangle 10"/>
+          <p:cNvSpPr/>
           <p:nvPr/>
         </p:nvSpPr>
         <p:spPr>
           <a:xfrm>
-            <a:off x="103909" y="225632"/>
-            <a:ext cx="6097978" cy="369332"/>
+            <a:off x="80206" y="-13640"/>
+            <a:ext cx="12599474" cy="1077218"/>
           </a:xfrm>
           <a:prstGeom prst="rect">
             <a:avLst/>
@@ -7401,28 +7372,110 @@
           <a:noFill/>
         </p:spPr>
         <p:txBody>
-          <a:bodyPr wrap="square">
+          <a:bodyPr wrap="square" lIns="91440" tIns="45720" rIns="91440" bIns="45720">
             <a:spAutoFit/>
+            <a:scene3d>
+              <a:camera prst="orthographicFront"/>
+              <a:lightRig rig="soft" dir="t">
+                <a:rot lat="0" lon="0" rev="15600000"/>
+              </a:lightRig>
+            </a:scene3d>
+            <a:sp3d extrusionH="57150" prstMaterial="softEdge">
+              <a:bevelT w="25400" h="38100"/>
+            </a:sp3d>
           </a:bodyPr>
           <a:lstStyle/>
           <a:p>
             <a:r>
-              <a:rPr lang="en-US" dirty="0"/>
-              <a:t>Local REST API mode</a:t>
-            </a:r>
-            <a:endParaRPr lang="en-VN" dirty="0"/>
+              <a:rPr lang="en-US" sz="3200" b="1" dirty="0" err="1">
+                <a:solidFill>
+                  <a:schemeClr val="accent4"/>
+                </a:solidFill>
+              </a:rPr>
+              <a:t>extract_data</a:t>
+            </a:r>
+            <a:r>
+              <a:rPr lang="en-US" sz="3200" b="1" dirty="0">
+                <a:solidFill>
+                  <a:schemeClr val="accent4"/>
+                </a:solidFill>
+              </a:rPr>
+              <a:t>() -&gt; </a:t>
+            </a:r>
+            <a:r>
+              <a:rPr lang="en-US" sz="3200" b="1" dirty="0" err="1">
+                <a:solidFill>
+                  <a:schemeClr val="accent4"/>
+                </a:solidFill>
+              </a:rPr>
+              <a:t>specified_fields</a:t>
+            </a:r>
+            <a:endParaRPr lang="en-US" sz="3200" b="1" dirty="0">
+              <a:solidFill>
+                <a:schemeClr val="accent4"/>
+              </a:solidFill>
+            </a:endParaRPr>
+          </a:p>
+          <a:p>
+            <a:endParaRPr lang="en-US" sz="3200" b="1" dirty="0">
+              <a:solidFill>
+                <a:schemeClr val="accent4"/>
+              </a:solidFill>
+            </a:endParaRPr>
           </a:p>
         </p:txBody>
       </p:sp>
       <p:pic>
         <p:nvPicPr>
-          <p:cNvPr id="6" name="Picture 5">
-            <a:extLst>
-              <a:ext uri="{FF2B5EF4-FFF2-40B4-BE49-F238E27FC236}">
-                <a16:creationId xmlns:a16="http://schemas.microsoft.com/office/drawing/2014/main" id="{5FA6079A-A2DF-FE7B-CD4A-6D34E73F77AC}"/>
-              </a:ext>
-            </a:extLst>
-          </p:cNvPr>
+          <p:cNvPr id="6" name="Picture 5"/>
+          <p:cNvPicPr>
+            <a:picLocks noChangeAspect="1"/>
+          </p:cNvPicPr>
+          <p:nvPr/>
+        </p:nvPicPr>
+        <p:blipFill>
+          <a:blip r:embed="rId1"/>
+          <a:stretch>
+            <a:fillRect/>
+          </a:stretch>
+        </p:blipFill>
+        <p:spPr>
+          <a:xfrm>
+            <a:off x="80010" y="481965"/>
+            <a:ext cx="3622675" cy="590550"/>
+          </a:xfrm>
+          <a:prstGeom prst="rect">
+            <a:avLst/>
+          </a:prstGeom>
+        </p:spPr>
+      </p:pic>
+      <p:pic>
+        <p:nvPicPr>
+          <p:cNvPr id="7" name="Picture 6"/>
+          <p:cNvPicPr>
+            <a:picLocks noChangeAspect="1"/>
+          </p:cNvPicPr>
+          <p:nvPr/>
+        </p:nvPicPr>
+        <p:blipFill>
+          <a:blip r:embed="rId2"/>
+          <a:stretch>
+            <a:fillRect/>
+          </a:stretch>
+        </p:blipFill>
+        <p:spPr>
+          <a:xfrm>
+            <a:off x="80010" y="1117600"/>
+            <a:ext cx="4495800" cy="419100"/>
+          </a:xfrm>
+          <a:prstGeom prst="rect">
+            <a:avLst/>
+          </a:prstGeom>
+        </p:spPr>
+      </p:pic>
+      <p:pic>
+        <p:nvPicPr>
+          <p:cNvPr id="13" name="Picture 12"/>
           <p:cNvPicPr>
             <a:picLocks noChangeAspect="1"/>
           </p:cNvPicPr>
@@ -7436,204 +7489,93 @@
         </p:blipFill>
         <p:spPr>
           <a:xfrm>
-            <a:off x="192972" y="689965"/>
-            <a:ext cx="4293452" cy="1367435"/>
+            <a:off x="131445" y="1581785"/>
+            <a:ext cx="4511040" cy="708660"/>
           </a:xfrm>
           <a:prstGeom prst="rect">
             <a:avLst/>
           </a:prstGeom>
         </p:spPr>
       </p:pic>
-      <p:sp>
-        <p:nvSpPr>
-          <p:cNvPr id="9" name="TextBox 8">
-            <a:extLst>
-              <a:ext uri="{FF2B5EF4-FFF2-40B4-BE49-F238E27FC236}">
-                <a16:creationId xmlns:a16="http://schemas.microsoft.com/office/drawing/2014/main" id="{45AE0AB1-E30E-BAB2-40DA-E312D17FA500}"/>
-              </a:ext>
-            </a:extLst>
-          </p:cNvPr>
-          <p:cNvSpPr txBox="1"/>
+      <p:pic>
+        <p:nvPicPr>
+          <p:cNvPr id="2" name="Picture 1"/>
+          <p:cNvPicPr>
+            <a:picLocks noChangeAspect="1"/>
+          </p:cNvPicPr>
           <p:nvPr/>
-        </p:nvSpPr>
-        <p:spPr>
-          <a:xfrm>
-            <a:off x="5479256" y="689965"/>
-            <a:ext cx="6100762" cy="1200329"/>
+        </p:nvPicPr>
+        <p:blipFill>
+          <a:blip r:embed="rId4"/>
+          <a:stretch>
+            <a:fillRect/>
+          </a:stretch>
+        </p:blipFill>
+        <p:spPr>
+          <a:xfrm>
+            <a:off x="131445" y="2398395"/>
+            <a:ext cx="5036820" cy="2263140"/>
           </a:xfrm>
           <a:prstGeom prst="rect">
             <a:avLst/>
           </a:prstGeom>
-          <a:noFill/>
-        </p:spPr>
-        <p:txBody>
-          <a:bodyPr wrap="square">
-            <a:spAutoFit/>
-          </a:bodyPr>
-          <a:lstStyle/>
-          <a:p>
-            <a:r>
-              <a:rPr lang="en-US" dirty="0"/>
-              <a:t>The REST server uses the </a:t>
-            </a:r>
-            <a:r>
-              <a:rPr lang="en-US" b="1" dirty="0"/>
-              <a:t>same models as local mode</a:t>
-            </a:r>
-            <a:r>
-              <a:rPr lang="en-US" dirty="0"/>
-              <a:t>:</a:t>
-            </a:r>
-          </a:p>
-          <a:p>
-            <a:pPr marL="171450" indent="-171450">
-              <a:buFont typeface="Arial" panose="020B0604020202020204" pitchFamily="34" charset="0"/>
-              <a:buChar char="•"/>
-            </a:pPr>
-            <a:r>
-              <a:rPr lang="en-US" dirty="0"/>
-              <a:t>Layout model</a:t>
-            </a:r>
-          </a:p>
-          <a:p>
-            <a:pPr marL="171450" indent="-171450">
-              <a:buFont typeface="Arial" panose="020B0604020202020204" pitchFamily="34" charset="0"/>
-              <a:buChar char="•"/>
-            </a:pPr>
-            <a:r>
-              <a:rPr lang="en-US" dirty="0"/>
-              <a:t>OCR model</a:t>
-            </a:r>
-          </a:p>
-          <a:p>
-            <a:pPr marL="171450" indent="-171450">
-              <a:buFont typeface="Arial" panose="020B0604020202020204" pitchFamily="34" charset="0"/>
-              <a:buChar char="•"/>
-            </a:pPr>
-            <a:r>
-              <a:rPr lang="en-US" dirty="0"/>
-              <a:t>Table parser</a:t>
-            </a:r>
-            <a:endParaRPr lang="en-VN" dirty="0"/>
-          </a:p>
-        </p:txBody>
-      </p:sp>
-      <p:sp>
-        <p:nvSpPr>
-          <p:cNvPr id="11" name="TextBox 10">
-            <a:extLst>
-              <a:ext uri="{FF2B5EF4-FFF2-40B4-BE49-F238E27FC236}">
-                <a16:creationId xmlns:a16="http://schemas.microsoft.com/office/drawing/2014/main" id="{9157A733-1343-A859-1ACC-20331E20D4AA}"/>
-              </a:ext>
-            </a:extLst>
-          </p:cNvPr>
-          <p:cNvSpPr txBox="1"/>
+        </p:spPr>
+      </p:pic>
+      <p:pic>
+        <p:nvPicPr>
+          <p:cNvPr id="15" name="Picture 14"/>
+          <p:cNvPicPr>
+            <a:picLocks noChangeAspect="1"/>
+          </p:cNvPicPr>
           <p:nvPr/>
-        </p:nvSpPr>
-        <p:spPr>
-          <a:xfrm>
-            <a:off x="666750" y="2376100"/>
-            <a:ext cx="6096000" cy="1754326"/>
+        </p:nvPicPr>
+        <p:blipFill>
+          <a:blip r:embed="rId5"/>
+          <a:stretch>
+            <a:fillRect/>
+          </a:stretch>
+        </p:blipFill>
+        <p:spPr>
+          <a:xfrm>
+            <a:off x="6430645" y="354330"/>
+            <a:ext cx="4651375" cy="2982595"/>
           </a:xfrm>
           <a:prstGeom prst="rect">
             <a:avLst/>
           </a:prstGeom>
-          <a:noFill/>
-        </p:spPr>
-        <p:txBody>
-          <a:bodyPr wrap="square">
-            <a:spAutoFit/>
-          </a:bodyPr>
-          <a:lstStyle/>
-          <a:p>
-            <a:r>
-              <a:rPr lang="en-VN" dirty="0"/>
-              <a:t>Dependency when installing </a:t>
-            </a:r>
-            <a:r>
-              <a:rPr lang="en-VN" b="1" dirty="0"/>
-              <a:t>docstrange[web]</a:t>
-            </a:r>
-            <a:endParaRPr lang="en-VN" dirty="0"/>
-          </a:p>
-          <a:p>
-            <a:r>
-              <a:rPr lang="en-VN" dirty="0"/>
-              <a:t>+ DocStrange</a:t>
-            </a:r>
-          </a:p>
-          <a:p>
-            <a:r>
-              <a:rPr lang="en-VN" dirty="0"/>
-              <a:t>+ FastAPI server</a:t>
-            </a:r>
-          </a:p>
-          <a:p>
-            <a:r>
-              <a:rPr lang="en-VN" dirty="0"/>
-              <a:t>+ Uvicorn runtime</a:t>
-            </a:r>
-          </a:p>
-          <a:p>
-            <a:r>
-              <a:rPr lang="en-VN" dirty="0"/>
-              <a:t>+ Upload handling</a:t>
-            </a:r>
-          </a:p>
-          <a:p>
-            <a:r>
-              <a:rPr lang="en-VN" dirty="0"/>
-              <a:t>+ API schema/validation</a:t>
-            </a:r>
-          </a:p>
-        </p:txBody>
-      </p:sp>
-      <p:sp>
-        <p:nvSpPr>
-          <p:cNvPr id="3" name="TextBox 2">
-            <a:extLst>
-              <a:ext uri="{FF2B5EF4-FFF2-40B4-BE49-F238E27FC236}">
-                <a16:creationId xmlns:a16="http://schemas.microsoft.com/office/drawing/2014/main" id="{469C4048-3119-6FE9-A23A-61B8F5C76769}"/>
-              </a:ext>
-            </a:extLst>
-          </p:cNvPr>
-          <p:cNvSpPr txBox="1"/>
+          <a:ln>
+            <a:solidFill>
+              <a:schemeClr val="tx1"/>
+            </a:solidFill>
+          </a:ln>
+        </p:spPr>
+      </p:pic>
+      <p:pic>
+        <p:nvPicPr>
+          <p:cNvPr id="5" name="Picture 4"/>
+          <p:cNvPicPr>
+            <a:picLocks noChangeAspect="1"/>
+          </p:cNvPicPr>
           <p:nvPr/>
-        </p:nvSpPr>
-        <p:spPr>
-          <a:xfrm>
-            <a:off x="666750" y="4431566"/>
-            <a:ext cx="6096000" cy="369332"/>
+        </p:nvPicPr>
+        <p:blipFill>
+          <a:blip r:embed="rId6"/>
+          <a:srcRect l="1125"/>
+          <a:stretch>
+            <a:fillRect/>
+          </a:stretch>
+        </p:blipFill>
+        <p:spPr>
+          <a:xfrm>
+            <a:off x="5503545" y="3608705"/>
+            <a:ext cx="6249035" cy="2967990"/>
           </a:xfrm>
           <a:prstGeom prst="rect">
             <a:avLst/>
           </a:prstGeom>
-          <a:noFill/>
-        </p:spPr>
-        <p:txBody>
-          <a:bodyPr wrap="square">
-            <a:spAutoFit/>
-          </a:bodyPr>
-          <a:lstStyle/>
-          <a:p>
-            <a:r>
-              <a:rPr lang="en-US" dirty="0"/>
-              <a:t>The web version currently supports </a:t>
-            </a:r>
-            <a:r>
-              <a:rPr lang="en-US" b="1" dirty="0"/>
-              <a:t>cloud processing only</a:t>
-            </a:r>
-            <a:endParaRPr lang="en-US" dirty="0"/>
-          </a:p>
-        </p:txBody>
-      </p:sp>
+        </p:spPr>
+      </p:pic>
     </p:spTree>
-    <p:extLst>
-      <p:ext uri="{BB962C8B-B14F-4D97-AF65-F5344CB8AC3E}">
-        <p14:creationId xmlns:p14="http://schemas.microsoft.com/office/powerpoint/2010/main" val="2172411289"/>
-      </p:ext>
-    </p:extLst>
   </p:cSld>
   <p:clrMapOvr>
     <a:masterClrMapping/>
@@ -7660,13 +7602,260 @@
       </p:grpSpPr>
       <p:sp>
         <p:nvSpPr>
-          <p:cNvPr id="2" name="Title 1">
-            <a:extLst>
-              <a:ext uri="{FF2B5EF4-FFF2-40B4-BE49-F238E27FC236}">
-                <a16:creationId xmlns:a16="http://schemas.microsoft.com/office/drawing/2014/main" id="{96599633-8403-1CC1-ED22-DE6C9489E013}"/>
-              </a:ext>
-            </a:extLst>
-          </p:cNvPr>
+          <p:cNvPr id="5" name="TextBox 4"/>
+          <p:cNvSpPr txBox="1"/>
+          <p:nvPr/>
+        </p:nvSpPr>
+        <p:spPr>
+          <a:xfrm>
+            <a:off x="103909" y="225632"/>
+            <a:ext cx="6097978" cy="369332"/>
+          </a:xfrm>
+          <a:prstGeom prst="rect">
+            <a:avLst/>
+          </a:prstGeom>
+          <a:noFill/>
+        </p:spPr>
+        <p:txBody>
+          <a:bodyPr wrap="square">
+            <a:spAutoFit/>
+          </a:bodyPr>
+          <a:lstStyle/>
+          <a:p>
+            <a:r>
+              <a:rPr lang="en-US" dirty="0"/>
+              <a:t>Local REST API mode</a:t>
+            </a:r>
+            <a:endParaRPr lang="en-US" dirty="0"/>
+          </a:p>
+        </p:txBody>
+      </p:sp>
+      <p:pic>
+        <p:nvPicPr>
+          <p:cNvPr id="6" name="Picture 5"/>
+          <p:cNvPicPr>
+            <a:picLocks noChangeAspect="1"/>
+          </p:cNvPicPr>
+          <p:nvPr/>
+        </p:nvPicPr>
+        <p:blipFill>
+          <a:blip r:embed="rId1"/>
+          <a:stretch>
+            <a:fillRect/>
+          </a:stretch>
+        </p:blipFill>
+        <p:spPr>
+          <a:xfrm>
+            <a:off x="192972" y="689965"/>
+            <a:ext cx="4293452" cy="1367435"/>
+          </a:xfrm>
+          <a:prstGeom prst="rect">
+            <a:avLst/>
+          </a:prstGeom>
+        </p:spPr>
+      </p:pic>
+      <p:sp>
+        <p:nvSpPr>
+          <p:cNvPr id="9" name="TextBox 8"/>
+          <p:cNvSpPr txBox="1"/>
+          <p:nvPr/>
+        </p:nvSpPr>
+        <p:spPr>
+          <a:xfrm>
+            <a:off x="5479256" y="689965"/>
+            <a:ext cx="6100762" cy="1200329"/>
+          </a:xfrm>
+          <a:prstGeom prst="rect">
+            <a:avLst/>
+          </a:prstGeom>
+          <a:noFill/>
+        </p:spPr>
+        <p:txBody>
+          <a:bodyPr wrap="square">
+            <a:spAutoFit/>
+          </a:bodyPr>
+          <a:lstStyle/>
+          <a:p>
+            <a:r>
+              <a:rPr lang="en-US" dirty="0"/>
+              <a:t>The REST server uses the </a:t>
+            </a:r>
+            <a:r>
+              <a:rPr lang="en-US" b="1" dirty="0"/>
+              <a:t>same models as local mode</a:t>
+            </a:r>
+            <a:r>
+              <a:rPr lang="en-US" dirty="0"/>
+              <a:t>:</a:t>
+            </a:r>
+            <a:endParaRPr lang="en-US" dirty="0"/>
+          </a:p>
+          <a:p>
+            <a:pPr marL="171450" indent="-171450">
+              <a:buFont typeface="Arial" panose="020B0604020202020204" pitchFamily="34" charset="0"/>
+              <a:buChar char="•"/>
+            </a:pPr>
+            <a:r>
+              <a:rPr lang="en-US" dirty="0"/>
+              <a:t>Layout model</a:t>
+            </a:r>
+            <a:endParaRPr lang="en-US" dirty="0"/>
+          </a:p>
+          <a:p>
+            <a:pPr marL="171450" indent="-171450">
+              <a:buFont typeface="Arial" panose="020B0604020202020204" pitchFamily="34" charset="0"/>
+              <a:buChar char="•"/>
+            </a:pPr>
+            <a:r>
+              <a:rPr lang="en-US" dirty="0"/>
+              <a:t>OCR model</a:t>
+            </a:r>
+            <a:endParaRPr lang="en-US" dirty="0"/>
+          </a:p>
+          <a:p>
+            <a:pPr marL="171450" indent="-171450">
+              <a:buFont typeface="Arial" panose="020B0604020202020204" pitchFamily="34" charset="0"/>
+              <a:buChar char="•"/>
+            </a:pPr>
+            <a:r>
+              <a:rPr lang="en-US" dirty="0"/>
+              <a:t>Table parser</a:t>
+            </a:r>
+            <a:endParaRPr lang="en-US" dirty="0"/>
+          </a:p>
+        </p:txBody>
+      </p:sp>
+      <p:sp>
+        <p:nvSpPr>
+          <p:cNvPr id="11" name="TextBox 10"/>
+          <p:cNvSpPr txBox="1"/>
+          <p:nvPr/>
+        </p:nvSpPr>
+        <p:spPr>
+          <a:xfrm>
+            <a:off x="666750" y="2376100"/>
+            <a:ext cx="6096000" cy="1754326"/>
+          </a:xfrm>
+          <a:prstGeom prst="rect">
+            <a:avLst/>
+          </a:prstGeom>
+          <a:noFill/>
+        </p:spPr>
+        <p:txBody>
+          <a:bodyPr wrap="square">
+            <a:spAutoFit/>
+          </a:bodyPr>
+          <a:lstStyle/>
+          <a:p>
+            <a:r>
+              <a:rPr lang="en-US" dirty="0"/>
+              <a:t>Dependency when installing </a:t>
+            </a:r>
+            <a:r>
+              <a:rPr lang="en-US" b="1" dirty="0"/>
+              <a:t>docstrange[web]</a:t>
+            </a:r>
+            <a:endParaRPr lang="en-US" dirty="0"/>
+          </a:p>
+          <a:p>
+            <a:r>
+              <a:rPr lang="en-US" dirty="0"/>
+              <a:t>+ DocStrange</a:t>
+            </a:r>
+            <a:endParaRPr lang="en-US" dirty="0"/>
+          </a:p>
+          <a:p>
+            <a:r>
+              <a:rPr lang="en-US" dirty="0"/>
+              <a:t>+ FastAPI server</a:t>
+            </a:r>
+            <a:endParaRPr lang="en-US" dirty="0"/>
+          </a:p>
+          <a:p>
+            <a:r>
+              <a:rPr lang="en-US" dirty="0"/>
+              <a:t>+ Uvicorn runtime</a:t>
+            </a:r>
+            <a:endParaRPr lang="en-US" dirty="0"/>
+          </a:p>
+          <a:p>
+            <a:r>
+              <a:rPr lang="en-US" dirty="0"/>
+              <a:t>+ Upload handling</a:t>
+            </a:r>
+            <a:endParaRPr lang="en-US" dirty="0"/>
+          </a:p>
+          <a:p>
+            <a:r>
+              <a:rPr lang="en-US" dirty="0"/>
+              <a:t>+ API schema/validation</a:t>
+            </a:r>
+            <a:endParaRPr lang="en-US" dirty="0"/>
+          </a:p>
+        </p:txBody>
+      </p:sp>
+      <p:sp>
+        <p:nvSpPr>
+          <p:cNvPr id="3" name="TextBox 2"/>
+          <p:cNvSpPr txBox="1"/>
+          <p:nvPr/>
+        </p:nvSpPr>
+        <p:spPr>
+          <a:xfrm>
+            <a:off x="666750" y="4431566"/>
+            <a:ext cx="6096000" cy="369332"/>
+          </a:xfrm>
+          <a:prstGeom prst="rect">
+            <a:avLst/>
+          </a:prstGeom>
+          <a:noFill/>
+        </p:spPr>
+        <p:txBody>
+          <a:bodyPr wrap="square">
+            <a:spAutoFit/>
+          </a:bodyPr>
+          <a:lstStyle/>
+          <a:p>
+            <a:r>
+              <a:rPr lang="en-US" dirty="0"/>
+              <a:t>The web version currently supports </a:t>
+            </a:r>
+            <a:r>
+              <a:rPr lang="en-US" b="1" dirty="0"/>
+              <a:t>cloud processing only</a:t>
+            </a:r>
+            <a:endParaRPr lang="en-US" dirty="0"/>
+          </a:p>
+        </p:txBody>
+      </p:sp>
+    </p:spTree>
+  </p:cSld>
+  <p:clrMapOvr>
+    <a:masterClrMapping/>
+  </p:clrMapOvr>
+</p:sld>
+</file>
+
+<file path=ppt/slides/slide9.xml><?xml version="1.0" encoding="utf-8"?>
+<p:sld xmlns:a="http://schemas.openxmlformats.org/drawingml/2006/main" xmlns:r="http://schemas.openxmlformats.org/officeDocument/2006/relationships" xmlns:p="http://schemas.openxmlformats.org/presentationml/2006/main">
+  <p:cSld>
+    <p:spTree>
+      <p:nvGrpSpPr>
+        <p:cNvPr id="1" name=""/>
+        <p:cNvGrpSpPr/>
+        <p:nvPr/>
+      </p:nvGrpSpPr>
+      <p:grpSpPr>
+        <a:xfrm>
+          <a:off x="0" y="0"/>
+          <a:ext cx="0" cy="0"/>
+          <a:chOff x="0" y="0"/>
+          <a:chExt cx="0" cy="0"/>
+        </a:xfrm>
+      </p:grpSpPr>
+      <p:sp>
+        <p:nvSpPr>
+          <p:cNvPr id="2" name="Title 1"/>
           <p:cNvSpPr>
             <a:spLocks noGrp="1"/>
           </p:cNvSpPr>
@@ -7687,28 +7876,18 @@
               <a:rPr lang="en-US" dirty="0"/>
               <a:t> time statistics</a:t>
             </a:r>
+            <a:endParaRPr lang="en-US" dirty="0"/>
           </a:p>
         </p:txBody>
       </p:sp>
       <p:graphicFrame>
         <p:nvGraphicFramePr>
-          <p:cNvPr id="5" name="Content Placeholder 4">
-            <a:extLst>
-              <a:ext uri="{FF2B5EF4-FFF2-40B4-BE49-F238E27FC236}">
-                <a16:creationId xmlns:a16="http://schemas.microsoft.com/office/drawing/2014/main" id="{C7659487-4BCC-FD3C-4D17-564CB0C41E85}"/>
-              </a:ext>
-            </a:extLst>
-          </p:cNvPr>
+          <p:cNvPr id="5" name="Content Placeholder 4"/>
           <p:cNvGraphicFramePr>
             <a:graphicFrameLocks noGrp="1"/>
           </p:cNvGraphicFramePr>
           <p:nvPr>
             <p:ph idx="1"/>
-            <p:extLst>
-              <p:ext uri="{D42A27DB-BD31-4B8C-83A1-F6EECF244321}">
-                <p14:modId xmlns:p14="http://schemas.microsoft.com/office/powerpoint/2010/main" val="3710003334"/>
-              </p:ext>
-            </p:extLst>
           </p:nvPr>
         </p:nvGraphicFramePr>
         <p:xfrm>
@@ -7722,41 +7901,11 @@
                 <a:tableStyleId>{08FB837D-C827-4EFA-A057-4D05807E0F7C}</a:tableStyleId>
               </a:tblPr>
               <a:tblGrid>
-                <a:gridCol w="1971675">
-                  <a:extLst>
-                    <a:ext uri="{9D8B030D-6E8A-4147-A177-3AD203B41FA5}">
-                      <a16:colId xmlns:a16="http://schemas.microsoft.com/office/drawing/2014/main" val="1062682691"/>
-                    </a:ext>
-                  </a:extLst>
-                </a:gridCol>
-                <a:gridCol w="1672936">
-                  <a:extLst>
-                    <a:ext uri="{9D8B030D-6E8A-4147-A177-3AD203B41FA5}">
-                      <a16:colId xmlns:a16="http://schemas.microsoft.com/office/drawing/2014/main" val="520516364"/>
-                    </a:ext>
-                  </a:extLst>
-                </a:gridCol>
-                <a:gridCol w="1601239">
-                  <a:extLst>
-                    <a:ext uri="{9D8B030D-6E8A-4147-A177-3AD203B41FA5}">
-                      <a16:colId xmlns:a16="http://schemas.microsoft.com/office/drawing/2014/main" val="2764188531"/>
-                    </a:ext>
-                  </a:extLst>
-                </a:gridCol>
-                <a:gridCol w="2354060">
-                  <a:extLst>
-                    <a:ext uri="{9D8B030D-6E8A-4147-A177-3AD203B41FA5}">
-                      <a16:colId xmlns:a16="http://schemas.microsoft.com/office/drawing/2014/main" val="3205198855"/>
-                    </a:ext>
-                  </a:extLst>
-                </a:gridCol>
-                <a:gridCol w="2915689">
-                  <a:extLst>
-                    <a:ext uri="{9D8B030D-6E8A-4147-A177-3AD203B41FA5}">
-                      <a16:colId xmlns:a16="http://schemas.microsoft.com/office/drawing/2014/main" val="2335790300"/>
-                    </a:ext>
-                  </a:extLst>
-                </a:gridCol>
+                <a:gridCol w="1971675"/>
+                <a:gridCol w="1672936"/>
+                <a:gridCol w="1601239"/>
+                <a:gridCol w="2354060"/>
+                <a:gridCol w="2915689"/>
               </a:tblGrid>
               <a:tr h="522248">
                 <a:tc>
@@ -7904,11 +8053,6 @@
                     </a:solidFill>
                   </a:tcPr>
                 </a:tc>
-                <a:extLst>
-                  <a:ext uri="{0D108BD9-81ED-4DB2-BD59-A6C34878D82A}">
-                    <a16:rowId xmlns:a16="http://schemas.microsoft.com/office/drawing/2014/main" val="2162480189"/>
-                  </a:ext>
-                </a:extLst>
               </a:tr>
               <a:tr h="265237">
                 <a:tc rowSpan="8">
@@ -8067,31 +8211,12 @@
                     </a:solidFill>
                   </a:tcPr>
                 </a:tc>
-                <a:extLst>
-                  <a:ext uri="{0D108BD9-81ED-4DB2-BD59-A6C34878D82A}">
-                    <a16:rowId xmlns:a16="http://schemas.microsoft.com/office/drawing/2014/main" val="3537339269"/>
-                  </a:ext>
-                </a:extLst>
               </a:tr>
               <a:tr h="265237">
                 <a:tc vMerge="1">
-                  <a:txBody>
-                    <a:bodyPr/>
-                    <a:lstStyle/>
-                    <a:p>
-                      <a:endParaRPr lang="en-US"/>
-                    </a:p>
-                  </a:txBody>
                   <a:tcPr/>
                 </a:tc>
                 <a:tc vMerge="1">
-                  <a:txBody>
-                    <a:bodyPr/>
-                    <a:lstStyle/>
-                    <a:p>
-                      <a:endParaRPr lang="en-US"/>
-                    </a:p>
-                  </a:txBody>
                   <a:tcPr/>
                 </a:tc>
                 <a:tc>
@@ -8180,31 +8305,12 @@
                     </a:solidFill>
                   </a:tcPr>
                 </a:tc>
-                <a:extLst>
-                  <a:ext uri="{0D108BD9-81ED-4DB2-BD59-A6C34878D82A}">
-                    <a16:rowId xmlns:a16="http://schemas.microsoft.com/office/drawing/2014/main" val="1393740698"/>
-                  </a:ext>
-                </a:extLst>
               </a:tr>
               <a:tr h="265237">
                 <a:tc vMerge="1">
-                  <a:txBody>
-                    <a:bodyPr/>
-                    <a:lstStyle/>
-                    <a:p>
-                      <a:endParaRPr lang="en-US"/>
-                    </a:p>
-                  </a:txBody>
                   <a:tcPr/>
                 </a:tc>
                 <a:tc vMerge="1">
-                  <a:txBody>
-                    <a:bodyPr/>
-                    <a:lstStyle/>
-                    <a:p>
-                      <a:endParaRPr lang="en-US"/>
-                    </a:p>
-                  </a:txBody>
                   <a:tcPr/>
                 </a:tc>
                 <a:tc>
@@ -8293,31 +8399,12 @@
                     </a:solidFill>
                   </a:tcPr>
                 </a:tc>
-                <a:extLst>
-                  <a:ext uri="{0D108BD9-81ED-4DB2-BD59-A6C34878D82A}">
-                    <a16:rowId xmlns:a16="http://schemas.microsoft.com/office/drawing/2014/main" val="3496002061"/>
-                  </a:ext>
-                </a:extLst>
               </a:tr>
               <a:tr h="265237">
                 <a:tc vMerge="1">
-                  <a:txBody>
-                    <a:bodyPr/>
-                    <a:lstStyle/>
-                    <a:p>
-                      <a:endParaRPr lang="en-US"/>
-                    </a:p>
-                  </a:txBody>
                   <a:tcPr/>
                 </a:tc>
                 <a:tc vMerge="1">
-                  <a:txBody>
-                    <a:bodyPr/>
-                    <a:lstStyle/>
-                    <a:p>
-                      <a:endParaRPr lang="en-US"/>
-                    </a:p>
-                  </a:txBody>
                   <a:tcPr/>
                 </a:tc>
                 <a:tc>
@@ -8409,21 +8496,9 @@
                     </a:solidFill>
                   </a:tcPr>
                 </a:tc>
-                <a:extLst>
-                  <a:ext uri="{0D108BD9-81ED-4DB2-BD59-A6C34878D82A}">
-                    <a16:rowId xmlns:a16="http://schemas.microsoft.com/office/drawing/2014/main" val="1406428410"/>
-                  </a:ext>
-                </a:extLst>
               </a:tr>
               <a:tr h="265237">
                 <a:tc vMerge="1">
-                  <a:txBody>
-                    <a:bodyPr/>
-                    <a:lstStyle/>
-                    <a:p>
-                      <a:endParaRPr lang="en-US"/>
-                    </a:p>
-                  </a:txBody>
                   <a:tcPr/>
                 </a:tc>
                 <a:tc rowSpan="4">
@@ -8542,31 +8617,12 @@
                     </a:solidFill>
                   </a:tcPr>
                 </a:tc>
-                <a:extLst>
-                  <a:ext uri="{0D108BD9-81ED-4DB2-BD59-A6C34878D82A}">
-                    <a16:rowId xmlns:a16="http://schemas.microsoft.com/office/drawing/2014/main" val="1497425179"/>
-                  </a:ext>
-                </a:extLst>
               </a:tr>
               <a:tr h="265237">
                 <a:tc vMerge="1">
-                  <a:txBody>
-                    <a:bodyPr/>
-                    <a:lstStyle/>
-                    <a:p>
-                      <a:endParaRPr lang="en-US"/>
-                    </a:p>
-                  </a:txBody>
                   <a:tcPr/>
                 </a:tc>
                 <a:tc vMerge="1">
-                  <a:txBody>
-                    <a:bodyPr/>
-                    <a:lstStyle/>
-                    <a:p>
-                      <a:endParaRPr lang="en-US"/>
-                    </a:p>
-                  </a:txBody>
                   <a:tcPr/>
                 </a:tc>
                 <a:tc>
@@ -8656,31 +8712,12 @@
                     </a:solidFill>
                   </a:tcPr>
                 </a:tc>
-                <a:extLst>
-                  <a:ext uri="{0D108BD9-81ED-4DB2-BD59-A6C34878D82A}">
-                    <a16:rowId xmlns:a16="http://schemas.microsoft.com/office/drawing/2014/main" val="610862730"/>
-                  </a:ext>
-                </a:extLst>
               </a:tr>
               <a:tr h="265237">
                 <a:tc vMerge="1">
-                  <a:txBody>
-                    <a:bodyPr/>
-                    <a:lstStyle/>
-                    <a:p>
-                      <a:endParaRPr lang="en-US"/>
-                    </a:p>
-                  </a:txBody>
                   <a:tcPr/>
                 </a:tc>
                 <a:tc vMerge="1">
-                  <a:txBody>
-                    <a:bodyPr/>
-                    <a:lstStyle/>
-                    <a:p>
-                      <a:endParaRPr lang="en-US"/>
-                    </a:p>
-                  </a:txBody>
                   <a:tcPr/>
                 </a:tc>
                 <a:tc>
@@ -8770,31 +8807,12 @@
                     </a:solidFill>
                   </a:tcPr>
                 </a:tc>
-                <a:extLst>
-                  <a:ext uri="{0D108BD9-81ED-4DB2-BD59-A6C34878D82A}">
-                    <a16:rowId xmlns:a16="http://schemas.microsoft.com/office/drawing/2014/main" val="4063629452"/>
-                  </a:ext>
-                </a:extLst>
               </a:tr>
               <a:tr h="265237">
                 <a:tc vMerge="1">
-                  <a:txBody>
-                    <a:bodyPr/>
-                    <a:lstStyle/>
-                    <a:p>
-                      <a:endParaRPr lang="en-US"/>
-                    </a:p>
-                  </a:txBody>
                   <a:tcPr/>
                 </a:tc>
                 <a:tc vMerge="1">
-                  <a:txBody>
-                    <a:bodyPr/>
-                    <a:lstStyle/>
-                    <a:p>
-                      <a:endParaRPr lang="en-US"/>
-                    </a:p>
-                  </a:txBody>
                   <a:tcPr/>
                 </a:tc>
                 <a:tc>
@@ -8890,124 +8908,12 @@
                     </a:solidFill>
                   </a:tcPr>
                 </a:tc>
-                <a:extLst>
-                  <a:ext uri="{0D108BD9-81ED-4DB2-BD59-A6C34878D82A}">
-                    <a16:rowId xmlns:a16="http://schemas.microsoft.com/office/drawing/2014/main" val="449404069"/>
-                  </a:ext>
-                </a:extLst>
               </a:tr>
             </a:tbl>
           </a:graphicData>
         </a:graphic>
       </p:graphicFrame>
     </p:spTree>
-    <p:extLst>
-      <p:ext uri="{BB962C8B-B14F-4D97-AF65-F5344CB8AC3E}">
-        <p14:creationId xmlns:p14="http://schemas.microsoft.com/office/powerpoint/2010/main" val="1160138076"/>
-      </p:ext>
-    </p:extLst>
-  </p:cSld>
-  <p:clrMapOvr>
-    <a:masterClrMapping/>
-  </p:clrMapOvr>
-</p:sld>
-</file>
-
-<file path=ppt/slides/slide9.xml><?xml version="1.0" encoding="utf-8"?>
-<p:sld xmlns:a="http://schemas.openxmlformats.org/drawingml/2006/main" xmlns:r="http://schemas.openxmlformats.org/officeDocument/2006/relationships" xmlns:p="http://schemas.openxmlformats.org/presentationml/2006/main">
-  <p:cSld>
-    <p:spTree>
-      <p:nvGrpSpPr>
-        <p:cNvPr id="1" name=""/>
-        <p:cNvGrpSpPr/>
-        <p:nvPr/>
-      </p:nvGrpSpPr>
-      <p:grpSpPr>
-        <a:xfrm>
-          <a:off x="0" y="0"/>
-          <a:ext cx="0" cy="0"/>
-          <a:chOff x="0" y="0"/>
-          <a:chExt cx="0" cy="0"/>
-        </a:xfrm>
-      </p:grpSpPr>
-      <p:pic>
-        <p:nvPicPr>
-          <p:cNvPr id="4" name="Picture 3"/>
-          <p:cNvPicPr>
-            <a:picLocks noChangeAspect="1"/>
-          </p:cNvPicPr>
-          <p:nvPr/>
-        </p:nvPicPr>
-        <p:blipFill>
-          <a:blip r:embed="rId3"/>
-          <a:stretch>
-            <a:fillRect/>
-          </a:stretch>
-        </p:blipFill>
-        <p:spPr>
-          <a:xfrm>
-            <a:off x="0" y="0"/>
-            <a:ext cx="6668431" cy="1362265"/>
-          </a:xfrm>
-          <a:prstGeom prst="rect">
-            <a:avLst/>
-          </a:prstGeom>
-        </p:spPr>
-      </p:pic>
-      <p:pic>
-        <p:nvPicPr>
-          <p:cNvPr id="5" name="Picture 4"/>
-          <p:cNvPicPr>
-            <a:picLocks noChangeAspect="1"/>
-          </p:cNvPicPr>
-          <p:nvPr/>
-        </p:nvPicPr>
-        <p:blipFill>
-          <a:blip r:embed="rId4"/>
-          <a:stretch>
-            <a:fillRect/>
-          </a:stretch>
-        </p:blipFill>
-        <p:spPr>
-          <a:xfrm>
-            <a:off x="1" y="3296734"/>
-            <a:ext cx="5669279" cy="3561266"/>
-          </a:xfrm>
-          <a:prstGeom prst="rect">
-            <a:avLst/>
-          </a:prstGeom>
-        </p:spPr>
-      </p:pic>
-      <p:pic>
-        <p:nvPicPr>
-          <p:cNvPr id="6" name="Picture 5"/>
-          <p:cNvPicPr>
-            <a:picLocks noChangeAspect="1"/>
-          </p:cNvPicPr>
-          <p:nvPr/>
-        </p:nvPicPr>
-        <p:blipFill>
-          <a:blip r:embed="rId5"/>
-          <a:stretch>
-            <a:fillRect/>
-          </a:stretch>
-        </p:blipFill>
-        <p:spPr>
-          <a:xfrm>
-            <a:off x="5779008" y="2074431"/>
-            <a:ext cx="6412992" cy="4783569"/>
-          </a:xfrm>
-          <a:prstGeom prst="rect">
-            <a:avLst/>
-          </a:prstGeom>
-        </p:spPr>
-      </p:pic>
-    </p:spTree>
-    <p:extLst>
-      <p:ext uri="{BB962C8B-B14F-4D97-AF65-F5344CB8AC3E}">
-        <p14:creationId xmlns:p14="http://schemas.microsoft.com/office/powerpoint/2010/main" val="1537306627"/>
-      </p:ext>
-    </p:extLst>
   </p:cSld>
   <p:clrMapOvr>
     <a:masterClrMapping/>
@@ -9058,7 +8964,7 @@
     </a:clrScheme>
     <a:fontScheme name="Office">
       <a:majorFont>
-        <a:latin typeface="Aptos Display" panose="02110004020202020204"/>
+        <a:latin typeface="Aptos Display"/>
         <a:ea typeface=""/>
         <a:cs typeface=""/>
         <a:font script="Jpan" typeface="游ゴシック Light"/>
@@ -9091,26 +8997,9 @@
         <a:font script="Viet" typeface="Times New Roman"/>
         <a:font script="Uigh" typeface="Microsoft Uighur"/>
         <a:font script="Geor" typeface="Sylfaen"/>
-        <a:font script="Armn" typeface="Arial"/>
-        <a:font script="Bugi" typeface="Leelawadee UI"/>
-        <a:font script="Bopo" typeface="Microsoft JhengHei"/>
-        <a:font script="Java" typeface="Javanese Text"/>
-        <a:font script="Lisu" typeface="Segoe UI"/>
-        <a:font script="Mymr" typeface="Myanmar Text"/>
-        <a:font script="Nkoo" typeface="Ebrima"/>
-        <a:font script="Olck" typeface="Nirmala UI"/>
-        <a:font script="Osma" typeface="Ebrima"/>
-        <a:font script="Phag" typeface="Phagspa"/>
-        <a:font script="Syrn" typeface="Estrangelo Edessa"/>
-        <a:font script="Syrj" typeface="Estrangelo Edessa"/>
-        <a:font script="Syre" typeface="Estrangelo Edessa"/>
-        <a:font script="Sora" typeface="Nirmala UI"/>
-        <a:font script="Tale" typeface="Microsoft Tai Le"/>
-        <a:font script="Talu" typeface="Microsoft New Tai Lue"/>
-        <a:font script="Tfng" typeface="Ebrima"/>
       </a:majorFont>
       <a:minorFont>
-        <a:latin typeface="Aptos" panose="02110004020202020204"/>
+        <a:latin typeface="Aptos"/>
         <a:ea typeface=""/>
         <a:cs typeface=""/>
         <a:font script="Jpan" typeface="游ゴシック"/>
@@ -9143,23 +9032,6 @@
         <a:font script="Viet" typeface="Arial"/>
         <a:font script="Uigh" typeface="Microsoft Uighur"/>
         <a:font script="Geor" typeface="Sylfaen"/>
-        <a:font script="Armn" typeface="Arial"/>
-        <a:font script="Bugi" typeface="Leelawadee UI"/>
-        <a:font script="Bopo" typeface="Microsoft JhengHei"/>
-        <a:font script="Java" typeface="Javanese Text"/>
-        <a:font script="Lisu" typeface="Segoe UI"/>
-        <a:font script="Mymr" typeface="Myanmar Text"/>
-        <a:font script="Nkoo" typeface="Ebrima"/>
-        <a:font script="Olck" typeface="Nirmala UI"/>
-        <a:font script="Osma" typeface="Ebrima"/>
-        <a:font script="Phag" typeface="Phagspa"/>
-        <a:font script="Syrn" typeface="Estrangelo Edessa"/>
-        <a:font script="Syrj" typeface="Estrangelo Edessa"/>
-        <a:font script="Syre" typeface="Estrangelo Edessa"/>
-        <a:font script="Sora" typeface="Nirmala UI"/>
-        <a:font script="Tale" typeface="Microsoft Tai Le"/>
-        <a:font script="Talu" typeface="Microsoft New Tai Lue"/>
-        <a:font script="Tfng" typeface="Ebrima"/>
       </a:minorFont>
     </a:fontScheme>
     <a:fmtScheme name="Office">
@@ -9321,10 +9193,9 @@
       </a:style>
     </a:lnDef>
   </a:objectDefaults>
-  <a:extraClrSchemeLst/>
   <a:extLst>
     <a:ext uri="{05A4C25C-085E-4340-85A3-A5531E510DB2}">
-      <thm15:themeFamily xmlns:thm15="http://schemas.microsoft.com/office/thememl/2012/main" name="Office Theme" id="{2E142A2C-CD16-42D6-873A-C26D2A0506FA}" vid="{1BDDFF52-6CD6-40A5-AB3C-68EB2F1E4D0A}"/>
+      <thm15:themeFamily xmlns:thm15="http://schemas.microsoft.com/office/thememl/2012/main" name="Office Theme" id="{62F939B6-93AF-4DB8-9C6B-D6C7DFDC589F}" vid="{4A3C46E8-61CC-4603-A589-7422A47A8E4A}"/>
     </a:ext>
   </a:extLst>
 </a:theme>
@@ -9373,7 +9244,7 @@
     </a:clrScheme>
     <a:fontScheme name="Office">
       <a:majorFont>
-        <a:latin typeface="Aptos Display" panose="02110004020202020204"/>
+        <a:latin typeface="Aptos Display"/>
         <a:ea typeface=""/>
         <a:cs typeface=""/>
         <a:font script="Jpan" typeface="游ゴシック Light"/>
@@ -9406,26 +9277,9 @@
         <a:font script="Viet" typeface="Times New Roman"/>
         <a:font script="Uigh" typeface="Microsoft Uighur"/>
         <a:font script="Geor" typeface="Sylfaen"/>
-        <a:font script="Armn" typeface="Arial"/>
-        <a:font script="Bugi" typeface="Leelawadee UI"/>
-        <a:font script="Bopo" typeface="Microsoft JhengHei"/>
-        <a:font script="Java" typeface="Javanese Text"/>
-        <a:font script="Lisu" typeface="Segoe UI"/>
-        <a:font script="Mymr" typeface="Myanmar Text"/>
-        <a:font script="Nkoo" typeface="Ebrima"/>
-        <a:font script="Olck" typeface="Nirmala UI"/>
-        <a:font script="Osma" typeface="Ebrima"/>
-        <a:font script="Phag" typeface="Phagspa"/>
-        <a:font script="Syrn" typeface="Estrangelo Edessa"/>
-        <a:font script="Syrj" typeface="Estrangelo Edessa"/>
-        <a:font script="Syre" typeface="Estrangelo Edessa"/>
-        <a:font script="Sora" typeface="Nirmala UI"/>
-        <a:font script="Tale" typeface="Microsoft Tai Le"/>
-        <a:font script="Talu" typeface="Microsoft New Tai Lue"/>
-        <a:font script="Tfng" typeface="Ebrima"/>
       </a:majorFont>
       <a:minorFont>
-        <a:latin typeface="Aptos" panose="02110004020202020204"/>
+        <a:latin typeface="Aptos"/>
         <a:ea typeface=""/>
         <a:cs typeface=""/>
         <a:font script="Jpan" typeface="游ゴシック"/>
@@ -9458,23 +9312,6 @@
         <a:font script="Viet" typeface="Arial"/>
         <a:font script="Uigh" typeface="Microsoft Uighur"/>
         <a:font script="Geor" typeface="Sylfaen"/>
-        <a:font script="Armn" typeface="Arial"/>
-        <a:font script="Bugi" typeface="Leelawadee UI"/>
-        <a:font script="Bopo" typeface="Microsoft JhengHei"/>
-        <a:font script="Java" typeface="Javanese Text"/>
-        <a:font script="Lisu" typeface="Segoe UI"/>
-        <a:font script="Mymr" typeface="Myanmar Text"/>
-        <a:font script="Nkoo" typeface="Ebrima"/>
-        <a:font script="Olck" typeface="Nirmala UI"/>
-        <a:font script="Osma" typeface="Ebrima"/>
-        <a:font script="Phag" typeface="Phagspa"/>
-        <a:font script="Syrn" typeface="Estrangelo Edessa"/>
-        <a:font script="Syrj" typeface="Estrangelo Edessa"/>
-        <a:font script="Syre" typeface="Estrangelo Edessa"/>
-        <a:font script="Sora" typeface="Nirmala UI"/>
-        <a:font script="Tale" typeface="Microsoft Tai Le"/>
-        <a:font script="Talu" typeface="Microsoft New Tai Lue"/>
-        <a:font script="Tfng" typeface="Ebrima"/>
       </a:minorFont>
     </a:fontScheme>
     <a:fmtScheme name="Office">
@@ -9636,10 +9473,9 @@
       </a:style>
     </a:lnDef>
   </a:objectDefaults>
-  <a:extraClrSchemeLst/>
   <a:extLst>
     <a:ext uri="{05A4C25C-085E-4340-85A3-A5531E510DB2}">
-      <thm15:themeFamily xmlns:thm15="http://schemas.microsoft.com/office/thememl/2012/main" name="Office Theme" id="{2E142A2C-CD16-42D6-873A-C26D2A0506FA}" vid="{1BDDFF52-6CD6-40A5-AB3C-68EB2F1E4D0A}"/>
+      <thm15:themeFamily xmlns:thm15="http://schemas.microsoft.com/office/thememl/2012/main" name="Office Theme" id="{62F939B6-93AF-4DB8-9C6B-D6C7DFDC589F}" vid="{4A3C46E8-61CC-4603-A589-7422A47A8E4A}"/>
     </a:ext>
   </a:extLst>
 </a:theme>
